--- a/docs/video-series/03_Algo_MAX_Роль_Ученик.pptx
+++ b/docs/video-series/03_Algo_MAX_Роль_Ученик.pptx
@@ -32,6 +32,9 @@
     <p:sldId id="280" r:id="rId31"/>
     <p:sldId id="281" r:id="rId32"/>
     <p:sldId id="282" r:id="rId33"/>
+    <p:sldId id="283" r:id="rId34"/>
+    <p:sldId id="284" r:id="rId35"/>
+    <p:sldId id="285" r:id="rId36"/>
   </p:sldIdLst>
   <p:sldSz cx="12191695" cy="6858000" type="screen4x3"/>
   <p:notesSz cx="6858000" cy="9144000"/>
@@ -3627,8 +3630,8 @@
         </p:blipFill>
         <p:spPr>
           <a:xfrm>
-            <a:off x="7120294" y="877824"/>
-            <a:ext cx="2492931" cy="5394959"/>
+            <a:off x="7363883" y="877824"/>
+            <a:ext cx="2005752" cy="5394959"/>
           </a:xfrm>
           <a:prstGeom prst="rect">
             <a:avLst/>
@@ -3879,7 +3882,7 @@
                 </a:solidFill>
                 <a:latin typeface="Arial"/>
               </a:rPr>
-              <a:t>Карточка товара</a:t>
+              <a:t>Выбор порядка товаров</a:t>
             </a:r>
           </a:p>
         </p:txBody>
@@ -4057,7 +4060,7 @@
                 </a:solidFill>
                 <a:latin typeface="Arial"/>
               </a:rPr>
-              <a:t>Магазин -&gt; Подробнее</a:t>
+              <a:t>Магазин -&gt; Сортировка</a:t>
             </a:r>
           </a:p>
         </p:txBody>
@@ -4070,8 +4073,8 @@
         </p:nvSpPr>
         <p:spPr>
           <a:xfrm>
-            <a:off x="530352" y="2066543"/>
-            <a:ext cx="3822191" cy="4206240"/>
+            <a:off x="438912" y="2066543"/>
+            <a:ext cx="8321040" cy="4206240"/>
           </a:xfrm>
           <a:prstGeom prst="rect">
             <a:avLst/>
@@ -4115,8 +4118,8 @@
         </p:nvSpPr>
         <p:spPr>
           <a:xfrm>
-            <a:off x="530352" y="2066543"/>
-            <a:ext cx="3822191" cy="292608"/>
+            <a:off x="438912" y="2066543"/>
+            <a:ext cx="8321040" cy="292608"/>
           </a:xfrm>
           <a:prstGeom prst="rect">
             <a:avLst/>
@@ -4158,8 +4161,8 @@
         </p:nvSpPr>
         <p:spPr>
           <a:xfrm>
-            <a:off x="658368" y="2121408"/>
-            <a:ext cx="3566159" cy="182880"/>
+            <a:off x="566928" y="2121408"/>
+            <a:ext cx="8065008" cy="182880"/>
           </a:xfrm>
           <a:prstGeom prst="rect">
             <a:avLst/>
@@ -4190,7 +4193,7 @@
                 </a:solidFill>
                 <a:latin typeface="Arial"/>
               </a:rPr>
-              <a:t>Экран на телефоне</a:t>
+              <a:t>Экран приложения</a:t>
             </a:r>
           </a:p>
         </p:txBody>
@@ -4211,8 +4214,8 @@
         </p:blipFill>
         <p:spPr>
           <a:xfrm>
-            <a:off x="1571034" y="2432303"/>
-            <a:ext cx="1740826" cy="3767327"/>
+            <a:off x="1585569" y="2432303"/>
+            <a:ext cx="6027724" cy="3767327"/>
           </a:xfrm>
           <a:prstGeom prst="rect">
             <a:avLst/>
@@ -4227,7 +4230,7 @@
         </p:nvSpPr>
         <p:spPr>
           <a:xfrm>
-            <a:off x="2212848" y="5368259"/>
+            <a:off x="3165287" y="3145535"/>
             <a:ext cx="457200" cy="457200"/>
           </a:xfrm>
           <a:prstGeom prst="ellipse">
@@ -4270,7 +4273,7 @@
         </p:nvSpPr>
         <p:spPr>
           <a:xfrm>
-            <a:off x="2276856" y="5432267"/>
+            <a:off x="3229295" y="3209543"/>
             <a:ext cx="329184" cy="329184"/>
           </a:xfrm>
           <a:prstGeom prst="ellipse">
@@ -4322,7 +4325,7 @@
         </p:nvSpPr>
         <p:spPr>
           <a:xfrm rot="18900000">
-            <a:off x="2532888" y="5706587"/>
+            <a:off x="3485327" y="3483863"/>
             <a:ext cx="256032" cy="365760"/>
           </a:xfrm>
           <a:prstGeom prst="upArrow">
@@ -4367,8 +4370,8 @@
         </p:nvSpPr>
         <p:spPr>
           <a:xfrm>
-            <a:off x="4645152" y="2066543"/>
-            <a:ext cx="6949440" cy="420624"/>
+            <a:off x="9015984" y="2066543"/>
+            <a:ext cx="2578608" cy="420624"/>
           </a:xfrm>
           <a:prstGeom prst="rect">
             <a:avLst/>
@@ -4410,8 +4413,8 @@
         </p:nvSpPr>
         <p:spPr>
           <a:xfrm>
-            <a:off x="4809744" y="2185416"/>
-            <a:ext cx="6620255" cy="164592"/>
+            <a:off x="9180576" y="2185416"/>
+            <a:ext cx="2249424" cy="164592"/>
           </a:xfrm>
           <a:prstGeom prst="rect">
             <a:avLst/>
@@ -4455,8 +4458,8 @@
         </p:nvSpPr>
         <p:spPr>
           <a:xfrm>
-            <a:off x="4645152" y="2596896"/>
-            <a:ext cx="6949440" cy="1499616"/>
+            <a:off x="9015984" y="2596896"/>
+            <a:ext cx="2578608" cy="1499616"/>
           </a:xfrm>
           <a:prstGeom prst="rect">
             <a:avLst/>
@@ -4500,7 +4503,7 @@
         </p:nvSpPr>
         <p:spPr>
           <a:xfrm>
-            <a:off x="4645152" y="2596896"/>
+            <a:off x="9015984" y="2596896"/>
             <a:ext cx="54864" cy="1499616"/>
           </a:xfrm>
           <a:prstGeom prst="rect">
@@ -4543,7 +4546,7 @@
         </p:nvSpPr>
         <p:spPr>
           <a:xfrm>
-            <a:off x="4809744" y="2734056"/>
+            <a:off x="9180576" y="2734056"/>
             <a:ext cx="310896" cy="310896"/>
           </a:xfrm>
           <a:prstGeom prst="roundRect">
@@ -4586,7 +4589,7 @@
         </p:nvSpPr>
         <p:spPr>
           <a:xfrm>
-            <a:off x="4809744" y="2743200"/>
+            <a:off x="9180576" y="2743200"/>
             <a:ext cx="310896" cy="256032"/>
           </a:xfrm>
           <a:prstGeom prst="rect">
@@ -4631,8 +4634,8 @@
         </p:nvSpPr>
         <p:spPr>
           <a:xfrm>
-            <a:off x="5230368" y="2688336"/>
-            <a:ext cx="6217920" cy="310896"/>
+            <a:off x="9601200" y="2688336"/>
+            <a:ext cx="1847087" cy="310896"/>
           </a:xfrm>
           <a:prstGeom prst="rect">
             <a:avLst/>
@@ -4663,7 +4666,7 @@
                 </a:solidFill>
                 <a:latin typeface="Arial"/>
               </a:rPr>
-              <a:t>Добавьте</a:t>
+              <a:t>Сверьте категории</a:t>
             </a:r>
           </a:p>
         </p:txBody>
@@ -4676,8 +4679,8 @@
         </p:nvSpPr>
         <p:spPr>
           <a:xfrm>
-            <a:off x="5230368" y="3008376"/>
-            <a:ext cx="6217920" cy="1033271"/>
+            <a:off x="9601200" y="3008376"/>
+            <a:ext cx="1847087" cy="1033271"/>
           </a:xfrm>
           <a:prstGeom prst="rect">
             <a:avLst/>
@@ -4708,7 +4711,7 @@
                 </a:solidFill>
                 <a:latin typeface="Arial"/>
               </a:rPr>
-              <a:t>Кнопка переносит позицию в корзину выбранного ученика.</a:t>
+              <a:t>Одинаковые названия с лишними пробелами объединены.</a:t>
             </a:r>
           </a:p>
         </p:txBody>
@@ -4721,8 +4724,8 @@
         </p:nvSpPr>
         <p:spPr>
           <a:xfrm>
-            <a:off x="4645152" y="4315968"/>
-            <a:ext cx="6949440" cy="877824"/>
+            <a:off x="9015984" y="4315968"/>
+            <a:ext cx="2578608" cy="877824"/>
           </a:xfrm>
           <a:prstGeom prst="rect">
             <a:avLst/>
@@ -4764,7 +4767,7 @@
         </p:nvSpPr>
         <p:spPr>
           <a:xfrm>
-            <a:off x="4645152" y="4315968"/>
+            <a:off x="9015984" y="4315968"/>
             <a:ext cx="54864" cy="877824"/>
           </a:xfrm>
           <a:prstGeom prst="rect">
@@ -4807,8 +4810,8 @@
         </p:nvSpPr>
         <p:spPr>
           <a:xfrm>
-            <a:off x="4846320" y="4425696"/>
-            <a:ext cx="6620255" cy="219456"/>
+            <a:off x="9217152" y="4425696"/>
+            <a:ext cx="2249424" cy="219456"/>
           </a:xfrm>
           <a:prstGeom prst="rect">
             <a:avLst/>
@@ -4852,8 +4855,8 @@
         </p:nvSpPr>
         <p:spPr>
           <a:xfrm>
-            <a:off x="4846320" y="4681728"/>
-            <a:ext cx="6620255" cy="402336"/>
+            <a:off x="9217152" y="4681728"/>
+            <a:ext cx="2249424" cy="402336"/>
           </a:xfrm>
           <a:prstGeom prst="rect">
             <a:avLst/>
@@ -4884,7 +4887,7 @@
                 </a:solidFill>
                 <a:latin typeface="Arial"/>
               </a:rPr>
-              <a:t>Название не перекрывает изображение и полностью читается в карточке.</a:t>
+              <a:t>Меню открывается поверх каталога и не перекрывается карточками товаров.</a:t>
             </a:r>
           </a:p>
         </p:txBody>
@@ -4897,8 +4900,8 @@
         </p:nvSpPr>
         <p:spPr>
           <a:xfrm>
-            <a:off x="4645152" y="5413248"/>
-            <a:ext cx="6949440" cy="603504"/>
+            <a:off x="9015984" y="5413248"/>
+            <a:ext cx="2578608" cy="603504"/>
           </a:xfrm>
           <a:prstGeom prst="rect">
             <a:avLst/>
@@ -4940,8 +4943,8 @@
         </p:nvSpPr>
         <p:spPr>
           <a:xfrm>
-            <a:off x="4809744" y="5559552"/>
-            <a:ext cx="6620255" cy="292608"/>
+            <a:off x="9180576" y="5559552"/>
+            <a:ext cx="2249424" cy="292608"/>
           </a:xfrm>
           <a:prstGeom prst="rect">
             <a:avLst/>
@@ -5264,7 +5267,7 @@
                 </a:solidFill>
                 <a:latin typeface="Arial"/>
               </a:rPr>
-              <a:t>ТИПИЧНАЯ СИТУАЦИЯ</a:t>
+              <a:t>МАГАЗИН</a:t>
             </a:r>
           </a:p>
         </p:txBody>
@@ -5309,7 +5312,7 @@
                 </a:solidFill>
                 <a:latin typeface="Arial"/>
               </a:rPr>
-              <a:t>Покупка недоступна</a:t>
+              <a:t>Карточка товара</a:t>
             </a:r>
           </a:p>
         </p:txBody>
@@ -5374,7 +5377,7 @@
             <a:avLst/>
           </a:prstGeom>
           <a:solidFill>
-            <a:srgbClr val="FCE7EC"/>
+            <a:srgbClr val="EEE7FF"/>
           </a:solidFill>
           <a:ln>
             <a:noFill/>
@@ -5410,8 +5413,8 @@
         </p:nvSpPr>
         <p:spPr>
           <a:xfrm>
-            <a:off x="603504" y="1737360"/>
-            <a:ext cx="2926080" cy="155448"/>
+            <a:off x="603504" y="1746504"/>
+            <a:ext cx="420624" cy="137160"/>
           </a:xfrm>
           <a:prstGeom prst="rect">
             <a:avLst/>
@@ -5438,18 +5441,63 @@
             <a:r>
               <a:rPr sz="850" b="1">
                 <a:solidFill>
-                  <a:srgbClr val="D94261"/>
-                </a:solidFill>
-                <a:latin typeface="Arial"/>
-              </a:rPr>
-              <a:t>ВОСПРОИЗВЕДЕННАЯ ОШИБКА</a:t>
-            </a:r>
-          </a:p>
-        </p:txBody>
-      </p:sp>
-      <p:sp>
-        <p:nvSpPr>
-          <p:cNvPr id="10" name="Rectangle 9"/>
+                  <a:srgbClr val="6F35D4"/>
+                </a:solidFill>
+                <a:latin typeface="Arial"/>
+              </a:rPr>
+              <a:t>ПУТЬ</a:t>
+            </a:r>
+          </a:p>
+        </p:txBody>
+      </p:sp>
+      <p:sp>
+        <p:nvSpPr>
+          <p:cNvPr id="10" name="TextBox 9"/>
+          <p:cNvSpPr txBox="1"/>
+          <p:nvPr/>
+        </p:nvSpPr>
+        <p:spPr>
+          <a:xfrm>
+            <a:off x="1097280" y="1700784"/>
+            <a:ext cx="10287000" cy="201168"/>
+          </a:xfrm>
+          <a:prstGeom prst="rect">
+            <a:avLst/>
+          </a:prstGeom>
+          <a:noFill/>
+        </p:spPr>
+        <p:txBody>
+          <a:bodyPr wrap="square" anchor="t" lIns="0" rIns="0" tIns="0" bIns="0">
+            <a:spAutoFit/>
+          </a:bodyPr>
+          <a:lstStyle/>
+          <a:p>
+            <a:pPr algn="l">
+              <a:lnSpc>
+                <a:spcPct val="100000"/>
+              </a:lnSpc>
+              <a:spcBef>
+                <a:spcPts val="0"/>
+              </a:spcBef>
+              <a:spcAft>
+                <a:spcPts val="0"/>
+              </a:spcAft>
+            </a:pPr>
+            <a:r>
+              <a:rPr sz="1150" b="1">
+                <a:solidFill>
+                  <a:srgbClr val="21172F"/>
+                </a:solidFill>
+                <a:latin typeface="Arial"/>
+              </a:rPr>
+              <a:t>Магазин -&gt; Подробнее</a:t>
+            </a:r>
+          </a:p>
+        </p:txBody>
+      </p:sp>
+      <p:sp>
+        <p:nvSpPr>
+          <p:cNvPr id="11" name="Rectangle 10"/>
           <p:cNvSpPr/>
           <p:nvPr/>
         </p:nvSpPr>
@@ -5494,7 +5542,7 @@
       </p:sp>
       <p:sp>
         <p:nvSpPr>
-          <p:cNvPr id="11" name="Rectangle 10"/>
+          <p:cNvPr id="12" name="Rectangle 11"/>
           <p:cNvSpPr/>
           <p:nvPr/>
         </p:nvSpPr>
@@ -5537,7 +5585,7 @@
       </p:sp>
       <p:sp>
         <p:nvSpPr>
-          <p:cNvPr id="12" name="TextBox 11"/>
+          <p:cNvPr id="13" name="TextBox 12"/>
           <p:cNvSpPr txBox="1"/>
           <p:nvPr/>
         </p:nvSpPr>
@@ -5582,7 +5630,7 @@
       </p:sp>
       <p:pic>
         <p:nvPicPr>
-          <p:cNvPr id="13" name="Picture 12" descr="image.png"/>
+          <p:cNvPr id="14" name="Picture 13" descr="image.png"/>
           <p:cNvPicPr>
             <a:picLocks noChangeAspect="1"/>
           </p:cNvPicPr>
@@ -5606,22 +5654,20 @@
       </p:pic>
       <p:sp>
         <p:nvSpPr>
-          <p:cNvPr id="14" name="Rectangle 13"/>
+          <p:cNvPr id="15" name="Oval 14"/>
           <p:cNvSpPr/>
           <p:nvPr/>
         </p:nvSpPr>
         <p:spPr>
           <a:xfrm>
-            <a:off x="4645152" y="2066543"/>
-            <a:ext cx="6949440" cy="1499616"/>
-          </a:xfrm>
-          <a:prstGeom prst="rect">
-            <a:avLst/>
-          </a:prstGeom>
-          <a:solidFill>
-            <a:srgbClr val="FCE7EC"/>
-          </a:solidFill>
-          <a:ln w="10160">
+            <a:off x="2212848" y="3258555"/>
+            <a:ext cx="457200" cy="457200"/>
+          </a:xfrm>
+          <a:prstGeom prst="ellipse">
+            <a:avLst/>
+          </a:prstGeom>
+          <a:noFill/>
+          <a:ln w="27940">
             <a:solidFill>
               <a:srgbClr val="D94261"/>
             </a:solidFill>
@@ -5651,115 +5697,23 @@
       </p:sp>
       <p:sp>
         <p:nvSpPr>
-          <p:cNvPr id="15" name="TextBox 14"/>
-          <p:cNvSpPr txBox="1"/>
-          <p:nvPr/>
-        </p:nvSpPr>
-        <p:spPr>
-          <a:xfrm>
-            <a:off x="4828032" y="2267712"/>
-            <a:ext cx="6583679" cy="274320"/>
-          </a:xfrm>
-          <a:prstGeom prst="rect">
-            <a:avLst/>
-          </a:prstGeom>
-          <a:noFill/>
-        </p:spPr>
-        <p:txBody>
-          <a:bodyPr wrap="square" anchor="t" lIns="0" rIns="0" tIns="0" bIns="0">
-            <a:spAutoFit/>
-          </a:bodyPr>
-          <a:lstStyle/>
-          <a:p>
-            <a:pPr algn="l">
-              <a:lnSpc>
-                <a:spcPct val="100000"/>
-              </a:lnSpc>
-              <a:spcBef>
-                <a:spcPts val="0"/>
-              </a:spcBef>
-              <a:spcAft>
-                <a:spcPts val="0"/>
-              </a:spcAft>
-            </a:pPr>
-            <a:r>
-              <a:rPr sz="1200" b="1">
-                <a:solidFill>
-                  <a:srgbClr val="21172F"/>
-                </a:solidFill>
-                <a:latin typeface="Arial"/>
-              </a:rPr>
-              <a:t>Что произошло</a:t>
-            </a:r>
-          </a:p>
-        </p:txBody>
-      </p:sp>
-      <p:sp>
-        <p:nvSpPr>
-          <p:cNvPr id="16" name="TextBox 15"/>
-          <p:cNvSpPr txBox="1"/>
-          <p:nvPr/>
-        </p:nvSpPr>
-        <p:spPr>
-          <a:xfrm>
-            <a:off x="4828032" y="2651760"/>
-            <a:ext cx="6583679" cy="713232"/>
-          </a:xfrm>
-          <a:prstGeom prst="rect">
-            <a:avLst/>
-          </a:prstGeom>
-          <a:noFill/>
-        </p:spPr>
-        <p:txBody>
-          <a:bodyPr wrap="square" anchor="t" lIns="0" rIns="0" tIns="0" bIns="0">
-            <a:spAutoFit/>
-          </a:bodyPr>
-          <a:lstStyle/>
-          <a:p>
-            <a:pPr algn="l">
-              <a:lnSpc>
-                <a:spcPct val="100000"/>
-              </a:lnSpc>
-              <a:spcBef>
-                <a:spcPts val="0"/>
-              </a:spcBef>
-              <a:spcAft>
-                <a:spcPts val="0"/>
-              </a:spcAft>
-            </a:pPr>
-            <a:r>
-              <a:rPr sz="1019" b="0">
-                <a:solidFill>
-                  <a:srgbClr val="6E687D"/>
-                </a:solidFill>
-                <a:latin typeface="Arial"/>
-              </a:rPr>
-              <a:t>Баланса не хватает или товар уже закончился.</a:t>
-            </a:r>
-          </a:p>
-        </p:txBody>
-      </p:sp>
-      <p:sp>
-        <p:nvSpPr>
-          <p:cNvPr id="17" name="Rectangle 16"/>
+          <p:cNvPr id="16" name="Oval 15"/>
           <p:cNvSpPr/>
           <p:nvPr/>
         </p:nvSpPr>
         <p:spPr>
           <a:xfrm>
-            <a:off x="4645152" y="3822191"/>
-            <a:ext cx="6949440" cy="1627632"/>
-          </a:xfrm>
-          <a:prstGeom prst="rect">
+            <a:off x="2276856" y="3322563"/>
+            <a:ext cx="329184" cy="329184"/>
+          </a:xfrm>
+          <a:prstGeom prst="ellipse">
             <a:avLst/>
           </a:prstGeom>
           <a:solidFill>
-            <a:srgbClr val="E1F6F3"/>
+            <a:srgbClr val="D94261"/>
           </a:solidFill>
-          <a:ln w="10160">
-            <a:solidFill>
-              <a:srgbClr val="149B91"/>
-            </a:solidFill>
+          <a:ln>
+            <a:noFill/>
           </a:ln>
         </p:spPr>
         <p:style>
@@ -5777,6 +5731,60 @@
           </a:fontRef>
         </p:style>
         <p:txBody>
+          <a:bodyPr rtlCol="0" anchor="ctr" lIns="0" rIns="0" tIns="0" bIns="0"/>
+          <a:lstStyle/>
+          <a:p>
+            <a:pPr algn="ctr"/>
+            <a:r>
+              <a:rPr sz="1200" b="1">
+                <a:solidFill>
+                  <a:srgbClr val="FFFFFF"/>
+                </a:solidFill>
+                <a:latin typeface="Arial"/>
+              </a:rPr>
+              <a:t>1</a:t>
+            </a:r>
+          </a:p>
+        </p:txBody>
+      </p:sp>
+      <p:sp>
+        <p:nvSpPr>
+          <p:cNvPr id="17" name="Up Arrow 16"/>
+          <p:cNvSpPr/>
+          <p:nvPr/>
+        </p:nvSpPr>
+        <p:spPr>
+          <a:xfrm rot="18900000">
+            <a:off x="2532888" y="3596883"/>
+            <a:ext cx="256032" cy="365760"/>
+          </a:xfrm>
+          <a:prstGeom prst="upArrow">
+            <a:avLst/>
+          </a:prstGeom>
+          <a:solidFill>
+            <a:srgbClr val="FFFFFF"/>
+          </a:solidFill>
+          <a:ln w="17780">
+            <a:solidFill>
+              <a:srgbClr val="3B1F68"/>
+            </a:solidFill>
+          </a:ln>
+        </p:spPr>
+        <p:style>
+          <a:lnRef idx="1">
+            <a:schemeClr val="accent1"/>
+          </a:lnRef>
+          <a:fillRef idx="3">
+            <a:schemeClr val="accent1"/>
+          </a:fillRef>
+          <a:effectRef idx="2">
+            <a:schemeClr val="accent1"/>
+          </a:effectRef>
+          <a:fontRef idx="minor">
+            <a:schemeClr val="lt1"/>
+          </a:fontRef>
+        </p:style>
+        <p:txBody>
           <a:bodyPr rtlCol="0" anchor="ctr"/>
           <a:lstStyle/>
           <a:p>
@@ -5786,14 +5794,57 @@
       </p:sp>
       <p:sp>
         <p:nvSpPr>
-          <p:cNvPr id="18" name="TextBox 17"/>
-          <p:cNvSpPr txBox="1"/>
-          <p:nvPr/>
-        </p:nvSpPr>
-        <p:spPr>
-          <a:xfrm>
-            <a:off x="4828032" y="4023360"/>
-            <a:ext cx="6583679" cy="274320"/>
+          <p:cNvPr id="18" name="Rectangle 17"/>
+          <p:cNvSpPr/>
+          <p:nvPr/>
+        </p:nvSpPr>
+        <p:spPr>
+          <a:xfrm>
+            <a:off x="4645152" y="2066543"/>
+            <a:ext cx="6949440" cy="420624"/>
+          </a:xfrm>
+          <a:prstGeom prst="rect">
+            <a:avLst/>
+          </a:prstGeom>
+          <a:solidFill>
+            <a:srgbClr val="3B1F68"/>
+          </a:solidFill>
+          <a:ln>
+            <a:noFill/>
+          </a:ln>
+        </p:spPr>
+        <p:style>
+          <a:lnRef idx="1">
+            <a:schemeClr val="accent1"/>
+          </a:lnRef>
+          <a:fillRef idx="3">
+            <a:schemeClr val="accent1"/>
+          </a:fillRef>
+          <a:effectRef idx="2">
+            <a:schemeClr val="accent1"/>
+          </a:effectRef>
+          <a:fontRef idx="minor">
+            <a:schemeClr val="lt1"/>
+          </a:fontRef>
+        </p:style>
+        <p:txBody>
+          <a:bodyPr rtlCol="0" anchor="ctr"/>
+          <a:lstStyle/>
+          <a:p>
+            <a:pPr algn="ctr"/>
+          </a:p>
+        </p:txBody>
+      </p:sp>
+      <p:sp>
+        <p:nvSpPr>
+          <p:cNvPr id="19" name="TextBox 18"/>
+          <p:cNvSpPr txBox="1"/>
+          <p:nvPr/>
+        </p:nvSpPr>
+        <p:spPr>
+          <a:xfrm>
+            <a:off x="4809744" y="2185416"/>
+            <a:ext cx="6620255" cy="164592"/>
           </a:xfrm>
           <a:prstGeom prst="rect">
             <a:avLst/>
@@ -5818,27 +5869,248 @@
               </a:spcAft>
             </a:pPr>
             <a:r>
-              <a:rPr sz="1200" b="1">
+              <a:rPr sz="950" b="1">
+                <a:solidFill>
+                  <a:srgbClr val="FFFFFF"/>
+                </a:solidFill>
+                <a:latin typeface="Arial"/>
+              </a:rPr>
+              <a:t>ШАГ 1 ИЗ 3</a:t>
+            </a:r>
+          </a:p>
+        </p:txBody>
+      </p:sp>
+      <p:sp>
+        <p:nvSpPr>
+          <p:cNvPr id="20" name="Rectangle 19"/>
+          <p:cNvSpPr/>
+          <p:nvPr/>
+        </p:nvSpPr>
+        <p:spPr>
+          <a:xfrm>
+            <a:off x="4645152" y="2596896"/>
+            <a:ext cx="6949440" cy="1499616"/>
+          </a:xfrm>
+          <a:prstGeom prst="rect">
+            <a:avLst/>
+          </a:prstGeom>
+          <a:solidFill>
+            <a:srgbClr val="FFFFFF"/>
+          </a:solidFill>
+          <a:ln w="10160">
+            <a:solidFill>
+              <a:srgbClr val="DED9E8"/>
+            </a:solidFill>
+          </a:ln>
+        </p:spPr>
+        <p:style>
+          <a:lnRef idx="1">
+            <a:schemeClr val="accent1"/>
+          </a:lnRef>
+          <a:fillRef idx="3">
+            <a:schemeClr val="accent1"/>
+          </a:fillRef>
+          <a:effectRef idx="2">
+            <a:schemeClr val="accent1"/>
+          </a:effectRef>
+          <a:fontRef idx="minor">
+            <a:schemeClr val="lt1"/>
+          </a:fontRef>
+        </p:style>
+        <p:txBody>
+          <a:bodyPr rtlCol="0" anchor="ctr"/>
+          <a:lstStyle/>
+          <a:p>
+            <a:pPr algn="ctr"/>
+          </a:p>
+        </p:txBody>
+      </p:sp>
+      <p:sp>
+        <p:nvSpPr>
+          <p:cNvPr id="21" name="Rectangle 20"/>
+          <p:cNvSpPr/>
+          <p:nvPr/>
+        </p:nvSpPr>
+        <p:spPr>
+          <a:xfrm>
+            <a:off x="4645152" y="2596896"/>
+            <a:ext cx="54864" cy="1499616"/>
+          </a:xfrm>
+          <a:prstGeom prst="rect">
+            <a:avLst/>
+          </a:prstGeom>
+          <a:solidFill>
+            <a:srgbClr val="D94261"/>
+          </a:solidFill>
+          <a:ln>
+            <a:noFill/>
+          </a:ln>
+        </p:spPr>
+        <p:style>
+          <a:lnRef idx="1">
+            <a:schemeClr val="accent1"/>
+          </a:lnRef>
+          <a:fillRef idx="3">
+            <a:schemeClr val="accent1"/>
+          </a:fillRef>
+          <a:effectRef idx="2">
+            <a:schemeClr val="accent1"/>
+          </a:effectRef>
+          <a:fontRef idx="minor">
+            <a:schemeClr val="lt1"/>
+          </a:fontRef>
+        </p:style>
+        <p:txBody>
+          <a:bodyPr rtlCol="0" anchor="ctr"/>
+          <a:lstStyle/>
+          <a:p>
+            <a:pPr algn="ctr"/>
+          </a:p>
+        </p:txBody>
+      </p:sp>
+      <p:sp>
+        <p:nvSpPr>
+          <p:cNvPr id="22" name="Rounded Rectangle 21"/>
+          <p:cNvSpPr/>
+          <p:nvPr/>
+        </p:nvSpPr>
+        <p:spPr>
+          <a:xfrm>
+            <a:off x="4809744" y="2734056"/>
+            <a:ext cx="310896" cy="310896"/>
+          </a:xfrm>
+          <a:prstGeom prst="roundRect">
+            <a:avLst/>
+          </a:prstGeom>
+          <a:solidFill>
+            <a:srgbClr val="D94261"/>
+          </a:solidFill>
+          <a:ln>
+            <a:noFill/>
+          </a:ln>
+        </p:spPr>
+        <p:style>
+          <a:lnRef idx="1">
+            <a:schemeClr val="accent1"/>
+          </a:lnRef>
+          <a:fillRef idx="3">
+            <a:schemeClr val="accent1"/>
+          </a:fillRef>
+          <a:effectRef idx="2">
+            <a:schemeClr val="accent1"/>
+          </a:effectRef>
+          <a:fontRef idx="minor">
+            <a:schemeClr val="lt1"/>
+          </a:fontRef>
+        </p:style>
+        <p:txBody>
+          <a:bodyPr rtlCol="0" anchor="ctr"/>
+          <a:lstStyle/>
+          <a:p>
+            <a:pPr algn="ctr"/>
+          </a:p>
+        </p:txBody>
+      </p:sp>
+      <p:sp>
+        <p:nvSpPr>
+          <p:cNvPr id="23" name="TextBox 22"/>
+          <p:cNvSpPr txBox="1"/>
+          <p:nvPr/>
+        </p:nvSpPr>
+        <p:spPr>
+          <a:xfrm>
+            <a:off x="4809744" y="2743200"/>
+            <a:ext cx="310896" cy="256032"/>
+          </a:xfrm>
+          <a:prstGeom prst="rect">
+            <a:avLst/>
+          </a:prstGeom>
+          <a:noFill/>
+        </p:spPr>
+        <p:txBody>
+          <a:bodyPr wrap="square" anchor="ctr" lIns="0" rIns="0" tIns="0" bIns="0">
+            <a:spAutoFit/>
+          </a:bodyPr>
+          <a:lstStyle/>
+          <a:p>
+            <a:pPr algn="ctr">
+              <a:lnSpc>
+                <a:spcPct val="100000"/>
+              </a:lnSpc>
+              <a:spcBef>
+                <a:spcPts val="0"/>
+              </a:spcBef>
+              <a:spcAft>
+                <a:spcPts val="0"/>
+              </a:spcAft>
+            </a:pPr>
+            <a:r>
+              <a:rPr sz="1100" b="1">
+                <a:solidFill>
+                  <a:srgbClr val="FFFFFF"/>
+                </a:solidFill>
+                <a:latin typeface="Arial"/>
+              </a:rPr>
+              <a:t>1</a:t>
+            </a:r>
+          </a:p>
+        </p:txBody>
+      </p:sp>
+      <p:sp>
+        <p:nvSpPr>
+          <p:cNvPr id="24" name="TextBox 23"/>
+          <p:cNvSpPr txBox="1"/>
+          <p:nvPr/>
+        </p:nvSpPr>
+        <p:spPr>
+          <a:xfrm>
+            <a:off x="5230368" y="2688336"/>
+            <a:ext cx="6217920" cy="310896"/>
+          </a:xfrm>
+          <a:prstGeom prst="rect">
+            <a:avLst/>
+          </a:prstGeom>
+          <a:noFill/>
+        </p:spPr>
+        <p:txBody>
+          <a:bodyPr wrap="square" anchor="t" lIns="0" rIns="0" tIns="0" bIns="0">
+            <a:spAutoFit/>
+          </a:bodyPr>
+          <a:lstStyle/>
+          <a:p>
+            <a:pPr algn="l">
+              <a:lnSpc>
+                <a:spcPct val="100000"/>
+              </a:lnSpc>
+              <a:spcBef>
+                <a:spcPts val="0"/>
+              </a:spcBef>
+              <a:spcAft>
+                <a:spcPts val="0"/>
+              </a:spcAft>
+            </a:pPr>
+            <a:r>
+              <a:rPr sz="1180" b="1">
                 <a:solidFill>
                   <a:srgbClr val="21172F"/>
                 </a:solidFill>
                 <a:latin typeface="Arial"/>
               </a:rPr>
-              <a:t>Как исправить</a:t>
-            </a:r>
-          </a:p>
-        </p:txBody>
-      </p:sp>
-      <p:sp>
-        <p:nvSpPr>
-          <p:cNvPr id="19" name="TextBox 18"/>
-          <p:cNvSpPr txBox="1"/>
-          <p:nvPr/>
-        </p:nvSpPr>
-        <p:spPr>
-          <a:xfrm>
-            <a:off x="4828032" y="4407408"/>
-            <a:ext cx="6583679" cy="822960"/>
+              <a:t>Сверьте товар</a:t>
+            </a:r>
+          </a:p>
+        </p:txBody>
+      </p:sp>
+      <p:sp>
+        <p:nvSpPr>
+          <p:cNvPr id="25" name="TextBox 24"/>
+          <p:cNvSpPr txBox="1"/>
+          <p:nvPr/>
+        </p:nvSpPr>
+        <p:spPr>
+          <a:xfrm>
+            <a:off x="5230368" y="3008376"/>
+            <a:ext cx="6217920" cy="1033271"/>
           </a:xfrm>
           <a:prstGeom prst="rect">
             <a:avLst/>
@@ -5863,20 +6135,284 @@
               </a:spcAft>
             </a:pPr>
             <a:r>
-              <a:rPr sz="1019" b="0">
+              <a:rPr sz="1000" b="0">
                 <a:solidFill>
                   <a:srgbClr val="6E687D"/>
                 </a:solidFill>
                 <a:latin typeface="Arial"/>
               </a:rPr>
-              <a:t>Вернитесь в каталог, включите фильтр наличия и выберите доступную награду по балансу.</a:t>
-            </a:r>
-          </a:p>
-        </p:txBody>
-      </p:sp>
-      <p:sp>
-        <p:nvSpPr>
-          <p:cNvPr id="20" name="Rectangle 19"/>
+              <a:t>Проверьте название, описание, цену и тип выдачи.</a:t>
+            </a:r>
+          </a:p>
+        </p:txBody>
+      </p:sp>
+      <p:sp>
+        <p:nvSpPr>
+          <p:cNvPr id="26" name="Rectangle 25"/>
+          <p:cNvSpPr/>
+          <p:nvPr/>
+        </p:nvSpPr>
+        <p:spPr>
+          <a:xfrm>
+            <a:off x="4645152" y="4315968"/>
+            <a:ext cx="6949440" cy="877824"/>
+          </a:xfrm>
+          <a:prstGeom prst="rect">
+            <a:avLst/>
+          </a:prstGeom>
+          <a:solidFill>
+            <a:srgbClr val="E1F6F3"/>
+          </a:solidFill>
+          <a:ln>
+            <a:noFill/>
+          </a:ln>
+        </p:spPr>
+        <p:style>
+          <a:lnRef idx="1">
+            <a:schemeClr val="accent1"/>
+          </a:lnRef>
+          <a:fillRef idx="3">
+            <a:schemeClr val="accent1"/>
+          </a:fillRef>
+          <a:effectRef idx="2">
+            <a:schemeClr val="accent1"/>
+          </a:effectRef>
+          <a:fontRef idx="minor">
+            <a:schemeClr val="lt1"/>
+          </a:fontRef>
+        </p:style>
+        <p:txBody>
+          <a:bodyPr rtlCol="0" anchor="ctr"/>
+          <a:lstStyle/>
+          <a:p>
+            <a:pPr algn="ctr"/>
+          </a:p>
+        </p:txBody>
+      </p:sp>
+      <p:sp>
+        <p:nvSpPr>
+          <p:cNvPr id="27" name="Rectangle 26"/>
+          <p:cNvSpPr/>
+          <p:nvPr/>
+        </p:nvSpPr>
+        <p:spPr>
+          <a:xfrm>
+            <a:off x="4645152" y="4315968"/>
+            <a:ext cx="54864" cy="877824"/>
+          </a:xfrm>
+          <a:prstGeom prst="rect">
+            <a:avLst/>
+          </a:prstGeom>
+          <a:solidFill>
+            <a:srgbClr val="149B91"/>
+          </a:solidFill>
+          <a:ln>
+            <a:noFill/>
+          </a:ln>
+        </p:spPr>
+        <p:style>
+          <a:lnRef idx="1">
+            <a:schemeClr val="accent1"/>
+          </a:lnRef>
+          <a:fillRef idx="3">
+            <a:schemeClr val="accent1"/>
+          </a:fillRef>
+          <a:effectRef idx="2">
+            <a:schemeClr val="accent1"/>
+          </a:effectRef>
+          <a:fontRef idx="minor">
+            <a:schemeClr val="lt1"/>
+          </a:fontRef>
+        </p:style>
+        <p:txBody>
+          <a:bodyPr rtlCol="0" anchor="ctr"/>
+          <a:lstStyle/>
+          <a:p>
+            <a:pPr algn="ctr"/>
+          </a:p>
+        </p:txBody>
+      </p:sp>
+      <p:sp>
+        <p:nvSpPr>
+          <p:cNvPr id="28" name="TextBox 27"/>
+          <p:cNvSpPr txBox="1"/>
+          <p:nvPr/>
+        </p:nvSpPr>
+        <p:spPr>
+          <a:xfrm>
+            <a:off x="4846320" y="4425696"/>
+            <a:ext cx="6620255" cy="219456"/>
+          </a:xfrm>
+          <a:prstGeom prst="rect">
+            <a:avLst/>
+          </a:prstGeom>
+          <a:noFill/>
+        </p:spPr>
+        <p:txBody>
+          <a:bodyPr wrap="square" anchor="t" lIns="0" rIns="0" tIns="0" bIns="0">
+            <a:spAutoFit/>
+          </a:bodyPr>
+          <a:lstStyle/>
+          <a:p>
+            <a:pPr algn="l">
+              <a:lnSpc>
+                <a:spcPct val="100000"/>
+              </a:lnSpc>
+              <a:spcBef>
+                <a:spcPts val="0"/>
+              </a:spcBef>
+              <a:spcAft>
+                <a:spcPts val="0"/>
+              </a:spcAft>
+            </a:pPr>
+            <a:r>
+              <a:rPr sz="1150" b="1">
+                <a:solidFill>
+                  <a:srgbClr val="21172F"/>
+                </a:solidFill>
+                <a:latin typeface="Arial"/>
+              </a:rPr>
+              <a:t>Проверка результата</a:t>
+            </a:r>
+          </a:p>
+        </p:txBody>
+      </p:sp>
+      <p:sp>
+        <p:nvSpPr>
+          <p:cNvPr id="29" name="TextBox 28"/>
+          <p:cNvSpPr txBox="1"/>
+          <p:nvPr/>
+        </p:nvSpPr>
+        <p:spPr>
+          <a:xfrm>
+            <a:off x="4846320" y="4681728"/>
+            <a:ext cx="6620255" cy="402336"/>
+          </a:xfrm>
+          <a:prstGeom prst="rect">
+            <a:avLst/>
+          </a:prstGeom>
+          <a:noFill/>
+        </p:spPr>
+        <p:txBody>
+          <a:bodyPr wrap="square" anchor="t" lIns="0" rIns="0" tIns="0" bIns="0">
+            <a:spAutoFit/>
+          </a:bodyPr>
+          <a:lstStyle/>
+          <a:p>
+            <a:pPr algn="l">
+              <a:lnSpc>
+                <a:spcPct val="100000"/>
+              </a:lnSpc>
+              <a:spcBef>
+                <a:spcPts val="0"/>
+              </a:spcBef>
+              <a:spcAft>
+                <a:spcPts val="0"/>
+              </a:spcAft>
+            </a:pPr>
+            <a:r>
+              <a:rPr sz="1000" b="0">
+                <a:solidFill>
+                  <a:srgbClr val="6E687D"/>
+                </a:solidFill>
+                <a:latin typeface="Arial"/>
+              </a:rPr>
+              <a:t>После нажатия дождитесь изменения экрана и переходите к следующему шагу.</a:t>
+            </a:r>
+          </a:p>
+        </p:txBody>
+      </p:sp>
+      <p:sp>
+        <p:nvSpPr>
+          <p:cNvPr id="30" name="Rectangle 29"/>
+          <p:cNvSpPr/>
+          <p:nvPr/>
+        </p:nvSpPr>
+        <p:spPr>
+          <a:xfrm>
+            <a:off x="4645152" y="5413248"/>
+            <a:ext cx="6949440" cy="603504"/>
+          </a:xfrm>
+          <a:prstGeom prst="rect">
+            <a:avLst/>
+          </a:prstGeom>
+          <a:solidFill>
+            <a:srgbClr val="FFF5C9"/>
+          </a:solidFill>
+          <a:ln>
+            <a:noFill/>
+          </a:ln>
+        </p:spPr>
+        <p:style>
+          <a:lnRef idx="1">
+            <a:schemeClr val="accent1"/>
+          </a:lnRef>
+          <a:fillRef idx="3">
+            <a:schemeClr val="accent1"/>
+          </a:fillRef>
+          <a:effectRef idx="2">
+            <a:schemeClr val="accent1"/>
+          </a:effectRef>
+          <a:fontRef idx="minor">
+            <a:schemeClr val="lt1"/>
+          </a:fontRef>
+        </p:style>
+        <p:txBody>
+          <a:bodyPr rtlCol="0" anchor="ctr"/>
+          <a:lstStyle/>
+          <a:p>
+            <a:pPr algn="ctr"/>
+          </a:p>
+        </p:txBody>
+      </p:sp>
+      <p:sp>
+        <p:nvSpPr>
+          <p:cNvPr id="31" name="TextBox 30"/>
+          <p:cNvSpPr txBox="1"/>
+          <p:nvPr/>
+        </p:nvSpPr>
+        <p:spPr>
+          <a:xfrm>
+            <a:off x="4809744" y="5559552"/>
+            <a:ext cx="6620255" cy="292608"/>
+          </a:xfrm>
+          <a:prstGeom prst="rect">
+            <a:avLst/>
+          </a:prstGeom>
+          <a:noFill/>
+        </p:spPr>
+        <p:txBody>
+          <a:bodyPr wrap="square" anchor="t" lIns="0" rIns="0" tIns="0" bIns="0">
+            <a:spAutoFit/>
+          </a:bodyPr>
+          <a:lstStyle/>
+          <a:p>
+            <a:pPr algn="l">
+              <a:lnSpc>
+                <a:spcPct val="100000"/>
+              </a:lnSpc>
+              <a:spcBef>
+                <a:spcPts val="0"/>
+              </a:spcBef>
+              <a:spcAft>
+                <a:spcPts val="0"/>
+              </a:spcAft>
+            </a:pPr>
+            <a:r>
+              <a:rPr sz="919" b="0">
+                <a:solidFill>
+                  <a:srgbClr val="6E687D"/>
+                </a:solidFill>
+                <a:latin typeface="Arial"/>
+              </a:rPr>
+              <a:t>Курсор и номер показывают единственное действие этого кадра.</a:t>
+            </a:r>
+          </a:p>
+        </p:txBody>
+      </p:sp>
+      <p:sp>
+        <p:nvSpPr>
+          <p:cNvPr id="32" name="Rectangle 31"/>
           <p:cNvSpPr/>
           <p:nvPr/>
         </p:nvSpPr>
@@ -5919,7 +6455,7 @@
       </p:sp>
       <p:sp>
         <p:nvSpPr>
-          <p:cNvPr id="21" name="TextBox 20"/>
+          <p:cNvPr id="33" name="TextBox 32"/>
           <p:cNvSpPr txBox="1"/>
           <p:nvPr/>
         </p:nvSpPr>
@@ -6161,7 +6697,7 @@
                 </a:solidFill>
                 <a:latin typeface="Arial"/>
               </a:rPr>
-              <a:t>КОРЗИНА</a:t>
+              <a:t>МАГАЗИН</a:t>
             </a:r>
           </a:p>
         </p:txBody>
@@ -6206,7 +6742,7 @@
                 </a:solidFill>
                 <a:latin typeface="Arial"/>
               </a:rPr>
-              <a:t>Проверка количества и суммы</a:t>
+              <a:t>Карточка товара</a:t>
             </a:r>
           </a:p>
         </p:txBody>
@@ -6384,7 +6920,7 @@
                 </a:solidFill>
                 <a:latin typeface="Arial"/>
               </a:rPr>
-              <a:t>Корзина</a:t>
+              <a:t>Магазин -&gt; Подробнее</a:t>
             </a:r>
           </a:p>
         </p:txBody>
@@ -6554,7 +7090,7 @@
         </p:nvSpPr>
         <p:spPr>
           <a:xfrm>
-            <a:off x="2212848" y="3333902"/>
+            <a:off x="2212848" y="4614793"/>
             <a:ext cx="457200" cy="457200"/>
           </a:xfrm>
           <a:prstGeom prst="ellipse">
@@ -6597,7 +7133,7 @@
         </p:nvSpPr>
         <p:spPr>
           <a:xfrm>
-            <a:off x="2276856" y="3397910"/>
+            <a:off x="2276856" y="4678801"/>
             <a:ext cx="329184" cy="329184"/>
           </a:xfrm>
           <a:prstGeom prst="ellipse">
@@ -6636,7 +7172,7 @@
                 </a:solidFill>
                 <a:latin typeface="Arial"/>
               </a:rPr>
-              <a:t>1</a:t>
+              <a:t>2</a:t>
             </a:r>
           </a:p>
         </p:txBody>
@@ -6649,7 +7185,7 @@
         </p:nvSpPr>
         <p:spPr>
           <a:xfrm rot="18900000">
-            <a:off x="2532888" y="3672230"/>
+            <a:off x="2532888" y="4953121"/>
             <a:ext cx="256032" cy="365760"/>
           </a:xfrm>
           <a:prstGeom prst="upArrow">
@@ -6769,7 +7305,7 @@
                 </a:solidFill>
                 <a:latin typeface="Arial"/>
               </a:rPr>
-              <a:t>ШАГ 1 ИЗ 3</a:t>
+              <a:t>ШАГ 2 ИЗ 3</a:t>
             </a:r>
           </a:p>
         </p:txBody>
@@ -6945,7 +7481,7 @@
                 </a:solidFill>
                 <a:latin typeface="Arial"/>
               </a:rPr>
-              <a:t>1</a:t>
+              <a:t>2</a:t>
             </a:r>
           </a:p>
         </p:txBody>
@@ -6990,7 +7526,7 @@
                 </a:solidFill>
                 <a:latin typeface="Arial"/>
               </a:rPr>
-              <a:t>Измените количество</a:t>
+              <a:t>Выберите количество</a:t>
             </a:r>
           </a:p>
         </p:txBody>
@@ -7035,7 +7571,7 @@
                 </a:solidFill>
                 <a:latin typeface="Arial"/>
               </a:rPr>
-              <a:t>Минус и плюс сразу пересчитывают сумму.</a:t>
+              <a:t>Не превышайте доступный остаток.</a:t>
             </a:r>
           </a:p>
         </p:txBody>
@@ -7591,7 +8127,7 @@
                 </a:solidFill>
                 <a:latin typeface="Arial"/>
               </a:rPr>
-              <a:t>КОРЗИНА</a:t>
+              <a:t>МАГАЗИН</a:t>
             </a:r>
           </a:p>
         </p:txBody>
@@ -7636,7 +8172,7 @@
                 </a:solidFill>
                 <a:latin typeface="Arial"/>
               </a:rPr>
-              <a:t>Проверка количества и суммы</a:t>
+              <a:t>Карточка товара</a:t>
             </a:r>
           </a:p>
         </p:txBody>
@@ -7814,7 +8350,7 @@
                 </a:solidFill>
                 <a:latin typeface="Arial"/>
               </a:rPr>
-              <a:t>Корзина</a:t>
+              <a:t>Магазин -&gt; Подробнее</a:t>
             </a:r>
           </a:p>
         </p:txBody>
@@ -7984,7 +8520,7 @@
         </p:nvSpPr>
         <p:spPr>
           <a:xfrm>
-            <a:off x="2212848" y="4351080"/>
+            <a:off x="2212848" y="5368259"/>
             <a:ext cx="457200" cy="457200"/>
           </a:xfrm>
           <a:prstGeom prst="ellipse">
@@ -8027,7 +8563,7 @@
         </p:nvSpPr>
         <p:spPr>
           <a:xfrm>
-            <a:off x="2276856" y="4415088"/>
+            <a:off x="2276856" y="5432267"/>
             <a:ext cx="329184" cy="329184"/>
           </a:xfrm>
           <a:prstGeom prst="ellipse">
@@ -8066,7 +8602,7 @@
                 </a:solidFill>
                 <a:latin typeface="Arial"/>
               </a:rPr>
-              <a:t>2</a:t>
+              <a:t>3</a:t>
             </a:r>
           </a:p>
         </p:txBody>
@@ -8079,7 +8615,7 @@
         </p:nvSpPr>
         <p:spPr>
           <a:xfrm rot="18900000">
-            <a:off x="2532888" y="4689408"/>
+            <a:off x="2532888" y="5706587"/>
             <a:ext cx="256032" cy="365760"/>
           </a:xfrm>
           <a:prstGeom prst="upArrow">
@@ -8199,7 +8735,7 @@
                 </a:solidFill>
                 <a:latin typeface="Arial"/>
               </a:rPr>
-              <a:t>ШАГ 2 ИЗ 3</a:t>
+              <a:t>ШАГ 3 ИЗ 3</a:t>
             </a:r>
           </a:p>
         </p:txBody>
@@ -8375,7 +8911,7 @@
                 </a:solidFill>
                 <a:latin typeface="Arial"/>
               </a:rPr>
-              <a:t>2</a:t>
+              <a:t>3</a:t>
             </a:r>
           </a:p>
         </p:txBody>
@@ -8420,7 +8956,7 @@
                 </a:solidFill>
                 <a:latin typeface="Arial"/>
               </a:rPr>
-              <a:t>Сверьте остаток</a:t>
+              <a:t>Добавьте</a:t>
             </a:r>
           </a:p>
         </p:txBody>
@@ -8465,7 +9001,7 @@
                 </a:solidFill>
                 <a:latin typeface="Arial"/>
               </a:rPr>
-              <a:t>Показан баланс после списания.</a:t>
+              <a:t>Кнопка переносит позицию в корзину выбранного ученика.</a:t>
             </a:r>
           </a:p>
         </p:txBody>
@@ -8641,7 +9177,7 @@
                 </a:solidFill>
                 <a:latin typeface="Arial"/>
               </a:rPr>
-              <a:t>После нажатия дождитесь изменения экрана и переходите к следующему шагу.</a:t>
+              <a:t>Название не перекрывает изображение и полностью читается в карточке.</a:t>
             </a:r>
           </a:p>
         </p:txBody>
@@ -9021,7 +9557,7 @@
                 </a:solidFill>
                 <a:latin typeface="Arial"/>
               </a:rPr>
-              <a:t>КОРЗИНА</a:t>
+              <a:t>ТИПИЧНАЯ СИТУАЦИЯ</a:t>
             </a:r>
           </a:p>
         </p:txBody>
@@ -9066,7 +9602,7 @@
                 </a:solidFill>
                 <a:latin typeface="Arial"/>
               </a:rPr>
-              <a:t>Проверка количества и суммы</a:t>
+              <a:t>Покупка недоступна</a:t>
             </a:r>
           </a:p>
         </p:txBody>
@@ -9131,7 +9667,7 @@
             <a:avLst/>
           </a:prstGeom>
           <a:solidFill>
-            <a:srgbClr val="EEE7FF"/>
+            <a:srgbClr val="FCE7EC"/>
           </a:solidFill>
           <a:ln>
             <a:noFill/>
@@ -9167,8 +9703,8 @@
         </p:nvSpPr>
         <p:spPr>
           <a:xfrm>
-            <a:off x="603504" y="1746504"/>
-            <a:ext cx="420624" cy="137160"/>
+            <a:off x="603504" y="1737360"/>
+            <a:ext cx="2926080" cy="155448"/>
           </a:xfrm>
           <a:prstGeom prst="rect">
             <a:avLst/>
@@ -9195,63 +9731,18 @@
             <a:r>
               <a:rPr sz="850" b="1">
                 <a:solidFill>
-                  <a:srgbClr val="6F35D4"/>
-                </a:solidFill>
-                <a:latin typeface="Arial"/>
-              </a:rPr>
-              <a:t>ПУТЬ</a:t>
-            </a:r>
-          </a:p>
-        </p:txBody>
-      </p:sp>
-      <p:sp>
-        <p:nvSpPr>
-          <p:cNvPr id="10" name="TextBox 9"/>
-          <p:cNvSpPr txBox="1"/>
-          <p:nvPr/>
-        </p:nvSpPr>
-        <p:spPr>
-          <a:xfrm>
-            <a:off x="1097280" y="1700784"/>
-            <a:ext cx="10287000" cy="201168"/>
-          </a:xfrm>
-          <a:prstGeom prst="rect">
-            <a:avLst/>
-          </a:prstGeom>
-          <a:noFill/>
-        </p:spPr>
-        <p:txBody>
-          <a:bodyPr wrap="square" anchor="t" lIns="0" rIns="0" tIns="0" bIns="0">
-            <a:spAutoFit/>
-          </a:bodyPr>
-          <a:lstStyle/>
-          <a:p>
-            <a:pPr algn="l">
-              <a:lnSpc>
-                <a:spcPct val="100000"/>
-              </a:lnSpc>
-              <a:spcBef>
-                <a:spcPts val="0"/>
-              </a:spcBef>
-              <a:spcAft>
-                <a:spcPts val="0"/>
-              </a:spcAft>
-            </a:pPr>
-            <a:r>
-              <a:rPr sz="1150" b="1">
-                <a:solidFill>
-                  <a:srgbClr val="21172F"/>
-                </a:solidFill>
-                <a:latin typeface="Arial"/>
-              </a:rPr>
-              <a:t>Корзина</a:t>
-            </a:r>
-          </a:p>
-        </p:txBody>
-      </p:sp>
-      <p:sp>
-        <p:nvSpPr>
-          <p:cNvPr id="11" name="Rectangle 10"/>
+                  <a:srgbClr val="D94261"/>
+                </a:solidFill>
+                <a:latin typeface="Arial"/>
+              </a:rPr>
+              <a:t>ВОСПРОИЗВЕДЕННАЯ ОШИБКА</a:t>
+            </a:r>
+          </a:p>
+        </p:txBody>
+      </p:sp>
+      <p:sp>
+        <p:nvSpPr>
+          <p:cNvPr id="10" name="Rectangle 9"/>
           <p:cNvSpPr/>
           <p:nvPr/>
         </p:nvSpPr>
@@ -9296,7 +9787,7 @@
       </p:sp>
       <p:sp>
         <p:nvSpPr>
-          <p:cNvPr id="12" name="Rectangle 11"/>
+          <p:cNvPr id="11" name="Rectangle 10"/>
           <p:cNvSpPr/>
           <p:nvPr/>
         </p:nvSpPr>
@@ -9339,7 +9830,7 @@
       </p:sp>
       <p:sp>
         <p:nvSpPr>
-          <p:cNvPr id="13" name="TextBox 12"/>
+          <p:cNvPr id="12" name="TextBox 11"/>
           <p:cNvSpPr txBox="1"/>
           <p:nvPr/>
         </p:nvSpPr>
@@ -9384,7 +9875,7 @@
       </p:sp>
       <p:pic>
         <p:nvPicPr>
-          <p:cNvPr id="14" name="Picture 13" descr="image.png"/>
+          <p:cNvPr id="13" name="Picture 12" descr="image.png"/>
           <p:cNvPicPr>
             <a:picLocks noChangeAspect="1"/>
           </p:cNvPicPr>
@@ -9408,20 +9899,22 @@
       </p:pic>
       <p:sp>
         <p:nvSpPr>
-          <p:cNvPr id="15" name="Oval 14"/>
+          <p:cNvPr id="14" name="Rectangle 13"/>
           <p:cNvSpPr/>
           <p:nvPr/>
         </p:nvSpPr>
         <p:spPr>
           <a:xfrm>
-            <a:off x="2212848" y="5066873"/>
-            <a:ext cx="457200" cy="457200"/>
-          </a:xfrm>
-          <a:prstGeom prst="ellipse">
-            <a:avLst/>
-          </a:prstGeom>
-          <a:noFill/>
-          <a:ln w="27940">
+            <a:off x="4645152" y="2066543"/>
+            <a:ext cx="6949440" cy="1499616"/>
+          </a:xfrm>
+          <a:prstGeom prst="rect">
+            <a:avLst/>
+          </a:prstGeom>
+          <a:solidFill>
+            <a:srgbClr val="FCE7EC"/>
+          </a:solidFill>
+          <a:ln w="10160">
             <a:solidFill>
               <a:srgbClr val="D94261"/>
             </a:solidFill>
@@ -9451,23 +9944,115 @@
       </p:sp>
       <p:sp>
         <p:nvSpPr>
-          <p:cNvPr id="16" name="Oval 15"/>
+          <p:cNvPr id="15" name="TextBox 14"/>
+          <p:cNvSpPr txBox="1"/>
+          <p:nvPr/>
+        </p:nvSpPr>
+        <p:spPr>
+          <a:xfrm>
+            <a:off x="4828032" y="2267712"/>
+            <a:ext cx="6583679" cy="274320"/>
+          </a:xfrm>
+          <a:prstGeom prst="rect">
+            <a:avLst/>
+          </a:prstGeom>
+          <a:noFill/>
+        </p:spPr>
+        <p:txBody>
+          <a:bodyPr wrap="square" anchor="t" lIns="0" rIns="0" tIns="0" bIns="0">
+            <a:spAutoFit/>
+          </a:bodyPr>
+          <a:lstStyle/>
+          <a:p>
+            <a:pPr algn="l">
+              <a:lnSpc>
+                <a:spcPct val="100000"/>
+              </a:lnSpc>
+              <a:spcBef>
+                <a:spcPts val="0"/>
+              </a:spcBef>
+              <a:spcAft>
+                <a:spcPts val="0"/>
+              </a:spcAft>
+            </a:pPr>
+            <a:r>
+              <a:rPr sz="1200" b="1">
+                <a:solidFill>
+                  <a:srgbClr val="21172F"/>
+                </a:solidFill>
+                <a:latin typeface="Arial"/>
+              </a:rPr>
+              <a:t>Что произошло</a:t>
+            </a:r>
+          </a:p>
+        </p:txBody>
+      </p:sp>
+      <p:sp>
+        <p:nvSpPr>
+          <p:cNvPr id="16" name="TextBox 15"/>
+          <p:cNvSpPr txBox="1"/>
+          <p:nvPr/>
+        </p:nvSpPr>
+        <p:spPr>
+          <a:xfrm>
+            <a:off x="4828032" y="2651760"/>
+            <a:ext cx="6583679" cy="713232"/>
+          </a:xfrm>
+          <a:prstGeom prst="rect">
+            <a:avLst/>
+          </a:prstGeom>
+          <a:noFill/>
+        </p:spPr>
+        <p:txBody>
+          <a:bodyPr wrap="square" anchor="t" lIns="0" rIns="0" tIns="0" bIns="0">
+            <a:spAutoFit/>
+          </a:bodyPr>
+          <a:lstStyle/>
+          <a:p>
+            <a:pPr algn="l">
+              <a:lnSpc>
+                <a:spcPct val="100000"/>
+              </a:lnSpc>
+              <a:spcBef>
+                <a:spcPts val="0"/>
+              </a:spcBef>
+              <a:spcAft>
+                <a:spcPts val="0"/>
+              </a:spcAft>
+            </a:pPr>
+            <a:r>
+              <a:rPr sz="1019" b="0">
+                <a:solidFill>
+                  <a:srgbClr val="6E687D"/>
+                </a:solidFill>
+                <a:latin typeface="Arial"/>
+              </a:rPr>
+              <a:t>Баланса не хватает или товар уже закончился.</a:t>
+            </a:r>
+          </a:p>
+        </p:txBody>
+      </p:sp>
+      <p:sp>
+        <p:nvSpPr>
+          <p:cNvPr id="17" name="Rectangle 16"/>
           <p:cNvSpPr/>
           <p:nvPr/>
         </p:nvSpPr>
         <p:spPr>
           <a:xfrm>
-            <a:off x="2276856" y="5130881"/>
-            <a:ext cx="329184" cy="329184"/>
-          </a:xfrm>
-          <a:prstGeom prst="ellipse">
+            <a:off x="4645152" y="3822191"/>
+            <a:ext cx="6949440" cy="1627632"/>
+          </a:xfrm>
+          <a:prstGeom prst="rect">
             <a:avLst/>
           </a:prstGeom>
           <a:solidFill>
-            <a:srgbClr val="D94261"/>
+            <a:srgbClr val="E1F6F3"/>
           </a:solidFill>
-          <a:ln>
-            <a:noFill/>
+          <a:ln w="10160">
+            <a:solidFill>
+              <a:srgbClr val="149B91"/>
+            </a:solidFill>
           </a:ln>
         </p:spPr>
         <p:style>
@@ -9485,107 +10070,55 @@
           </a:fontRef>
         </p:style>
         <p:txBody>
-          <a:bodyPr rtlCol="0" anchor="ctr" lIns="0" rIns="0" tIns="0" bIns="0"/>
+          <a:bodyPr rtlCol="0" anchor="ctr"/>
           <a:lstStyle/>
           <a:p>
             <a:pPr algn="ctr"/>
+          </a:p>
+        </p:txBody>
+      </p:sp>
+      <p:sp>
+        <p:nvSpPr>
+          <p:cNvPr id="18" name="TextBox 17"/>
+          <p:cNvSpPr txBox="1"/>
+          <p:nvPr/>
+        </p:nvSpPr>
+        <p:spPr>
+          <a:xfrm>
+            <a:off x="4828032" y="4023360"/>
+            <a:ext cx="6583679" cy="274320"/>
+          </a:xfrm>
+          <a:prstGeom prst="rect">
+            <a:avLst/>
+          </a:prstGeom>
+          <a:noFill/>
+        </p:spPr>
+        <p:txBody>
+          <a:bodyPr wrap="square" anchor="t" lIns="0" rIns="0" tIns="0" bIns="0">
+            <a:spAutoFit/>
+          </a:bodyPr>
+          <a:lstStyle/>
+          <a:p>
+            <a:pPr algn="l">
+              <a:lnSpc>
+                <a:spcPct val="100000"/>
+              </a:lnSpc>
+              <a:spcBef>
+                <a:spcPts val="0"/>
+              </a:spcBef>
+              <a:spcAft>
+                <a:spcPts val="0"/>
+              </a:spcAft>
+            </a:pPr>
             <a:r>
               <a:rPr sz="1200" b="1">
                 <a:solidFill>
-                  <a:srgbClr val="FFFFFF"/>
-                </a:solidFill>
-                <a:latin typeface="Arial"/>
-              </a:rPr>
-              <a:t>3</a:t>
-            </a:r>
-          </a:p>
-        </p:txBody>
-      </p:sp>
-      <p:sp>
-        <p:nvSpPr>
-          <p:cNvPr id="17" name="Up Arrow 16"/>
-          <p:cNvSpPr/>
-          <p:nvPr/>
-        </p:nvSpPr>
-        <p:spPr>
-          <a:xfrm rot="18900000">
-            <a:off x="2532888" y="5405201"/>
-            <a:ext cx="256032" cy="365760"/>
-          </a:xfrm>
-          <a:prstGeom prst="upArrow">
-            <a:avLst/>
-          </a:prstGeom>
-          <a:solidFill>
-            <a:srgbClr val="FFFFFF"/>
-          </a:solidFill>
-          <a:ln w="17780">
-            <a:solidFill>
-              <a:srgbClr val="3B1F68"/>
-            </a:solidFill>
-          </a:ln>
-        </p:spPr>
-        <p:style>
-          <a:lnRef idx="1">
-            <a:schemeClr val="accent1"/>
-          </a:lnRef>
-          <a:fillRef idx="3">
-            <a:schemeClr val="accent1"/>
-          </a:fillRef>
-          <a:effectRef idx="2">
-            <a:schemeClr val="accent1"/>
-          </a:effectRef>
-          <a:fontRef idx="minor">
-            <a:schemeClr val="lt1"/>
-          </a:fontRef>
-        </p:style>
-        <p:txBody>
-          <a:bodyPr rtlCol="0" anchor="ctr"/>
-          <a:lstStyle/>
-          <a:p>
-            <a:pPr algn="ctr"/>
-          </a:p>
-        </p:txBody>
-      </p:sp>
-      <p:sp>
-        <p:nvSpPr>
-          <p:cNvPr id="18" name="Rectangle 17"/>
-          <p:cNvSpPr/>
-          <p:nvPr/>
-        </p:nvSpPr>
-        <p:spPr>
-          <a:xfrm>
-            <a:off x="4645152" y="2066543"/>
-            <a:ext cx="6949440" cy="420624"/>
-          </a:xfrm>
-          <a:prstGeom prst="rect">
-            <a:avLst/>
-          </a:prstGeom>
-          <a:solidFill>
-            <a:srgbClr val="3B1F68"/>
-          </a:solidFill>
-          <a:ln>
-            <a:noFill/>
-          </a:ln>
-        </p:spPr>
-        <p:style>
-          <a:lnRef idx="1">
-            <a:schemeClr val="accent1"/>
-          </a:lnRef>
-          <a:fillRef idx="3">
-            <a:schemeClr val="accent1"/>
-          </a:fillRef>
-          <a:effectRef idx="2">
-            <a:schemeClr val="accent1"/>
-          </a:effectRef>
-          <a:fontRef idx="minor">
-            <a:schemeClr val="lt1"/>
-          </a:fontRef>
-        </p:style>
-        <p:txBody>
-          <a:bodyPr rtlCol="0" anchor="ctr"/>
-          <a:lstStyle/>
-          <a:p>
-            <a:pPr algn="ctr"/>
+                  <a:srgbClr val="21172F"/>
+                </a:solidFill>
+                <a:latin typeface="Arial"/>
+              </a:rPr>
+              <a:t>Как исправить</a:t>
+            </a:r>
           </a:p>
         </p:txBody>
       </p:sp>
@@ -9597,8 +10130,8 @@
         </p:nvSpPr>
         <p:spPr>
           <a:xfrm>
-            <a:off x="4809744" y="2185416"/>
-            <a:ext cx="6620255" cy="164592"/>
+            <a:off x="4828032" y="4407408"/>
+            <a:ext cx="6583679" cy="822960"/>
           </a:xfrm>
           <a:prstGeom prst="rect">
             <a:avLst/>
@@ -9623,13 +10156,13 @@
               </a:spcAft>
             </a:pPr>
             <a:r>
-              <a:rPr sz="950" b="1">
-                <a:solidFill>
-                  <a:srgbClr val="FFFFFF"/>
-                </a:solidFill>
-                <a:latin typeface="Arial"/>
-              </a:rPr>
-              <a:t>ШАГ 3 ИЗ 3</a:t>
+              <a:rPr sz="1019" b="0">
+                <a:solidFill>
+                  <a:srgbClr val="6E687D"/>
+                </a:solidFill>
+                <a:latin typeface="Arial"/>
+              </a:rPr>
+              <a:t>Вернитесь в каталог, включите фильтр наличия и выберите доступную награду по балансу.</a:t>
             </a:r>
           </a:p>
         </p:txBody>
@@ -9637,536 +10170,6 @@
       <p:sp>
         <p:nvSpPr>
           <p:cNvPr id="20" name="Rectangle 19"/>
-          <p:cNvSpPr/>
-          <p:nvPr/>
-        </p:nvSpPr>
-        <p:spPr>
-          <a:xfrm>
-            <a:off x="4645152" y="2596896"/>
-            <a:ext cx="6949440" cy="1499616"/>
-          </a:xfrm>
-          <a:prstGeom prst="rect">
-            <a:avLst/>
-          </a:prstGeom>
-          <a:solidFill>
-            <a:srgbClr val="FFFFFF"/>
-          </a:solidFill>
-          <a:ln w="10160">
-            <a:solidFill>
-              <a:srgbClr val="DED9E8"/>
-            </a:solidFill>
-          </a:ln>
-        </p:spPr>
-        <p:style>
-          <a:lnRef idx="1">
-            <a:schemeClr val="accent1"/>
-          </a:lnRef>
-          <a:fillRef idx="3">
-            <a:schemeClr val="accent1"/>
-          </a:fillRef>
-          <a:effectRef idx="2">
-            <a:schemeClr val="accent1"/>
-          </a:effectRef>
-          <a:fontRef idx="minor">
-            <a:schemeClr val="lt1"/>
-          </a:fontRef>
-        </p:style>
-        <p:txBody>
-          <a:bodyPr rtlCol="0" anchor="ctr"/>
-          <a:lstStyle/>
-          <a:p>
-            <a:pPr algn="ctr"/>
-          </a:p>
-        </p:txBody>
-      </p:sp>
-      <p:sp>
-        <p:nvSpPr>
-          <p:cNvPr id="21" name="Rectangle 20"/>
-          <p:cNvSpPr/>
-          <p:nvPr/>
-        </p:nvSpPr>
-        <p:spPr>
-          <a:xfrm>
-            <a:off x="4645152" y="2596896"/>
-            <a:ext cx="54864" cy="1499616"/>
-          </a:xfrm>
-          <a:prstGeom prst="rect">
-            <a:avLst/>
-          </a:prstGeom>
-          <a:solidFill>
-            <a:srgbClr val="D94261"/>
-          </a:solidFill>
-          <a:ln>
-            <a:noFill/>
-          </a:ln>
-        </p:spPr>
-        <p:style>
-          <a:lnRef idx="1">
-            <a:schemeClr val="accent1"/>
-          </a:lnRef>
-          <a:fillRef idx="3">
-            <a:schemeClr val="accent1"/>
-          </a:fillRef>
-          <a:effectRef idx="2">
-            <a:schemeClr val="accent1"/>
-          </a:effectRef>
-          <a:fontRef idx="minor">
-            <a:schemeClr val="lt1"/>
-          </a:fontRef>
-        </p:style>
-        <p:txBody>
-          <a:bodyPr rtlCol="0" anchor="ctr"/>
-          <a:lstStyle/>
-          <a:p>
-            <a:pPr algn="ctr"/>
-          </a:p>
-        </p:txBody>
-      </p:sp>
-      <p:sp>
-        <p:nvSpPr>
-          <p:cNvPr id="22" name="Rounded Rectangle 21"/>
-          <p:cNvSpPr/>
-          <p:nvPr/>
-        </p:nvSpPr>
-        <p:spPr>
-          <a:xfrm>
-            <a:off x="4809744" y="2734056"/>
-            <a:ext cx="310896" cy="310896"/>
-          </a:xfrm>
-          <a:prstGeom prst="roundRect">
-            <a:avLst/>
-          </a:prstGeom>
-          <a:solidFill>
-            <a:srgbClr val="D94261"/>
-          </a:solidFill>
-          <a:ln>
-            <a:noFill/>
-          </a:ln>
-        </p:spPr>
-        <p:style>
-          <a:lnRef idx="1">
-            <a:schemeClr val="accent1"/>
-          </a:lnRef>
-          <a:fillRef idx="3">
-            <a:schemeClr val="accent1"/>
-          </a:fillRef>
-          <a:effectRef idx="2">
-            <a:schemeClr val="accent1"/>
-          </a:effectRef>
-          <a:fontRef idx="minor">
-            <a:schemeClr val="lt1"/>
-          </a:fontRef>
-        </p:style>
-        <p:txBody>
-          <a:bodyPr rtlCol="0" anchor="ctr"/>
-          <a:lstStyle/>
-          <a:p>
-            <a:pPr algn="ctr"/>
-          </a:p>
-        </p:txBody>
-      </p:sp>
-      <p:sp>
-        <p:nvSpPr>
-          <p:cNvPr id="23" name="TextBox 22"/>
-          <p:cNvSpPr txBox="1"/>
-          <p:nvPr/>
-        </p:nvSpPr>
-        <p:spPr>
-          <a:xfrm>
-            <a:off x="4809744" y="2743200"/>
-            <a:ext cx="310896" cy="256032"/>
-          </a:xfrm>
-          <a:prstGeom prst="rect">
-            <a:avLst/>
-          </a:prstGeom>
-          <a:noFill/>
-        </p:spPr>
-        <p:txBody>
-          <a:bodyPr wrap="square" anchor="ctr" lIns="0" rIns="0" tIns="0" bIns="0">
-            <a:spAutoFit/>
-          </a:bodyPr>
-          <a:lstStyle/>
-          <a:p>
-            <a:pPr algn="ctr">
-              <a:lnSpc>
-                <a:spcPct val="100000"/>
-              </a:lnSpc>
-              <a:spcBef>
-                <a:spcPts val="0"/>
-              </a:spcBef>
-              <a:spcAft>
-                <a:spcPts val="0"/>
-              </a:spcAft>
-            </a:pPr>
-            <a:r>
-              <a:rPr sz="1100" b="1">
-                <a:solidFill>
-                  <a:srgbClr val="FFFFFF"/>
-                </a:solidFill>
-                <a:latin typeface="Arial"/>
-              </a:rPr>
-              <a:t>3</a:t>
-            </a:r>
-          </a:p>
-        </p:txBody>
-      </p:sp>
-      <p:sp>
-        <p:nvSpPr>
-          <p:cNvPr id="24" name="TextBox 23"/>
-          <p:cNvSpPr txBox="1"/>
-          <p:nvPr/>
-        </p:nvSpPr>
-        <p:spPr>
-          <a:xfrm>
-            <a:off x="5230368" y="2688336"/>
-            <a:ext cx="6217920" cy="310896"/>
-          </a:xfrm>
-          <a:prstGeom prst="rect">
-            <a:avLst/>
-          </a:prstGeom>
-          <a:noFill/>
-        </p:spPr>
-        <p:txBody>
-          <a:bodyPr wrap="square" anchor="t" lIns="0" rIns="0" tIns="0" bIns="0">
-            <a:spAutoFit/>
-          </a:bodyPr>
-          <a:lstStyle/>
-          <a:p>
-            <a:pPr algn="l">
-              <a:lnSpc>
-                <a:spcPct val="100000"/>
-              </a:lnSpc>
-              <a:spcBef>
-                <a:spcPts val="0"/>
-              </a:spcBef>
-              <a:spcAft>
-                <a:spcPts val="0"/>
-              </a:spcAft>
-            </a:pPr>
-            <a:r>
-              <a:rPr sz="1180" b="1">
-                <a:solidFill>
-                  <a:srgbClr val="21172F"/>
-                </a:solidFill>
-                <a:latin typeface="Arial"/>
-              </a:rPr>
-              <a:t>Оформите</a:t>
-            </a:r>
-          </a:p>
-        </p:txBody>
-      </p:sp>
-      <p:sp>
-        <p:nvSpPr>
-          <p:cNvPr id="25" name="TextBox 24"/>
-          <p:cNvSpPr txBox="1"/>
-          <p:nvPr/>
-        </p:nvSpPr>
-        <p:spPr>
-          <a:xfrm>
-            <a:off x="5230368" y="3008376"/>
-            <a:ext cx="6217920" cy="1033271"/>
-          </a:xfrm>
-          <a:prstGeom prst="rect">
-            <a:avLst/>
-          </a:prstGeom>
-          <a:noFill/>
-        </p:spPr>
-        <p:txBody>
-          <a:bodyPr wrap="square" anchor="t" lIns="0" rIns="0" tIns="0" bIns="0">
-            <a:spAutoFit/>
-          </a:bodyPr>
-          <a:lstStyle/>
-          <a:p>
-            <a:pPr algn="l">
-              <a:lnSpc>
-                <a:spcPct val="100000"/>
-              </a:lnSpc>
-              <a:spcBef>
-                <a:spcPts val="0"/>
-              </a:spcBef>
-              <a:spcAft>
-                <a:spcPts val="0"/>
-              </a:spcAft>
-            </a:pPr>
-            <a:r>
-              <a:rPr sz="1000" b="0">
-                <a:solidFill>
-                  <a:srgbClr val="6E687D"/>
-                </a:solidFill>
-                <a:latin typeface="Arial"/>
-              </a:rPr>
-              <a:t>Нажмите один раз и дождитесь подтверждения.</a:t>
-            </a:r>
-          </a:p>
-        </p:txBody>
-      </p:sp>
-      <p:sp>
-        <p:nvSpPr>
-          <p:cNvPr id="26" name="Rectangle 25"/>
-          <p:cNvSpPr/>
-          <p:nvPr/>
-        </p:nvSpPr>
-        <p:spPr>
-          <a:xfrm>
-            <a:off x="4645152" y="4315968"/>
-            <a:ext cx="6949440" cy="877824"/>
-          </a:xfrm>
-          <a:prstGeom prst="rect">
-            <a:avLst/>
-          </a:prstGeom>
-          <a:solidFill>
-            <a:srgbClr val="E1F6F3"/>
-          </a:solidFill>
-          <a:ln>
-            <a:noFill/>
-          </a:ln>
-        </p:spPr>
-        <p:style>
-          <a:lnRef idx="1">
-            <a:schemeClr val="accent1"/>
-          </a:lnRef>
-          <a:fillRef idx="3">
-            <a:schemeClr val="accent1"/>
-          </a:fillRef>
-          <a:effectRef idx="2">
-            <a:schemeClr val="accent1"/>
-          </a:effectRef>
-          <a:fontRef idx="minor">
-            <a:schemeClr val="lt1"/>
-          </a:fontRef>
-        </p:style>
-        <p:txBody>
-          <a:bodyPr rtlCol="0" anchor="ctr"/>
-          <a:lstStyle/>
-          <a:p>
-            <a:pPr algn="ctr"/>
-          </a:p>
-        </p:txBody>
-      </p:sp>
-      <p:sp>
-        <p:nvSpPr>
-          <p:cNvPr id="27" name="Rectangle 26"/>
-          <p:cNvSpPr/>
-          <p:nvPr/>
-        </p:nvSpPr>
-        <p:spPr>
-          <a:xfrm>
-            <a:off x="4645152" y="4315968"/>
-            <a:ext cx="54864" cy="877824"/>
-          </a:xfrm>
-          <a:prstGeom prst="rect">
-            <a:avLst/>
-          </a:prstGeom>
-          <a:solidFill>
-            <a:srgbClr val="149B91"/>
-          </a:solidFill>
-          <a:ln>
-            <a:noFill/>
-          </a:ln>
-        </p:spPr>
-        <p:style>
-          <a:lnRef idx="1">
-            <a:schemeClr val="accent1"/>
-          </a:lnRef>
-          <a:fillRef idx="3">
-            <a:schemeClr val="accent1"/>
-          </a:fillRef>
-          <a:effectRef idx="2">
-            <a:schemeClr val="accent1"/>
-          </a:effectRef>
-          <a:fontRef idx="minor">
-            <a:schemeClr val="lt1"/>
-          </a:fontRef>
-        </p:style>
-        <p:txBody>
-          <a:bodyPr rtlCol="0" anchor="ctr"/>
-          <a:lstStyle/>
-          <a:p>
-            <a:pPr algn="ctr"/>
-          </a:p>
-        </p:txBody>
-      </p:sp>
-      <p:sp>
-        <p:nvSpPr>
-          <p:cNvPr id="28" name="TextBox 27"/>
-          <p:cNvSpPr txBox="1"/>
-          <p:nvPr/>
-        </p:nvSpPr>
-        <p:spPr>
-          <a:xfrm>
-            <a:off x="4846320" y="4425696"/>
-            <a:ext cx="6620255" cy="219456"/>
-          </a:xfrm>
-          <a:prstGeom prst="rect">
-            <a:avLst/>
-          </a:prstGeom>
-          <a:noFill/>
-        </p:spPr>
-        <p:txBody>
-          <a:bodyPr wrap="square" anchor="t" lIns="0" rIns="0" tIns="0" bIns="0">
-            <a:spAutoFit/>
-          </a:bodyPr>
-          <a:lstStyle/>
-          <a:p>
-            <a:pPr algn="l">
-              <a:lnSpc>
-                <a:spcPct val="100000"/>
-              </a:lnSpc>
-              <a:spcBef>
-                <a:spcPts val="0"/>
-              </a:spcBef>
-              <a:spcAft>
-                <a:spcPts val="0"/>
-              </a:spcAft>
-            </a:pPr>
-            <a:r>
-              <a:rPr sz="1150" b="1">
-                <a:solidFill>
-                  <a:srgbClr val="21172F"/>
-                </a:solidFill>
-                <a:latin typeface="Arial"/>
-              </a:rPr>
-              <a:t>Проверка результата</a:t>
-            </a:r>
-          </a:p>
-        </p:txBody>
-      </p:sp>
-      <p:sp>
-        <p:nvSpPr>
-          <p:cNvPr id="29" name="TextBox 28"/>
-          <p:cNvSpPr txBox="1"/>
-          <p:nvPr/>
-        </p:nvSpPr>
-        <p:spPr>
-          <a:xfrm>
-            <a:off x="4846320" y="4681728"/>
-            <a:ext cx="6620255" cy="402336"/>
-          </a:xfrm>
-          <a:prstGeom prst="rect">
-            <a:avLst/>
-          </a:prstGeom>
-          <a:noFill/>
-        </p:spPr>
-        <p:txBody>
-          <a:bodyPr wrap="square" anchor="t" lIns="0" rIns="0" tIns="0" bIns="0">
-            <a:spAutoFit/>
-          </a:bodyPr>
-          <a:lstStyle/>
-          <a:p>
-            <a:pPr algn="l">
-              <a:lnSpc>
-                <a:spcPct val="100000"/>
-              </a:lnSpc>
-              <a:spcBef>
-                <a:spcPts val="0"/>
-              </a:spcBef>
-              <a:spcAft>
-                <a:spcPts val="0"/>
-              </a:spcAft>
-            </a:pPr>
-            <a:r>
-              <a:rPr sz="1000" b="0">
-                <a:solidFill>
-                  <a:srgbClr val="6E687D"/>
-                </a:solidFill>
-                <a:latin typeface="Arial"/>
-              </a:rPr>
-              <a:t>Получатель, итог и остаток на счете должны быть верными до подтверждения.</a:t>
-            </a:r>
-          </a:p>
-        </p:txBody>
-      </p:sp>
-      <p:sp>
-        <p:nvSpPr>
-          <p:cNvPr id="30" name="Rectangle 29"/>
-          <p:cNvSpPr/>
-          <p:nvPr/>
-        </p:nvSpPr>
-        <p:spPr>
-          <a:xfrm>
-            <a:off x="4645152" y="5413248"/>
-            <a:ext cx="6949440" cy="603504"/>
-          </a:xfrm>
-          <a:prstGeom prst="rect">
-            <a:avLst/>
-          </a:prstGeom>
-          <a:solidFill>
-            <a:srgbClr val="FFF5C9"/>
-          </a:solidFill>
-          <a:ln>
-            <a:noFill/>
-          </a:ln>
-        </p:spPr>
-        <p:style>
-          <a:lnRef idx="1">
-            <a:schemeClr val="accent1"/>
-          </a:lnRef>
-          <a:fillRef idx="3">
-            <a:schemeClr val="accent1"/>
-          </a:fillRef>
-          <a:effectRef idx="2">
-            <a:schemeClr val="accent1"/>
-          </a:effectRef>
-          <a:fontRef idx="minor">
-            <a:schemeClr val="lt1"/>
-          </a:fontRef>
-        </p:style>
-        <p:txBody>
-          <a:bodyPr rtlCol="0" anchor="ctr"/>
-          <a:lstStyle/>
-          <a:p>
-            <a:pPr algn="ctr"/>
-          </a:p>
-        </p:txBody>
-      </p:sp>
-      <p:sp>
-        <p:nvSpPr>
-          <p:cNvPr id="31" name="TextBox 30"/>
-          <p:cNvSpPr txBox="1"/>
-          <p:nvPr/>
-        </p:nvSpPr>
-        <p:spPr>
-          <a:xfrm>
-            <a:off x="4809744" y="5559552"/>
-            <a:ext cx="6620255" cy="292608"/>
-          </a:xfrm>
-          <a:prstGeom prst="rect">
-            <a:avLst/>
-          </a:prstGeom>
-          <a:noFill/>
-        </p:spPr>
-        <p:txBody>
-          <a:bodyPr wrap="square" anchor="t" lIns="0" rIns="0" tIns="0" bIns="0">
-            <a:spAutoFit/>
-          </a:bodyPr>
-          <a:lstStyle/>
-          <a:p>
-            <a:pPr algn="l">
-              <a:lnSpc>
-                <a:spcPct val="100000"/>
-              </a:lnSpc>
-              <a:spcBef>
-                <a:spcPts val="0"/>
-              </a:spcBef>
-              <a:spcAft>
-                <a:spcPts val="0"/>
-              </a:spcAft>
-            </a:pPr>
-            <a:r>
-              <a:rPr sz="919" b="0">
-                <a:solidFill>
-                  <a:srgbClr val="6E687D"/>
-                </a:solidFill>
-                <a:latin typeface="Arial"/>
-              </a:rPr>
-              <a:t>Курсор и номер показывают единственное действие этого кадра.</a:t>
-            </a:r>
-          </a:p>
-        </p:txBody>
-      </p:sp>
-      <p:sp>
-        <p:nvSpPr>
-          <p:cNvPr id="32" name="Rectangle 31"/>
           <p:cNvSpPr/>
           <p:nvPr/>
         </p:nvSpPr>
@@ -10209,7 +10212,7 @@
       </p:sp>
       <p:sp>
         <p:nvSpPr>
-          <p:cNvPr id="33" name="TextBox 32"/>
+          <p:cNvPr id="21" name="TextBox 20"/>
           <p:cNvSpPr txBox="1"/>
           <p:nvPr/>
         </p:nvSpPr>
@@ -10496,7 +10499,7 @@
                 </a:solidFill>
                 <a:latin typeface="Arial"/>
               </a:rPr>
-              <a:t>Финальное подтверждение заказа</a:t>
+              <a:t>Проверка количества и суммы</a:t>
             </a:r>
           </a:p>
         </p:txBody>
@@ -10674,7 +10677,7 @@
                 </a:solidFill>
                 <a:latin typeface="Arial"/>
               </a:rPr>
-              <a:t>Корзина -&gt; Оформить заказ</a:t>
+              <a:t>Корзина</a:t>
             </a:r>
           </a:p>
         </p:txBody>
@@ -10828,8 +10831,8 @@
         </p:blipFill>
         <p:spPr>
           <a:xfrm>
-            <a:off x="1571034" y="2432303"/>
-            <a:ext cx="1740826" cy="3767327"/>
+            <a:off x="1639451" y="2432303"/>
+            <a:ext cx="1603993" cy="3767327"/>
           </a:xfrm>
           <a:prstGeom prst="rect">
             <a:avLst/>
@@ -10844,7 +10847,7 @@
         </p:nvSpPr>
         <p:spPr>
           <a:xfrm>
-            <a:off x="2212848" y="3484595"/>
+            <a:off x="2212848" y="3333902"/>
             <a:ext cx="457200" cy="457200"/>
           </a:xfrm>
           <a:prstGeom prst="ellipse">
@@ -10887,7 +10890,7 @@
         </p:nvSpPr>
         <p:spPr>
           <a:xfrm>
-            <a:off x="2276856" y="3548603"/>
+            <a:off x="2276856" y="3397910"/>
             <a:ext cx="329184" cy="329184"/>
           </a:xfrm>
           <a:prstGeom prst="ellipse">
@@ -10939,7 +10942,7 @@
         </p:nvSpPr>
         <p:spPr>
           <a:xfrm rot="18900000">
-            <a:off x="2532888" y="3822923"/>
+            <a:off x="2532888" y="3672230"/>
             <a:ext cx="256032" cy="365760"/>
           </a:xfrm>
           <a:prstGeom prst="upArrow">
@@ -11280,7 +11283,7 @@
                 </a:solidFill>
                 <a:latin typeface="Arial"/>
               </a:rPr>
-              <a:t>Проверьте получателя</a:t>
+              <a:t>Измените количество</a:t>
             </a:r>
           </a:p>
         </p:txBody>
@@ -11325,7 +11328,7 @@
                 </a:solidFill>
                 <a:latin typeface="Arial"/>
               </a:rPr>
-              <a:t>У родителя здесь указано имя выбранного ребенка.</a:t>
+              <a:t>Минус и плюс сразу пересчитывают сумму.</a:t>
             </a:r>
           </a:p>
         </p:txBody>
@@ -11926,7 +11929,7 @@
                 </a:solidFill>
                 <a:latin typeface="Arial"/>
               </a:rPr>
-              <a:t>Финальное подтверждение заказа</a:t>
+              <a:t>Проверка количества и суммы</a:t>
             </a:r>
           </a:p>
         </p:txBody>
@@ -12104,7 +12107,7 @@
                 </a:solidFill>
                 <a:latin typeface="Arial"/>
               </a:rPr>
-              <a:t>Корзина -&gt; Оформить заказ</a:t>
+              <a:t>Корзина</a:t>
             </a:r>
           </a:p>
         </p:txBody>
@@ -12258,8 +12261,8 @@
         </p:blipFill>
         <p:spPr>
           <a:xfrm>
-            <a:off x="1571034" y="2432303"/>
-            <a:ext cx="1740826" cy="3767327"/>
+            <a:off x="1639451" y="2432303"/>
+            <a:ext cx="1603993" cy="3767327"/>
           </a:xfrm>
           <a:prstGeom prst="rect">
             <a:avLst/>
@@ -12274,7 +12277,7 @@
         </p:nvSpPr>
         <p:spPr>
           <a:xfrm>
-            <a:off x="2212848" y="4238061"/>
+            <a:off x="2212848" y="4351080"/>
             <a:ext cx="457200" cy="457200"/>
           </a:xfrm>
           <a:prstGeom prst="ellipse">
@@ -12317,7 +12320,7 @@
         </p:nvSpPr>
         <p:spPr>
           <a:xfrm>
-            <a:off x="2276856" y="4302069"/>
+            <a:off x="2276856" y="4415088"/>
             <a:ext cx="329184" cy="329184"/>
           </a:xfrm>
           <a:prstGeom prst="ellipse">
@@ -12369,7 +12372,7 @@
         </p:nvSpPr>
         <p:spPr>
           <a:xfrm rot="18900000">
-            <a:off x="2532888" y="4576389"/>
+            <a:off x="2532888" y="4689408"/>
             <a:ext cx="256032" cy="365760"/>
           </a:xfrm>
           <a:prstGeom prst="upArrow">
@@ -12710,7 +12713,7 @@
                 </a:solidFill>
                 <a:latin typeface="Arial"/>
               </a:rPr>
-              <a:t>Сверьте итог</a:t>
+              <a:t>Сверьте остаток</a:t>
             </a:r>
           </a:p>
         </p:txBody>
@@ -12755,7 +12758,7 @@
                 </a:solidFill>
                 <a:latin typeface="Arial"/>
               </a:rPr>
-              <a:t>Сумма списания не должна превышать баланс.</a:t>
+              <a:t>Показан баланс после списания.</a:t>
             </a:r>
           </a:p>
         </p:txBody>
@@ -13356,7 +13359,7 @@
                 </a:solidFill>
                 <a:latin typeface="Arial"/>
               </a:rPr>
-              <a:t>Финальное подтверждение заказа</a:t>
+              <a:t>Проверка количества и суммы</a:t>
             </a:r>
           </a:p>
         </p:txBody>
@@ -13534,7 +13537,7 @@
                 </a:solidFill>
                 <a:latin typeface="Arial"/>
               </a:rPr>
-              <a:t>Корзина -&gt; Оформить заказ</a:t>
+              <a:t>Корзина</a:t>
             </a:r>
           </a:p>
         </p:txBody>
@@ -13688,8 +13691,8 @@
         </p:blipFill>
         <p:spPr>
           <a:xfrm>
-            <a:off x="1571034" y="2432303"/>
-            <a:ext cx="1740826" cy="3767327"/>
+            <a:off x="1639451" y="2432303"/>
+            <a:ext cx="1603993" cy="3767327"/>
           </a:xfrm>
           <a:prstGeom prst="rect">
             <a:avLst/>
@@ -13704,7 +13707,7 @@
         </p:nvSpPr>
         <p:spPr>
           <a:xfrm>
-            <a:off x="2212848" y="5142219"/>
+            <a:off x="2212848" y="5066873"/>
             <a:ext cx="457200" cy="457200"/>
           </a:xfrm>
           <a:prstGeom prst="ellipse">
@@ -13747,7 +13750,7 @@
         </p:nvSpPr>
         <p:spPr>
           <a:xfrm>
-            <a:off x="2276856" y="5206227"/>
+            <a:off x="2276856" y="5130881"/>
             <a:ext cx="329184" cy="329184"/>
           </a:xfrm>
           <a:prstGeom prst="ellipse">
@@ -13799,7 +13802,7 @@
         </p:nvSpPr>
         <p:spPr>
           <a:xfrm rot="18900000">
-            <a:off x="2532888" y="5480547"/>
+            <a:off x="2532888" y="5405201"/>
             <a:ext cx="256032" cy="365760"/>
           </a:xfrm>
           <a:prstGeom prst="upArrow">
@@ -14140,7 +14143,7 @@
                 </a:solidFill>
                 <a:latin typeface="Arial"/>
               </a:rPr>
-              <a:t>Подтвердите</a:t>
+              <a:t>Оформите</a:t>
             </a:r>
           </a:p>
         </p:txBody>
@@ -14185,7 +14188,7 @@
                 </a:solidFill>
                 <a:latin typeface="Arial"/>
               </a:rPr>
-              <a:t>Повторное нажатие не требуется.</a:t>
+              <a:t>Нажмите один раз и дождитесь подтверждения.</a:t>
             </a:r>
           </a:p>
         </p:txBody>
@@ -14361,7 +14364,7 @@
                 </a:solidFill>
                 <a:latin typeface="Arial"/>
               </a:rPr>
-              <a:t>После успеха корзина очищается, а заказ появляется в соответствующей вкладке.</a:t>
+              <a:t>Получатель, итог и остаток на счете должны быть верными до подтверждения.</a:t>
             </a:r>
           </a:p>
         </p:txBody>
@@ -14741,7 +14744,7 @@
                 </a:solidFill>
                 <a:latin typeface="Arial"/>
               </a:rPr>
-              <a:t>СЕМЬЯ</a:t>
+              <a:t>КОРЗИНА</a:t>
             </a:r>
           </a:p>
         </p:txBody>
@@ -14786,7 +14789,7 @@
                 </a:solidFill>
                 <a:latin typeface="Arial"/>
               </a:rPr>
-              <a:t>Заказы на телефоне</a:t>
+              <a:t>Финальное подтверждение заказа</a:t>
             </a:r>
           </a:p>
         </p:txBody>
@@ -14964,7 +14967,7 @@
                 </a:solidFill>
                 <a:latin typeface="Arial"/>
               </a:rPr>
-              <a:t>Заказы -&gt; состояние</a:t>
+              <a:t>Корзина -&gt; Оформить заказ</a:t>
             </a:r>
           </a:p>
         </p:txBody>
@@ -15118,8 +15121,8 @@
         </p:blipFill>
         <p:spPr>
           <a:xfrm>
-            <a:off x="1789603" y="2432303"/>
-            <a:ext cx="1303689" cy="3767327"/>
+            <a:off x="1571034" y="2432303"/>
+            <a:ext cx="1740826" cy="3767327"/>
           </a:xfrm>
           <a:prstGeom prst="rect">
             <a:avLst/>
@@ -15134,7 +15137,7 @@
         </p:nvSpPr>
         <p:spPr>
           <a:xfrm>
-            <a:off x="2212848" y="2881823"/>
+            <a:off x="2212848" y="3484595"/>
             <a:ext cx="457200" cy="457200"/>
           </a:xfrm>
           <a:prstGeom prst="ellipse">
@@ -15177,7 +15180,7 @@
         </p:nvSpPr>
         <p:spPr>
           <a:xfrm>
-            <a:off x="2276856" y="2945831"/>
+            <a:off x="2276856" y="3548603"/>
             <a:ext cx="329184" cy="329184"/>
           </a:xfrm>
           <a:prstGeom prst="ellipse">
@@ -15229,7 +15232,7 @@
         </p:nvSpPr>
         <p:spPr>
           <a:xfrm rot="18900000">
-            <a:off x="2532888" y="3220151"/>
+            <a:off x="2532888" y="3822923"/>
             <a:ext cx="256032" cy="365760"/>
           </a:xfrm>
           <a:prstGeom prst="upArrow">
@@ -15570,7 +15573,7 @@
                 </a:solidFill>
                 <a:latin typeface="Arial"/>
               </a:rPr>
-              <a:t>Прокрутите статусы</a:t>
+              <a:t>Проверьте получателя</a:t>
             </a:r>
           </a:p>
         </p:txBody>
@@ -15615,7 +15618,7 @@
                 </a:solidFill>
                 <a:latin typeface="Arial"/>
               </a:rPr>
-              <a:t>Вкладки доступны горизонтальным свайпом.</a:t>
+              <a:t>У родителя здесь указано имя выбранного ребенка.</a:t>
             </a:r>
           </a:p>
         </p:txBody>
@@ -16171,7 +16174,7 @@
                 </a:solidFill>
                 <a:latin typeface="Arial"/>
               </a:rPr>
-              <a:t>СЕМЬЯ</a:t>
+              <a:t>КОРЗИНА</a:t>
             </a:r>
           </a:p>
         </p:txBody>
@@ -16216,7 +16219,7 @@
                 </a:solidFill>
                 <a:latin typeface="Arial"/>
               </a:rPr>
-              <a:t>Заказы на телефоне</a:t>
+              <a:t>Финальное подтверждение заказа</a:t>
             </a:r>
           </a:p>
         </p:txBody>
@@ -16394,7 +16397,7 @@
                 </a:solidFill>
                 <a:latin typeface="Arial"/>
               </a:rPr>
-              <a:t>Заказы -&gt; состояние</a:t>
+              <a:t>Корзина -&gt; Оформить заказ</a:t>
             </a:r>
           </a:p>
         </p:txBody>
@@ -16548,8 +16551,8 @@
         </p:blipFill>
         <p:spPr>
           <a:xfrm>
-            <a:off x="1789603" y="2432303"/>
-            <a:ext cx="1303689" cy="3767327"/>
+            <a:off x="1571034" y="2432303"/>
+            <a:ext cx="1740826" cy="3767327"/>
           </a:xfrm>
           <a:prstGeom prst="rect">
             <a:avLst/>
@@ -16564,7 +16567,7 @@
         </p:nvSpPr>
         <p:spPr>
           <a:xfrm>
-            <a:off x="2212848" y="3899001"/>
+            <a:off x="2212848" y="4238061"/>
             <a:ext cx="457200" cy="457200"/>
           </a:xfrm>
           <a:prstGeom prst="ellipse">
@@ -16607,7 +16610,7 @@
         </p:nvSpPr>
         <p:spPr>
           <a:xfrm>
-            <a:off x="2276856" y="3963009"/>
+            <a:off x="2276856" y="4302069"/>
             <a:ext cx="329184" cy="329184"/>
           </a:xfrm>
           <a:prstGeom prst="ellipse">
@@ -16659,7 +16662,7 @@
         </p:nvSpPr>
         <p:spPr>
           <a:xfrm rot="18900000">
-            <a:off x="2532888" y="4237329"/>
+            <a:off x="2532888" y="4576389"/>
             <a:ext cx="256032" cy="365760"/>
           </a:xfrm>
           <a:prstGeom prst="upArrow">
@@ -17000,7 +17003,7 @@
                 </a:solidFill>
                 <a:latin typeface="Arial"/>
               </a:rPr>
-              <a:t>Сверьте карточку</a:t>
+              <a:t>Сверьте итог</a:t>
             </a:r>
           </a:p>
         </p:txBody>
@@ -17045,7 +17048,7 @@
                 </a:solidFill>
                 <a:latin typeface="Arial"/>
               </a:rPr>
-              <a:t>Видны товар, сумма и текущий этап.</a:t>
+              <a:t>Сумма списания не должна превышать баланс.</a:t>
             </a:r>
           </a:p>
         </p:txBody>
@@ -17978,8 +17981,8 @@
         </p:blipFill>
         <p:spPr>
           <a:xfrm>
-            <a:off x="1571034" y="2432303"/>
-            <a:ext cx="1740826" cy="3767327"/>
+            <a:off x="1741134" y="2432303"/>
+            <a:ext cx="1400627" cy="3767327"/>
           </a:xfrm>
           <a:prstGeom prst="rect">
             <a:avLst/>
@@ -19031,7 +19034,7 @@
                 </a:solidFill>
                 <a:latin typeface="Arial"/>
               </a:rPr>
-              <a:t>СЕМЬЯ</a:t>
+              <a:t>КОРЗИНА</a:t>
             </a:r>
           </a:p>
         </p:txBody>
@@ -19076,7 +19079,7 @@
                 </a:solidFill>
                 <a:latin typeface="Arial"/>
               </a:rPr>
-              <a:t>Заказы на телефоне</a:t>
+              <a:t>Финальное подтверждение заказа</a:t>
             </a:r>
           </a:p>
         </p:txBody>
@@ -19254,7 +19257,7 @@
                 </a:solidFill>
                 <a:latin typeface="Arial"/>
               </a:rPr>
-              <a:t>Заказы -&gt; состояние</a:t>
+              <a:t>Корзина -&gt; Оформить заказ</a:t>
             </a:r>
           </a:p>
         </p:txBody>
@@ -19408,8 +19411,8 @@
         </p:blipFill>
         <p:spPr>
           <a:xfrm>
-            <a:off x="1789603" y="2432303"/>
-            <a:ext cx="1303689" cy="3767327"/>
+            <a:off x="1571034" y="2432303"/>
+            <a:ext cx="1740826" cy="3767327"/>
           </a:xfrm>
           <a:prstGeom prst="rect">
             <a:avLst/>
@@ -19424,7 +19427,7 @@
         </p:nvSpPr>
         <p:spPr>
           <a:xfrm>
-            <a:off x="2212848" y="4916180"/>
+            <a:off x="2212848" y="5142219"/>
             <a:ext cx="457200" cy="457200"/>
           </a:xfrm>
           <a:prstGeom prst="ellipse">
@@ -19467,7 +19470,7 @@
         </p:nvSpPr>
         <p:spPr>
           <a:xfrm>
-            <a:off x="2276856" y="4980188"/>
+            <a:off x="2276856" y="5206227"/>
             <a:ext cx="329184" cy="329184"/>
           </a:xfrm>
           <a:prstGeom prst="ellipse">
@@ -19519,7 +19522,7 @@
         </p:nvSpPr>
         <p:spPr>
           <a:xfrm rot="18900000">
-            <a:off x="2532888" y="5254508"/>
+            <a:off x="2532888" y="5480547"/>
             <a:ext cx="256032" cy="365760"/>
           </a:xfrm>
           <a:prstGeom prst="upArrow">
@@ -19860,7 +19863,7 @@
                 </a:solidFill>
                 <a:latin typeface="Arial"/>
               </a:rPr>
-              <a:t>Подробнее</a:t>
+              <a:t>Подтвердите</a:t>
             </a:r>
           </a:p>
         </p:txBody>
@@ -19905,7 +19908,7 @@
                 </a:solidFill>
                 <a:latin typeface="Arial"/>
               </a:rPr>
-              <a:t>Откройте историю конкретного заказа.</a:t>
+              <a:t>Повторное нажатие не требуется.</a:t>
             </a:r>
           </a:p>
         </p:txBody>
@@ -20081,7 +20084,7 @@
                 </a:solidFill>
                 <a:latin typeface="Arial"/>
               </a:rPr>
-              <a:t>Ученик и родитель не видят кнопку отмены ни на одном этапе.</a:t>
+              <a:t>После успеха корзина очищается, а заказ появляется в соответствующей вкладке.</a:t>
             </a:r>
           </a:p>
         </p:txBody>
@@ -20506,7 +20509,7 @@
                 </a:solidFill>
                 <a:latin typeface="Arial"/>
               </a:rPr>
-              <a:t>Карточка и история заказа</a:t>
+              <a:t>Заказы на телефоне</a:t>
             </a:r>
           </a:p>
         </p:txBody>
@@ -20684,7 +20687,7 @@
                 </a:solidFill>
                 <a:latin typeface="Arial"/>
               </a:rPr>
-              <a:t>Заказы -&gt; Подробнее</a:t>
+              <a:t>Заказы -&gt; состояние</a:t>
             </a:r>
           </a:p>
         </p:txBody>
@@ -20838,8 +20841,8 @@
         </p:blipFill>
         <p:spPr>
           <a:xfrm>
-            <a:off x="1571034" y="2432303"/>
-            <a:ext cx="1740826" cy="3767327"/>
+            <a:off x="1804302" y="2432303"/>
+            <a:ext cx="1274291" cy="3767327"/>
           </a:xfrm>
           <a:prstGeom prst="rect">
             <a:avLst/>
@@ -20854,7 +20857,7 @@
         </p:nvSpPr>
         <p:spPr>
           <a:xfrm>
-            <a:off x="2212848" y="3258555"/>
+            <a:off x="2212848" y="2881823"/>
             <a:ext cx="457200" cy="457200"/>
           </a:xfrm>
           <a:prstGeom prst="ellipse">
@@ -20897,7 +20900,7 @@
         </p:nvSpPr>
         <p:spPr>
           <a:xfrm>
-            <a:off x="2276856" y="3322563"/>
+            <a:off x="2276856" y="2945831"/>
             <a:ext cx="329184" cy="329184"/>
           </a:xfrm>
           <a:prstGeom prst="ellipse">
@@ -20949,7 +20952,7 @@
         </p:nvSpPr>
         <p:spPr>
           <a:xfrm rot="18900000">
-            <a:off x="2532888" y="3596883"/>
+            <a:off x="2532888" y="3220151"/>
             <a:ext cx="256032" cy="365760"/>
           </a:xfrm>
           <a:prstGeom prst="upArrow">
@@ -21290,7 +21293,7 @@
                 </a:solidFill>
                 <a:latin typeface="Arial"/>
               </a:rPr>
-              <a:t>Сверьте состав</a:t>
+              <a:t>Прокрутите статусы</a:t>
             </a:r>
           </a:p>
         </p:txBody>
@@ -21335,7 +21338,7 @@
                 </a:solidFill>
                 <a:latin typeface="Arial"/>
               </a:rPr>
-              <a:t>Проверьте товары, количество и сумму.</a:t>
+              <a:t>Вкладки доступны горизонтальным свайпом.</a:t>
             </a:r>
           </a:p>
         </p:txBody>
@@ -21936,7 +21939,7 @@
                 </a:solidFill>
                 <a:latin typeface="Arial"/>
               </a:rPr>
-              <a:t>Карточка и история заказа</a:t>
+              <a:t>Заказы на телефоне</a:t>
             </a:r>
           </a:p>
         </p:txBody>
@@ -22114,7 +22117,7 @@
                 </a:solidFill>
                 <a:latin typeface="Arial"/>
               </a:rPr>
-              <a:t>Заказы -&gt; Подробнее</a:t>
+              <a:t>Заказы -&gt; состояние</a:t>
             </a:r>
           </a:p>
         </p:txBody>
@@ -22268,8 +22271,8 @@
         </p:blipFill>
         <p:spPr>
           <a:xfrm>
-            <a:off x="1571034" y="2432303"/>
-            <a:ext cx="1740826" cy="3767327"/>
+            <a:off x="1804302" y="2432303"/>
+            <a:ext cx="1274291" cy="3767327"/>
           </a:xfrm>
           <a:prstGeom prst="rect">
             <a:avLst/>
@@ -22284,7 +22287,7 @@
         </p:nvSpPr>
         <p:spPr>
           <a:xfrm>
-            <a:off x="2212848" y="4388754"/>
+            <a:off x="2212848" y="3899001"/>
             <a:ext cx="457200" cy="457200"/>
           </a:xfrm>
           <a:prstGeom prst="ellipse">
@@ -22327,7 +22330,7 @@
         </p:nvSpPr>
         <p:spPr>
           <a:xfrm>
-            <a:off x="2276856" y="4452762"/>
+            <a:off x="2276856" y="3963009"/>
             <a:ext cx="329184" cy="329184"/>
           </a:xfrm>
           <a:prstGeom prst="ellipse">
@@ -22379,7 +22382,7 @@
         </p:nvSpPr>
         <p:spPr>
           <a:xfrm rot="18900000">
-            <a:off x="2532888" y="4727082"/>
+            <a:off x="2532888" y="4237329"/>
             <a:ext cx="256032" cy="365760"/>
           </a:xfrm>
           <a:prstGeom prst="upArrow">
@@ -22720,7 +22723,7 @@
                 </a:solidFill>
                 <a:latin typeface="Arial"/>
               </a:rPr>
-              <a:t>Читайте историю</a:t>
+              <a:t>Сверьте карточку</a:t>
             </a:r>
           </a:p>
         </p:txBody>
@@ -22765,7 +22768,7 @@
                 </a:solidFill>
                 <a:latin typeface="Arial"/>
               </a:rPr>
-              <a:t>Каждая запись содержит дату и фактическое действие.</a:t>
+              <a:t>Видны товар, сумма и текущий этап.</a:t>
             </a:r>
           </a:p>
         </p:txBody>
@@ -23366,7 +23369,7 @@
                 </a:solidFill>
                 <a:latin typeface="Arial"/>
               </a:rPr>
-              <a:t>Карточка и история заказа</a:t>
+              <a:t>Заказы на телефоне</a:t>
             </a:r>
           </a:p>
         </p:txBody>
@@ -23544,7 +23547,7 @@
                 </a:solidFill>
                 <a:latin typeface="Arial"/>
               </a:rPr>
-              <a:t>Заказы -&gt; Подробнее</a:t>
+              <a:t>Заказы -&gt; состояние</a:t>
             </a:r>
           </a:p>
         </p:txBody>
@@ -23698,8 +23701,8 @@
         </p:blipFill>
         <p:spPr>
           <a:xfrm>
-            <a:off x="1571034" y="2432303"/>
-            <a:ext cx="1740826" cy="3767327"/>
+            <a:off x="1804302" y="2432303"/>
+            <a:ext cx="1274291" cy="3767327"/>
           </a:xfrm>
           <a:prstGeom prst="rect">
             <a:avLst/>
@@ -23714,7 +23717,7 @@
         </p:nvSpPr>
         <p:spPr>
           <a:xfrm>
-            <a:off x="2909178" y="2505090"/>
+            <a:off x="2212848" y="4916180"/>
             <a:ext cx="457200" cy="457200"/>
           </a:xfrm>
           <a:prstGeom prst="ellipse">
@@ -23757,7 +23760,7 @@
         </p:nvSpPr>
         <p:spPr>
           <a:xfrm>
-            <a:off x="2973186" y="2569098"/>
+            <a:off x="2276856" y="4980188"/>
             <a:ext cx="329184" cy="329184"/>
           </a:xfrm>
           <a:prstGeom prst="ellipse">
@@ -23809,7 +23812,7 @@
         </p:nvSpPr>
         <p:spPr>
           <a:xfrm rot="18900000">
-            <a:off x="3229218" y="2843418"/>
+            <a:off x="2532888" y="5254508"/>
             <a:ext cx="256032" cy="365760"/>
           </a:xfrm>
           <a:prstGeom prst="upArrow">
@@ -24150,7 +24153,7 @@
                 </a:solidFill>
                 <a:latin typeface="Arial"/>
               </a:rPr>
-              <a:t>Закройте</a:t>
+              <a:t>Подробнее</a:t>
             </a:r>
           </a:p>
         </p:txBody>
@@ -24195,7 +24198,7 @@
                 </a:solidFill>
                 <a:latin typeface="Arial"/>
               </a:rPr>
-              <a:t>Крестик возвращает в список без изменения заказа.</a:t>
+              <a:t>Откройте историю конкретного заказа.</a:t>
             </a:r>
           </a:p>
         </p:txBody>
@@ -24371,7 +24374,7 @@
                 </a:solidFill>
                 <a:latin typeface="Arial"/>
               </a:rPr>
-              <a:t>Служебные подписи из внутренних сводок пользователю не показываются.</a:t>
+              <a:t>Ученик и родитель не видят кнопку отмены ни на одном этапе.</a:t>
             </a:r>
           </a:p>
         </p:txBody>
@@ -24751,7 +24754,7 @@
                 </a:solidFill>
                 <a:latin typeface="Arial"/>
               </a:rPr>
-              <a:t>ЦИФРОВОЙ ТОВАР</a:t>
+              <a:t>СЕМЬЯ</a:t>
             </a:r>
           </a:p>
         </p:txBody>
@@ -24796,7 +24799,7 @@
                 </a:solidFill>
                 <a:latin typeface="Arial"/>
               </a:rPr>
-              <a:t>Получение и копирование кода</a:t>
+              <a:t>Карточка и история заказа</a:t>
             </a:r>
           </a:p>
         </p:txBody>
@@ -24974,7 +24977,7 @@
                 </a:solidFill>
                 <a:latin typeface="Arial"/>
               </a:rPr>
-              <a:t>Заказы -&gt; Получены -&gt; Подробнее</a:t>
+              <a:t>Заказы -&gt; Подробнее</a:t>
             </a:r>
           </a:p>
         </p:txBody>
@@ -25128,8 +25131,8 @@
         </p:blipFill>
         <p:spPr>
           <a:xfrm>
-            <a:off x="1639451" y="2432303"/>
-            <a:ext cx="1603993" cy="3767327"/>
+            <a:off x="1571034" y="2432303"/>
+            <a:ext cx="1740826" cy="3767327"/>
           </a:xfrm>
           <a:prstGeom prst="rect">
             <a:avLst/>
@@ -25144,7 +25147,7 @@
         </p:nvSpPr>
         <p:spPr>
           <a:xfrm>
-            <a:off x="2212848" y="4388754"/>
+            <a:off x="2212848" y="3258555"/>
             <a:ext cx="457200" cy="457200"/>
           </a:xfrm>
           <a:prstGeom prst="ellipse">
@@ -25187,7 +25190,7 @@
         </p:nvSpPr>
         <p:spPr>
           <a:xfrm>
-            <a:off x="2276856" y="4452762"/>
+            <a:off x="2276856" y="3322563"/>
             <a:ext cx="329184" cy="329184"/>
           </a:xfrm>
           <a:prstGeom prst="ellipse">
@@ -25239,7 +25242,7 @@
         </p:nvSpPr>
         <p:spPr>
           <a:xfrm rot="18900000">
-            <a:off x="2532888" y="4727082"/>
+            <a:off x="2532888" y="3596883"/>
             <a:ext cx="256032" cy="365760"/>
           </a:xfrm>
           <a:prstGeom prst="upArrow">
@@ -25580,7 +25583,7 @@
                 </a:solidFill>
                 <a:latin typeface="Arial"/>
               </a:rPr>
-              <a:t>Найдите код</a:t>
+              <a:t>Сверьте состав</a:t>
             </a:r>
           </a:p>
         </p:txBody>
@@ -25625,7 +25628,7 @@
                 </a:solidFill>
                 <a:latin typeface="Arial"/>
               </a:rPr>
-              <a:t>Код хранится внутри выполненного цифрового заказа.</a:t>
+              <a:t>Проверьте товары, количество и сумму.</a:t>
             </a:r>
           </a:p>
         </p:txBody>
@@ -26181,7 +26184,7 @@
                 </a:solidFill>
                 <a:latin typeface="Arial"/>
               </a:rPr>
-              <a:t>ЦИФРОВОЙ ТОВАР</a:t>
+              <a:t>СЕМЬЯ</a:t>
             </a:r>
           </a:p>
         </p:txBody>
@@ -26226,7 +26229,7 @@
                 </a:solidFill>
                 <a:latin typeface="Arial"/>
               </a:rPr>
-              <a:t>Получение и копирование кода</a:t>
+              <a:t>Карточка и история заказа</a:t>
             </a:r>
           </a:p>
         </p:txBody>
@@ -26404,7 +26407,7 @@
                 </a:solidFill>
                 <a:latin typeface="Arial"/>
               </a:rPr>
-              <a:t>Заказы -&gt; Получены -&gt; Подробнее</a:t>
+              <a:t>Заказы -&gt; Подробнее</a:t>
             </a:r>
           </a:p>
         </p:txBody>
@@ -26558,8 +26561,8 @@
         </p:blipFill>
         <p:spPr>
           <a:xfrm>
-            <a:off x="1639451" y="2432303"/>
-            <a:ext cx="1603993" cy="3767327"/>
+            <a:off x="1571034" y="2432303"/>
+            <a:ext cx="1740826" cy="3767327"/>
           </a:xfrm>
           <a:prstGeom prst="rect">
             <a:avLst/>
@@ -26574,7 +26577,7 @@
         </p:nvSpPr>
         <p:spPr>
           <a:xfrm>
-            <a:off x="2212848" y="4916180"/>
+            <a:off x="2212848" y="4388754"/>
             <a:ext cx="457200" cy="457200"/>
           </a:xfrm>
           <a:prstGeom prst="ellipse">
@@ -26617,7 +26620,7 @@
         </p:nvSpPr>
         <p:spPr>
           <a:xfrm>
-            <a:off x="2276856" y="4980188"/>
+            <a:off x="2276856" y="4452762"/>
             <a:ext cx="329184" cy="329184"/>
           </a:xfrm>
           <a:prstGeom prst="ellipse">
@@ -26669,7 +26672,7 @@
         </p:nvSpPr>
         <p:spPr>
           <a:xfrm rot="18900000">
-            <a:off x="2532888" y="5254508"/>
+            <a:off x="2532888" y="4727082"/>
             <a:ext cx="256032" cy="365760"/>
           </a:xfrm>
           <a:prstGeom prst="upArrow">
@@ -27010,7 +27013,7 @@
                 </a:solidFill>
                 <a:latin typeface="Arial"/>
               </a:rPr>
-              <a:t>Скопируйте</a:t>
+              <a:t>Читайте историю</a:t>
             </a:r>
           </a:p>
         </p:txBody>
@@ -27055,7 +27058,7 @@
                 </a:solidFill>
                 <a:latin typeface="Arial"/>
               </a:rPr>
-              <a:t>Используйте кнопку рядом с кодом.</a:t>
+              <a:t>Каждая запись содержит дату и фактическое действие.</a:t>
             </a:r>
           </a:p>
         </p:txBody>
@@ -27611,7 +27614,7 @@
                 </a:solidFill>
                 <a:latin typeface="Arial"/>
               </a:rPr>
-              <a:t>ЦИФРОВОЙ ТОВАР</a:t>
+              <a:t>СЕМЬЯ</a:t>
             </a:r>
           </a:p>
         </p:txBody>
@@ -27656,7 +27659,7 @@
                 </a:solidFill>
                 <a:latin typeface="Arial"/>
               </a:rPr>
-              <a:t>Получение и копирование кода</a:t>
+              <a:t>Карточка и история заказа</a:t>
             </a:r>
           </a:p>
         </p:txBody>
@@ -27834,7 +27837,7 @@
                 </a:solidFill>
                 <a:latin typeface="Arial"/>
               </a:rPr>
-              <a:t>Заказы -&gt; Получены -&gt; Подробнее</a:t>
+              <a:t>Заказы -&gt; Подробнее</a:t>
             </a:r>
           </a:p>
         </p:txBody>
@@ -27988,8 +27991,8 @@
         </p:blipFill>
         <p:spPr>
           <a:xfrm>
-            <a:off x="1639451" y="2432303"/>
-            <a:ext cx="1603993" cy="3767327"/>
+            <a:off x="1571034" y="2432303"/>
+            <a:ext cx="1740826" cy="3767327"/>
           </a:xfrm>
           <a:prstGeom prst="rect">
             <a:avLst/>
@@ -28004,7 +28007,7 @@
         </p:nvSpPr>
         <p:spPr>
           <a:xfrm>
-            <a:off x="2212848" y="5518952"/>
+            <a:off x="2909178" y="2505090"/>
             <a:ext cx="457200" cy="457200"/>
           </a:xfrm>
           <a:prstGeom prst="ellipse">
@@ -28047,7 +28050,7 @@
         </p:nvSpPr>
         <p:spPr>
           <a:xfrm>
-            <a:off x="2276856" y="5582960"/>
+            <a:off x="2973186" y="2569098"/>
             <a:ext cx="329184" cy="329184"/>
           </a:xfrm>
           <a:prstGeom prst="ellipse">
@@ -28099,7 +28102,7 @@
         </p:nvSpPr>
         <p:spPr>
           <a:xfrm rot="18900000">
-            <a:off x="2532888" y="5857280"/>
+            <a:off x="3229218" y="2843418"/>
             <a:ext cx="256032" cy="365760"/>
           </a:xfrm>
           <a:prstGeom prst="upArrow">
@@ -28440,7 +28443,7 @@
                 </a:solidFill>
                 <a:latin typeface="Arial"/>
               </a:rPr>
-              <a:t>Проверьте выдачу</a:t>
+              <a:t>Закройте</a:t>
             </a:r>
           </a:p>
         </p:txBody>
@@ -28485,7 +28488,7 @@
                 </a:solidFill>
                 <a:latin typeface="Arial"/>
               </a:rPr>
-              <a:t>История подтверждает автоматическую выдачу.</a:t>
+              <a:t>Крестик возвращает в список без изменения заказа.</a:t>
             </a:r>
           </a:p>
         </p:txBody>
@@ -28661,7 +28664,7 @@
                 </a:solidFill>
                 <a:latin typeface="Arial"/>
               </a:rPr>
-              <a:t>Один цифровой код выдается один раз и исключается из повторной продажи.</a:t>
+              <a:t>Служебные подписи из внутренних сводок пользователю не показываются.</a:t>
             </a:r>
           </a:p>
         </p:txBody>
@@ -28856,7 +28859,7 @@
     <p:bg>
       <p:bgPr>
         <a:solidFill>
-          <a:srgbClr val="FFFFFF"/>
+          <a:srgbClr val="F7F6FA"/>
         </a:solidFill>
         <a:effectLst/>
       </p:bgPr>
@@ -28870,14 +28873,460 @@
       <p:grpSpPr/>
       <p:sp>
         <p:nvSpPr>
-          <p:cNvPr id="2" name="Rectangle 1"/>
+          <p:cNvPr id="2" name="Rounded Rectangle 1"/>
           <p:cNvSpPr/>
           <p:nvPr/>
         </p:nvSpPr>
         <p:spPr>
           <a:xfrm>
-            <a:off x="0" y="0"/>
-            <a:ext cx="4224528" cy="6858000"/>
+            <a:off x="411480" y="274320"/>
+            <a:ext cx="384048" cy="384048"/>
+          </a:xfrm>
+          <a:prstGeom prst="roundRect">
+            <a:avLst/>
+          </a:prstGeom>
+          <a:solidFill>
+            <a:srgbClr val="6F35D4"/>
+          </a:solidFill>
+          <a:ln>
+            <a:noFill/>
+          </a:ln>
+        </p:spPr>
+        <p:style>
+          <a:lnRef idx="1">
+            <a:schemeClr val="accent1"/>
+          </a:lnRef>
+          <a:fillRef idx="3">
+            <a:schemeClr val="accent1"/>
+          </a:fillRef>
+          <a:effectRef idx="2">
+            <a:schemeClr val="accent1"/>
+          </a:effectRef>
+          <a:fontRef idx="minor">
+            <a:schemeClr val="lt1"/>
+          </a:fontRef>
+        </p:style>
+        <p:txBody>
+          <a:bodyPr rtlCol="0" anchor="ctr"/>
+          <a:lstStyle/>
+          <a:p>
+            <a:pPr algn="ctr"/>
+          </a:p>
+        </p:txBody>
+      </p:sp>
+      <p:sp>
+        <p:nvSpPr>
+          <p:cNvPr id="3" name="TextBox 2"/>
+          <p:cNvSpPr txBox="1"/>
+          <p:nvPr/>
+        </p:nvSpPr>
+        <p:spPr>
+          <a:xfrm>
+            <a:off x="411480" y="283464"/>
+            <a:ext cx="384048" cy="347472"/>
+          </a:xfrm>
+          <a:prstGeom prst="rect">
+            <a:avLst/>
+          </a:prstGeom>
+          <a:noFill/>
+        </p:spPr>
+        <p:txBody>
+          <a:bodyPr wrap="square" anchor="ctr" lIns="0" rIns="0" tIns="0" bIns="0">
+            <a:spAutoFit/>
+          </a:bodyPr>
+          <a:lstStyle/>
+          <a:p>
+            <a:pPr algn="ctr">
+              <a:lnSpc>
+                <a:spcPct val="100000"/>
+              </a:lnSpc>
+              <a:spcBef>
+                <a:spcPts val="0"/>
+              </a:spcBef>
+              <a:spcAft>
+                <a:spcPts val="0"/>
+              </a:spcAft>
+            </a:pPr>
+            <a:r>
+              <a:rPr sz="1600" b="1">
+                <a:solidFill>
+                  <a:srgbClr val="FFFFFF"/>
+                </a:solidFill>
+                <a:latin typeface="Arial"/>
+              </a:rPr>
+              <a:t>A</a:t>
+            </a:r>
+          </a:p>
+        </p:txBody>
+      </p:sp>
+      <p:sp>
+        <p:nvSpPr>
+          <p:cNvPr id="4" name="TextBox 3"/>
+          <p:cNvSpPr txBox="1"/>
+          <p:nvPr/>
+        </p:nvSpPr>
+        <p:spPr>
+          <a:xfrm>
+            <a:off x="896112" y="301752"/>
+            <a:ext cx="1508760" cy="292608"/>
+          </a:xfrm>
+          <a:prstGeom prst="rect">
+            <a:avLst/>
+          </a:prstGeom>
+          <a:noFill/>
+        </p:spPr>
+        <p:txBody>
+          <a:bodyPr wrap="square" anchor="t" lIns="0" rIns="0" tIns="0" bIns="0">
+            <a:spAutoFit/>
+          </a:bodyPr>
+          <a:lstStyle/>
+          <a:p>
+            <a:pPr algn="l">
+              <a:lnSpc>
+                <a:spcPct val="100000"/>
+              </a:lnSpc>
+              <a:spcBef>
+                <a:spcPts val="0"/>
+              </a:spcBef>
+              <a:spcAft>
+                <a:spcPts val="0"/>
+              </a:spcAft>
+            </a:pPr>
+            <a:r>
+              <a:rPr sz="1700" b="1">
+                <a:solidFill>
+                  <a:srgbClr val="21172F"/>
+                </a:solidFill>
+                <a:latin typeface="Arial"/>
+              </a:rPr>
+              <a:t>Algo MAX</a:t>
+            </a:r>
+          </a:p>
+        </p:txBody>
+      </p:sp>
+      <p:sp>
+        <p:nvSpPr>
+          <p:cNvPr id="5" name="TextBox 4"/>
+          <p:cNvSpPr txBox="1"/>
+          <p:nvPr/>
+        </p:nvSpPr>
+        <p:spPr>
+          <a:xfrm>
+            <a:off x="438912" y="896112"/>
+            <a:ext cx="3657600" cy="219456"/>
+          </a:xfrm>
+          <a:prstGeom prst="rect">
+            <a:avLst/>
+          </a:prstGeom>
+          <a:noFill/>
+        </p:spPr>
+        <p:txBody>
+          <a:bodyPr wrap="square" anchor="t" lIns="0" rIns="0" tIns="0" bIns="0">
+            <a:spAutoFit/>
+          </a:bodyPr>
+          <a:lstStyle/>
+          <a:p>
+            <a:pPr algn="l">
+              <a:lnSpc>
+                <a:spcPct val="100000"/>
+              </a:lnSpc>
+              <a:spcBef>
+                <a:spcPts val="0"/>
+              </a:spcBef>
+              <a:spcAft>
+                <a:spcPts val="0"/>
+              </a:spcAft>
+            </a:pPr>
+            <a:r>
+              <a:rPr sz="1000" b="1">
+                <a:solidFill>
+                  <a:srgbClr val="6F35D4"/>
+                </a:solidFill>
+                <a:latin typeface="Arial"/>
+              </a:rPr>
+              <a:t>ЦИФРОВОЙ ТОВАР</a:t>
+            </a:r>
+          </a:p>
+        </p:txBody>
+      </p:sp>
+      <p:sp>
+        <p:nvSpPr>
+          <p:cNvPr id="6" name="TextBox 5"/>
+          <p:cNvSpPr txBox="1"/>
+          <p:nvPr/>
+        </p:nvSpPr>
+        <p:spPr>
+          <a:xfrm>
+            <a:off x="438912" y="1097280"/>
+            <a:ext cx="11018520" cy="512064"/>
+          </a:xfrm>
+          <a:prstGeom prst="rect">
+            <a:avLst/>
+          </a:prstGeom>
+          <a:noFill/>
+        </p:spPr>
+        <p:txBody>
+          <a:bodyPr wrap="square" anchor="t" lIns="0" rIns="0" tIns="0" bIns="0">
+            <a:spAutoFit/>
+          </a:bodyPr>
+          <a:lstStyle/>
+          <a:p>
+            <a:pPr algn="l">
+              <a:lnSpc>
+                <a:spcPct val="100000"/>
+              </a:lnSpc>
+              <a:spcBef>
+                <a:spcPts val="0"/>
+              </a:spcBef>
+              <a:spcAft>
+                <a:spcPts val="0"/>
+              </a:spcAft>
+            </a:pPr>
+            <a:r>
+              <a:rPr sz="2800" b="1">
+                <a:solidFill>
+                  <a:srgbClr val="21172F"/>
+                </a:solidFill>
+                <a:latin typeface="Arial"/>
+              </a:rPr>
+              <a:t>Получение и копирование кода</a:t>
+            </a:r>
+          </a:p>
+        </p:txBody>
+      </p:sp>
+      <p:sp>
+        <p:nvSpPr>
+          <p:cNvPr id="7" name="TextBox 6"/>
+          <p:cNvSpPr txBox="1"/>
+          <p:nvPr/>
+        </p:nvSpPr>
+        <p:spPr>
+          <a:xfrm>
+            <a:off x="11137392" y="310896"/>
+            <a:ext cx="548640" cy="256032"/>
+          </a:xfrm>
+          <a:prstGeom prst="rect">
+            <a:avLst/>
+          </a:prstGeom>
+          <a:noFill/>
+        </p:spPr>
+        <p:txBody>
+          <a:bodyPr wrap="square" anchor="t" lIns="0" rIns="0" tIns="0" bIns="0">
+            <a:spAutoFit/>
+          </a:bodyPr>
+          <a:lstStyle/>
+          <a:p>
+            <a:pPr algn="r">
+              <a:lnSpc>
+                <a:spcPct val="100000"/>
+              </a:lnSpc>
+              <a:spcBef>
+                <a:spcPts val="0"/>
+              </a:spcBef>
+              <a:spcAft>
+                <a:spcPts val="0"/>
+              </a:spcAft>
+            </a:pPr>
+            <a:r>
+              <a:rPr sz="1100" b="0">
+                <a:solidFill>
+                  <a:srgbClr val="6E687D"/>
+                </a:solidFill>
+                <a:latin typeface="Arial"/>
+              </a:rPr>
+              <a:t>27</a:t>
+            </a:r>
+          </a:p>
+        </p:txBody>
+      </p:sp>
+      <p:sp>
+        <p:nvSpPr>
+          <p:cNvPr id="8" name="Rectangle 7"/>
+          <p:cNvSpPr/>
+          <p:nvPr/>
+        </p:nvSpPr>
+        <p:spPr>
+          <a:xfrm>
+            <a:off x="438912" y="1645920"/>
+            <a:ext cx="11228832" cy="329184"/>
+          </a:xfrm>
+          <a:prstGeom prst="rect">
+            <a:avLst/>
+          </a:prstGeom>
+          <a:solidFill>
+            <a:srgbClr val="EEE7FF"/>
+          </a:solidFill>
+          <a:ln>
+            <a:noFill/>
+          </a:ln>
+        </p:spPr>
+        <p:style>
+          <a:lnRef idx="1">
+            <a:schemeClr val="accent1"/>
+          </a:lnRef>
+          <a:fillRef idx="3">
+            <a:schemeClr val="accent1"/>
+          </a:fillRef>
+          <a:effectRef idx="2">
+            <a:schemeClr val="accent1"/>
+          </a:effectRef>
+          <a:fontRef idx="minor">
+            <a:schemeClr val="lt1"/>
+          </a:fontRef>
+        </p:style>
+        <p:txBody>
+          <a:bodyPr rtlCol="0" anchor="ctr"/>
+          <a:lstStyle/>
+          <a:p>
+            <a:pPr algn="ctr"/>
+          </a:p>
+        </p:txBody>
+      </p:sp>
+      <p:sp>
+        <p:nvSpPr>
+          <p:cNvPr id="9" name="TextBox 8"/>
+          <p:cNvSpPr txBox="1"/>
+          <p:nvPr/>
+        </p:nvSpPr>
+        <p:spPr>
+          <a:xfrm>
+            <a:off x="603504" y="1746504"/>
+            <a:ext cx="420624" cy="137160"/>
+          </a:xfrm>
+          <a:prstGeom prst="rect">
+            <a:avLst/>
+          </a:prstGeom>
+          <a:noFill/>
+        </p:spPr>
+        <p:txBody>
+          <a:bodyPr wrap="square" anchor="t" lIns="0" rIns="0" tIns="0" bIns="0">
+            <a:spAutoFit/>
+          </a:bodyPr>
+          <a:lstStyle/>
+          <a:p>
+            <a:pPr algn="l">
+              <a:lnSpc>
+                <a:spcPct val="100000"/>
+              </a:lnSpc>
+              <a:spcBef>
+                <a:spcPts val="0"/>
+              </a:spcBef>
+              <a:spcAft>
+                <a:spcPts val="0"/>
+              </a:spcAft>
+            </a:pPr>
+            <a:r>
+              <a:rPr sz="850" b="1">
+                <a:solidFill>
+                  <a:srgbClr val="6F35D4"/>
+                </a:solidFill>
+                <a:latin typeface="Arial"/>
+              </a:rPr>
+              <a:t>ПУТЬ</a:t>
+            </a:r>
+          </a:p>
+        </p:txBody>
+      </p:sp>
+      <p:sp>
+        <p:nvSpPr>
+          <p:cNvPr id="10" name="TextBox 9"/>
+          <p:cNvSpPr txBox="1"/>
+          <p:nvPr/>
+        </p:nvSpPr>
+        <p:spPr>
+          <a:xfrm>
+            <a:off x="1097280" y="1700784"/>
+            <a:ext cx="10287000" cy="201168"/>
+          </a:xfrm>
+          <a:prstGeom prst="rect">
+            <a:avLst/>
+          </a:prstGeom>
+          <a:noFill/>
+        </p:spPr>
+        <p:txBody>
+          <a:bodyPr wrap="square" anchor="t" lIns="0" rIns="0" tIns="0" bIns="0">
+            <a:spAutoFit/>
+          </a:bodyPr>
+          <a:lstStyle/>
+          <a:p>
+            <a:pPr algn="l">
+              <a:lnSpc>
+                <a:spcPct val="100000"/>
+              </a:lnSpc>
+              <a:spcBef>
+                <a:spcPts val="0"/>
+              </a:spcBef>
+              <a:spcAft>
+                <a:spcPts val="0"/>
+              </a:spcAft>
+            </a:pPr>
+            <a:r>
+              <a:rPr sz="1150" b="1">
+                <a:solidFill>
+                  <a:srgbClr val="21172F"/>
+                </a:solidFill>
+                <a:latin typeface="Arial"/>
+              </a:rPr>
+              <a:t>Заказы -&gt; Получены -&gt; Подробнее</a:t>
+            </a:r>
+          </a:p>
+        </p:txBody>
+      </p:sp>
+      <p:sp>
+        <p:nvSpPr>
+          <p:cNvPr id="11" name="Rectangle 10"/>
+          <p:cNvSpPr/>
+          <p:nvPr/>
+        </p:nvSpPr>
+        <p:spPr>
+          <a:xfrm>
+            <a:off x="530352" y="2066543"/>
+            <a:ext cx="3822191" cy="4206240"/>
+          </a:xfrm>
+          <a:prstGeom prst="rect">
+            <a:avLst/>
+          </a:prstGeom>
+          <a:solidFill>
+            <a:srgbClr val="FFFFFF"/>
+          </a:solidFill>
+          <a:ln w="10160">
+            <a:solidFill>
+              <a:srgbClr val="DED9E8"/>
+            </a:solidFill>
+          </a:ln>
+        </p:spPr>
+        <p:style>
+          <a:lnRef idx="1">
+            <a:schemeClr val="accent1"/>
+          </a:lnRef>
+          <a:fillRef idx="3">
+            <a:schemeClr val="accent1"/>
+          </a:fillRef>
+          <a:effectRef idx="2">
+            <a:schemeClr val="accent1"/>
+          </a:effectRef>
+          <a:fontRef idx="minor">
+            <a:schemeClr val="lt1"/>
+          </a:fontRef>
+        </p:style>
+        <p:txBody>
+          <a:bodyPr rtlCol="0" anchor="ctr"/>
+          <a:lstStyle/>
+          <a:p>
+            <a:pPr algn="ctr"/>
+          </a:p>
+        </p:txBody>
+      </p:sp>
+      <p:sp>
+        <p:nvSpPr>
+          <p:cNvPr id="12" name="Rectangle 11"/>
+          <p:cNvSpPr/>
+          <p:nvPr/>
+        </p:nvSpPr>
+        <p:spPr>
+          <a:xfrm>
+            <a:off x="530352" y="2066543"/>
+            <a:ext cx="3822191" cy="292608"/>
           </a:xfrm>
           <a:prstGeom prst="rect">
             <a:avLst/>
@@ -28913,14 +29362,14 @@
       </p:sp>
       <p:sp>
         <p:nvSpPr>
-          <p:cNvPr id="3" name="TextBox 2"/>
-          <p:cNvSpPr txBox="1"/>
-          <p:nvPr/>
-        </p:nvSpPr>
-        <p:spPr>
-          <a:xfrm>
-            <a:off x="566928" y="658368"/>
-            <a:ext cx="2194560" cy="310896"/>
+          <p:cNvPr id="13" name="TextBox 12"/>
+          <p:cNvSpPr txBox="1"/>
+          <p:nvPr/>
+        </p:nvSpPr>
+        <p:spPr>
+          <a:xfrm>
+            <a:off x="658368" y="2121408"/>
+            <a:ext cx="3566159" cy="182880"/>
           </a:xfrm>
           <a:prstGeom prst="rect">
             <a:avLst/>
@@ -28945,191 +29394,60 @@
               </a:spcAft>
             </a:pPr>
             <a:r>
-              <a:rPr sz="1900" b="1">
+              <a:rPr sz="950" b="1">
                 <a:solidFill>
                   <a:srgbClr val="FFFFFF"/>
                 </a:solidFill>
                 <a:latin typeface="Arial"/>
               </a:rPr>
-              <a:t>ALGO MAX</a:t>
-            </a:r>
-          </a:p>
-        </p:txBody>
-      </p:sp>
-      <p:sp>
-        <p:nvSpPr>
-          <p:cNvPr id="4" name="TextBox 3"/>
-          <p:cNvSpPr txBox="1"/>
-          <p:nvPr/>
-        </p:nvSpPr>
-        <p:spPr>
-          <a:xfrm>
-            <a:off x="566928" y="1481328"/>
-            <a:ext cx="3401568" cy="1600200"/>
-          </a:xfrm>
-          <a:prstGeom prst="rect">
-            <a:avLst/>
-          </a:prstGeom>
-          <a:noFill/>
-        </p:spPr>
-        <p:txBody>
-          <a:bodyPr wrap="square" anchor="t" lIns="0" rIns="0" tIns="0" bIns="0">
-            <a:spAutoFit/>
-          </a:bodyPr>
-          <a:lstStyle/>
-          <a:p>
-            <a:pPr algn="l">
-              <a:lnSpc>
-                <a:spcPct val="100000"/>
-              </a:lnSpc>
-              <a:spcBef>
-                <a:spcPts val="0"/>
-              </a:spcBef>
-              <a:spcAft>
-                <a:spcPts val="0"/>
-              </a:spcAft>
-            </a:pPr>
-            <a:r>
-              <a:rPr sz="3000" b="1">
-                <a:solidFill>
-                  <a:srgbClr val="FFFFFF"/>
-                </a:solidFill>
-                <a:latin typeface="Arial"/>
-              </a:rPr>
-              <a:t>Роль</a:t>
-            </a:r>
-            <a:br/>
-            <a:r>
-              <a:rPr sz="3000" b="1">
-                <a:solidFill>
-                  <a:srgbClr val="FFFFFF"/>
-                </a:solidFill>
-                <a:latin typeface="Arial"/>
-              </a:rPr>
-              <a:t>«Ученик»</a:t>
-            </a:r>
-            <a:br/>
-            <a:r>
-              <a:rPr sz="3000" b="1">
-                <a:solidFill>
-                  <a:srgbClr val="FFFFFF"/>
-                </a:solidFill>
-                <a:latin typeface="Arial"/>
-              </a:rPr>
-              <a:t>готова к работе</a:t>
-            </a:r>
-          </a:p>
-        </p:txBody>
-      </p:sp>
-      <p:sp>
-        <p:nvSpPr>
-          <p:cNvPr id="5" name="TextBox 4"/>
-          <p:cNvSpPr txBox="1"/>
-          <p:nvPr/>
-        </p:nvSpPr>
-        <p:spPr>
-          <a:xfrm>
-            <a:off x="566928" y="5413248"/>
-            <a:ext cx="3072384" cy="502920"/>
-          </a:xfrm>
-          <a:prstGeom prst="rect">
-            <a:avLst/>
-          </a:prstGeom>
-          <a:noFill/>
-        </p:spPr>
-        <p:txBody>
-          <a:bodyPr wrap="square" anchor="t" lIns="0" rIns="0" tIns="0" bIns="0">
-            <a:spAutoFit/>
-          </a:bodyPr>
-          <a:lstStyle/>
-          <a:p>
-            <a:pPr algn="l">
-              <a:lnSpc>
-                <a:spcPct val="100000"/>
-              </a:lnSpc>
-              <a:spcBef>
-                <a:spcPts val="0"/>
-              </a:spcBef>
-              <a:spcAft>
-                <a:spcPts val="0"/>
-              </a:spcAft>
-            </a:pPr>
-            <a:r>
-              <a:rPr sz="1300" b="0">
-                <a:solidFill>
-                  <a:srgbClr val="D9C8F5"/>
-                </a:solidFill>
-                <a:latin typeface="Arial"/>
-              </a:rPr>
-              <a:t>Руководство по роли завершено</a:t>
-            </a:r>
-          </a:p>
-        </p:txBody>
-      </p:sp>
-      <p:sp>
-        <p:nvSpPr>
-          <p:cNvPr id="6" name="TextBox 5"/>
-          <p:cNvSpPr txBox="1"/>
-          <p:nvPr/>
-        </p:nvSpPr>
-        <p:spPr>
-          <a:xfrm>
-            <a:off x="4828032" y="987552"/>
-            <a:ext cx="6172200" cy="411480"/>
-          </a:xfrm>
-          <a:prstGeom prst="rect">
-            <a:avLst/>
-          </a:prstGeom>
-          <a:noFill/>
-        </p:spPr>
-        <p:txBody>
-          <a:bodyPr wrap="square" anchor="t" lIns="0" rIns="0" tIns="0" bIns="0">
-            <a:spAutoFit/>
-          </a:bodyPr>
-          <a:lstStyle/>
-          <a:p>
-            <a:pPr algn="l">
-              <a:lnSpc>
-                <a:spcPct val="100000"/>
-              </a:lnSpc>
-              <a:spcBef>
-                <a:spcPts val="0"/>
-              </a:spcBef>
-              <a:spcAft>
-                <a:spcPts val="0"/>
-              </a:spcAft>
-            </a:pPr>
-            <a:r>
-              <a:rPr sz="2300" b="1">
-                <a:solidFill>
-                  <a:srgbClr val="21172F"/>
-                </a:solidFill>
-                <a:latin typeface="Arial"/>
-              </a:rPr>
-              <a:t>Что проверить после просмотра</a:t>
-            </a:r>
-          </a:p>
-        </p:txBody>
-      </p:sp>
-      <p:sp>
-        <p:nvSpPr>
-          <p:cNvPr id="7" name="Rounded Rectangle 6"/>
+              <a:t>Экран на телефоне</a:t>
+            </a:r>
+          </a:p>
+        </p:txBody>
+      </p:sp>
+      <p:pic>
+        <p:nvPicPr>
+          <p:cNvPr id="14" name="Picture 13" descr="image.png"/>
+          <p:cNvPicPr>
+            <a:picLocks noChangeAspect="1"/>
+          </p:cNvPicPr>
+          <p:nvPr/>
+        </p:nvPicPr>
+        <p:blipFill>
+          <a:blip r:embed="rId2"/>
+          <a:stretch>
+            <a:fillRect/>
+          </a:stretch>
+        </p:blipFill>
+        <p:spPr>
+          <a:xfrm>
+            <a:off x="1639451" y="2432303"/>
+            <a:ext cx="1603993" cy="3767327"/>
+          </a:xfrm>
+          <a:prstGeom prst="rect">
+            <a:avLst/>
+          </a:prstGeom>
+        </p:spPr>
+      </p:pic>
+      <p:sp>
+        <p:nvSpPr>
+          <p:cNvPr id="15" name="Oval 14"/>
           <p:cNvSpPr/>
           <p:nvPr/>
         </p:nvSpPr>
         <p:spPr>
           <a:xfrm>
-            <a:off x="4846320" y="1719072"/>
-            <a:ext cx="365760" cy="365760"/>
-          </a:xfrm>
-          <a:prstGeom prst="roundRect">
-            <a:avLst/>
-          </a:prstGeom>
-          <a:solidFill>
-            <a:srgbClr val="FFD43B"/>
-          </a:solidFill>
-          <a:ln>
-            <a:noFill/>
+            <a:off x="2212848" y="4388754"/>
+            <a:ext cx="457200" cy="457200"/>
+          </a:xfrm>
+          <a:prstGeom prst="ellipse">
+            <a:avLst/>
+          </a:prstGeom>
+          <a:noFill/>
+          <a:ln w="27940">
+            <a:solidFill>
+              <a:srgbClr val="D94261"/>
+            </a:solidFill>
           </a:ln>
         </p:spPr>
         <p:style>
@@ -29156,155 +29474,20 @@
       </p:sp>
       <p:sp>
         <p:nvSpPr>
-          <p:cNvPr id="8" name="TextBox 7"/>
-          <p:cNvSpPr txBox="1"/>
-          <p:nvPr/>
-        </p:nvSpPr>
-        <p:spPr>
-          <a:xfrm>
-            <a:off x="4846320" y="1728216"/>
-            <a:ext cx="365760" cy="329184"/>
-          </a:xfrm>
-          <a:prstGeom prst="rect">
-            <a:avLst/>
-          </a:prstGeom>
-          <a:noFill/>
-        </p:spPr>
-        <p:txBody>
-          <a:bodyPr wrap="square" anchor="ctr" lIns="0" rIns="0" tIns="0" bIns="0">
-            <a:spAutoFit/>
-          </a:bodyPr>
-          <a:lstStyle/>
-          <a:p>
-            <a:pPr algn="ctr">
-              <a:lnSpc>
-                <a:spcPct val="100000"/>
-              </a:lnSpc>
-              <a:spcBef>
-                <a:spcPts val="0"/>
-              </a:spcBef>
-              <a:spcAft>
-                <a:spcPts val="0"/>
-              </a:spcAft>
-            </a:pPr>
-            <a:r>
-              <a:rPr sz="1500" b="1">
-                <a:solidFill>
-                  <a:srgbClr val="21172F"/>
-                </a:solidFill>
-                <a:latin typeface="Arial"/>
-              </a:rPr>
-              <a:t>1</a:t>
-            </a:r>
-          </a:p>
-        </p:txBody>
-      </p:sp>
-      <p:sp>
-        <p:nvSpPr>
-          <p:cNvPr id="9" name="TextBox 8"/>
-          <p:cNvSpPr txBox="1"/>
-          <p:nvPr/>
-        </p:nvSpPr>
-        <p:spPr>
-          <a:xfrm>
-            <a:off x="5349240" y="1700784"/>
-            <a:ext cx="5623560" cy="274320"/>
-          </a:xfrm>
-          <a:prstGeom prst="rect">
-            <a:avLst/>
-          </a:prstGeom>
-          <a:noFill/>
-        </p:spPr>
-        <p:txBody>
-          <a:bodyPr wrap="square" anchor="t" lIns="0" rIns="0" tIns="0" bIns="0">
-            <a:spAutoFit/>
-          </a:bodyPr>
-          <a:lstStyle/>
-          <a:p>
-            <a:pPr algn="l">
-              <a:lnSpc>
-                <a:spcPct val="100000"/>
-              </a:lnSpc>
-              <a:spcBef>
-                <a:spcPts val="0"/>
-              </a:spcBef>
-              <a:spcAft>
-                <a:spcPts val="0"/>
-              </a:spcAft>
-            </a:pPr>
-            <a:r>
-              <a:rPr sz="1600" b="1">
-                <a:solidFill>
-                  <a:srgbClr val="21172F"/>
-                </a:solidFill>
-                <a:latin typeface="Arial"/>
-              </a:rPr>
-              <a:t>Проверить баланс</a:t>
-            </a:r>
-          </a:p>
-        </p:txBody>
-      </p:sp>
-      <p:sp>
-        <p:nvSpPr>
-          <p:cNvPr id="10" name="TextBox 9"/>
-          <p:cNvSpPr txBox="1"/>
-          <p:nvPr/>
-        </p:nvSpPr>
-        <p:spPr>
-          <a:xfrm>
-            <a:off x="5349240" y="1993391"/>
-            <a:ext cx="5623560" cy="438912"/>
-          </a:xfrm>
-          <a:prstGeom prst="rect">
-            <a:avLst/>
-          </a:prstGeom>
-          <a:noFill/>
-        </p:spPr>
-        <p:txBody>
-          <a:bodyPr wrap="square" anchor="t" lIns="0" rIns="0" tIns="0" bIns="0">
-            <a:spAutoFit/>
-          </a:bodyPr>
-          <a:lstStyle/>
-          <a:p>
-            <a:pPr algn="l">
-              <a:lnSpc>
-                <a:spcPct val="100000"/>
-              </a:lnSpc>
-              <a:spcBef>
-                <a:spcPts val="0"/>
-              </a:spcBef>
-              <a:spcAft>
-                <a:spcPts val="0"/>
-              </a:spcAft>
-            </a:pPr>
-            <a:r>
-              <a:rPr sz="1250" b="0">
-                <a:solidFill>
-                  <a:srgbClr val="6E687D"/>
-                </a:solidFill>
-                <a:latin typeface="Arial"/>
-              </a:rPr>
-              <a:t>Обновите главную и сверьте доступные AC.</a:t>
-            </a:r>
-          </a:p>
-        </p:txBody>
-      </p:sp>
-      <p:sp>
-        <p:nvSpPr>
-          <p:cNvPr id="11" name="Rounded Rectangle 10"/>
+          <p:cNvPr id="16" name="Oval 15"/>
           <p:cNvSpPr/>
           <p:nvPr/>
         </p:nvSpPr>
         <p:spPr>
           <a:xfrm>
-            <a:off x="4846320" y="2743200"/>
-            <a:ext cx="365760" cy="365760"/>
-          </a:xfrm>
-          <a:prstGeom prst="roundRect">
+            <a:off x="2276856" y="4452762"/>
+            <a:ext cx="329184" cy="329184"/>
+          </a:xfrm>
+          <a:prstGeom prst="ellipse">
             <a:avLst/>
           </a:prstGeom>
           <a:solidFill>
-            <a:srgbClr val="FFD43B"/>
+            <a:srgbClr val="D94261"/>
           </a:solidFill>
           <a:ln>
             <a:noFill/>
@@ -29325,167 +29508,43 @@
           </a:fontRef>
         </p:style>
         <p:txBody>
-          <a:bodyPr rtlCol="0" anchor="ctr"/>
+          <a:bodyPr rtlCol="0" anchor="ctr" lIns="0" rIns="0" tIns="0" bIns="0"/>
           <a:lstStyle/>
           <a:p>
             <a:pPr algn="ctr"/>
-          </a:p>
-        </p:txBody>
-      </p:sp>
-      <p:sp>
-        <p:nvSpPr>
-          <p:cNvPr id="12" name="TextBox 11"/>
-          <p:cNvSpPr txBox="1"/>
-          <p:nvPr/>
-        </p:nvSpPr>
-        <p:spPr>
-          <a:xfrm>
-            <a:off x="4846320" y="2752344"/>
-            <a:ext cx="365760" cy="329184"/>
-          </a:xfrm>
-          <a:prstGeom prst="rect">
-            <a:avLst/>
-          </a:prstGeom>
-          <a:noFill/>
-        </p:spPr>
-        <p:txBody>
-          <a:bodyPr wrap="square" anchor="ctr" lIns="0" rIns="0" tIns="0" bIns="0">
-            <a:spAutoFit/>
-          </a:bodyPr>
-          <a:lstStyle/>
-          <a:p>
-            <a:pPr algn="ctr">
-              <a:lnSpc>
-                <a:spcPct val="100000"/>
-              </a:lnSpc>
-              <a:spcBef>
-                <a:spcPts val="0"/>
-              </a:spcBef>
-              <a:spcAft>
-                <a:spcPts val="0"/>
-              </a:spcAft>
-            </a:pPr>
-            <a:r>
-              <a:rPr sz="1500" b="1">
-                <a:solidFill>
-                  <a:srgbClr val="21172F"/>
-                </a:solidFill>
-                <a:latin typeface="Arial"/>
-              </a:rPr>
-              <a:t>2</a:t>
-            </a:r>
-          </a:p>
-        </p:txBody>
-      </p:sp>
-      <p:sp>
-        <p:nvSpPr>
-          <p:cNvPr id="13" name="TextBox 12"/>
-          <p:cNvSpPr txBox="1"/>
-          <p:nvPr/>
-        </p:nvSpPr>
-        <p:spPr>
-          <a:xfrm>
-            <a:off x="5349240" y="2724912"/>
-            <a:ext cx="5623560" cy="274320"/>
-          </a:xfrm>
-          <a:prstGeom prst="rect">
-            <a:avLst/>
-          </a:prstGeom>
-          <a:noFill/>
-        </p:spPr>
-        <p:txBody>
-          <a:bodyPr wrap="square" anchor="t" lIns="0" rIns="0" tIns="0" bIns="0">
-            <a:spAutoFit/>
-          </a:bodyPr>
-          <a:lstStyle/>
-          <a:p>
-            <a:pPr algn="l">
-              <a:lnSpc>
-                <a:spcPct val="100000"/>
-              </a:lnSpc>
-              <a:spcBef>
-                <a:spcPts val="0"/>
-              </a:spcBef>
-              <a:spcAft>
-                <a:spcPts val="0"/>
-              </a:spcAft>
-            </a:pPr>
-            <a:r>
-              <a:rPr sz="1600" b="1">
-                <a:solidFill>
-                  <a:srgbClr val="21172F"/>
-                </a:solidFill>
-                <a:latin typeface="Arial"/>
-              </a:rPr>
-              <a:t>Выбрать награду</a:t>
-            </a:r>
-          </a:p>
-        </p:txBody>
-      </p:sp>
-      <p:sp>
-        <p:nvSpPr>
-          <p:cNvPr id="14" name="TextBox 13"/>
-          <p:cNvSpPr txBox="1"/>
-          <p:nvPr/>
-        </p:nvSpPr>
-        <p:spPr>
-          <a:xfrm>
-            <a:off x="5349240" y="3017520"/>
-            <a:ext cx="5623560" cy="438912"/>
-          </a:xfrm>
-          <a:prstGeom prst="rect">
-            <a:avLst/>
-          </a:prstGeom>
-          <a:noFill/>
-        </p:spPr>
-        <p:txBody>
-          <a:bodyPr wrap="square" anchor="t" lIns="0" rIns="0" tIns="0" bIns="0">
-            <a:spAutoFit/>
-          </a:bodyPr>
-          <a:lstStyle/>
-          <a:p>
-            <a:pPr algn="l">
-              <a:lnSpc>
-                <a:spcPct val="100000"/>
-              </a:lnSpc>
-              <a:spcBef>
-                <a:spcPts val="0"/>
-              </a:spcBef>
-              <a:spcAft>
-                <a:spcPts val="0"/>
-              </a:spcAft>
-            </a:pPr>
-            <a:r>
-              <a:rPr sz="1250" b="0">
-                <a:solidFill>
-                  <a:srgbClr val="6E687D"/>
-                </a:solidFill>
-                <a:latin typeface="Arial"/>
-              </a:rPr>
-              <a:t>Откройте магазин и добавьте доступный товар.</a:t>
-            </a:r>
-          </a:p>
-        </p:txBody>
-      </p:sp>
-      <p:sp>
-        <p:nvSpPr>
-          <p:cNvPr id="15" name="Rounded Rectangle 14"/>
+            <a:r>
+              <a:rPr sz="1200" b="1">
+                <a:solidFill>
+                  <a:srgbClr val="FFFFFF"/>
+                </a:solidFill>
+                <a:latin typeface="Arial"/>
+              </a:rPr>
+              <a:t>1</a:t>
+            </a:r>
+          </a:p>
+        </p:txBody>
+      </p:sp>
+      <p:sp>
+        <p:nvSpPr>
+          <p:cNvPr id="17" name="Up Arrow 16"/>
           <p:cNvSpPr/>
           <p:nvPr/>
         </p:nvSpPr>
         <p:spPr>
-          <a:xfrm>
-            <a:off x="4846320" y="3767328"/>
-            <a:ext cx="365760" cy="365760"/>
-          </a:xfrm>
-          <a:prstGeom prst="roundRect">
+          <a:xfrm rot="18900000">
+            <a:off x="2532888" y="4727082"/>
+            <a:ext cx="256032" cy="365760"/>
+          </a:xfrm>
+          <a:prstGeom prst="upArrow">
             <a:avLst/>
           </a:prstGeom>
           <a:solidFill>
-            <a:srgbClr val="FFD43B"/>
+            <a:srgbClr val="FFFFFF"/>
           </a:solidFill>
-          <a:ln>
-            <a:noFill/>
+          <a:ln w="17780">
+            <a:solidFill>
+              <a:srgbClr val="3B1F68"/>
+            </a:solidFill>
           </a:ln>
         </p:spPr>
         <p:style>
@@ -29512,14 +29571,233 @@
       </p:sp>
       <p:sp>
         <p:nvSpPr>
-          <p:cNvPr id="16" name="TextBox 15"/>
-          <p:cNvSpPr txBox="1"/>
-          <p:nvPr/>
-        </p:nvSpPr>
-        <p:spPr>
-          <a:xfrm>
-            <a:off x="4846320" y="3776472"/>
-            <a:ext cx="365760" cy="329184"/>
+          <p:cNvPr id="18" name="Rectangle 17"/>
+          <p:cNvSpPr/>
+          <p:nvPr/>
+        </p:nvSpPr>
+        <p:spPr>
+          <a:xfrm>
+            <a:off x="4645152" y="2066543"/>
+            <a:ext cx="6949440" cy="420624"/>
+          </a:xfrm>
+          <a:prstGeom prst="rect">
+            <a:avLst/>
+          </a:prstGeom>
+          <a:solidFill>
+            <a:srgbClr val="3B1F68"/>
+          </a:solidFill>
+          <a:ln>
+            <a:noFill/>
+          </a:ln>
+        </p:spPr>
+        <p:style>
+          <a:lnRef idx="1">
+            <a:schemeClr val="accent1"/>
+          </a:lnRef>
+          <a:fillRef idx="3">
+            <a:schemeClr val="accent1"/>
+          </a:fillRef>
+          <a:effectRef idx="2">
+            <a:schemeClr val="accent1"/>
+          </a:effectRef>
+          <a:fontRef idx="minor">
+            <a:schemeClr val="lt1"/>
+          </a:fontRef>
+        </p:style>
+        <p:txBody>
+          <a:bodyPr rtlCol="0" anchor="ctr"/>
+          <a:lstStyle/>
+          <a:p>
+            <a:pPr algn="ctr"/>
+          </a:p>
+        </p:txBody>
+      </p:sp>
+      <p:sp>
+        <p:nvSpPr>
+          <p:cNvPr id="19" name="TextBox 18"/>
+          <p:cNvSpPr txBox="1"/>
+          <p:nvPr/>
+        </p:nvSpPr>
+        <p:spPr>
+          <a:xfrm>
+            <a:off x="4809744" y="2185416"/>
+            <a:ext cx="6620255" cy="164592"/>
+          </a:xfrm>
+          <a:prstGeom prst="rect">
+            <a:avLst/>
+          </a:prstGeom>
+          <a:noFill/>
+        </p:spPr>
+        <p:txBody>
+          <a:bodyPr wrap="square" anchor="t" lIns="0" rIns="0" tIns="0" bIns="0">
+            <a:spAutoFit/>
+          </a:bodyPr>
+          <a:lstStyle/>
+          <a:p>
+            <a:pPr algn="l">
+              <a:lnSpc>
+                <a:spcPct val="100000"/>
+              </a:lnSpc>
+              <a:spcBef>
+                <a:spcPts val="0"/>
+              </a:spcBef>
+              <a:spcAft>
+                <a:spcPts val="0"/>
+              </a:spcAft>
+            </a:pPr>
+            <a:r>
+              <a:rPr sz="950" b="1">
+                <a:solidFill>
+                  <a:srgbClr val="FFFFFF"/>
+                </a:solidFill>
+                <a:latin typeface="Arial"/>
+              </a:rPr>
+              <a:t>ШАГ 1 ИЗ 3</a:t>
+            </a:r>
+          </a:p>
+        </p:txBody>
+      </p:sp>
+      <p:sp>
+        <p:nvSpPr>
+          <p:cNvPr id="20" name="Rectangle 19"/>
+          <p:cNvSpPr/>
+          <p:nvPr/>
+        </p:nvSpPr>
+        <p:spPr>
+          <a:xfrm>
+            <a:off x="4645152" y="2596896"/>
+            <a:ext cx="6949440" cy="1499616"/>
+          </a:xfrm>
+          <a:prstGeom prst="rect">
+            <a:avLst/>
+          </a:prstGeom>
+          <a:solidFill>
+            <a:srgbClr val="FFFFFF"/>
+          </a:solidFill>
+          <a:ln w="10160">
+            <a:solidFill>
+              <a:srgbClr val="DED9E8"/>
+            </a:solidFill>
+          </a:ln>
+        </p:spPr>
+        <p:style>
+          <a:lnRef idx="1">
+            <a:schemeClr val="accent1"/>
+          </a:lnRef>
+          <a:fillRef idx="3">
+            <a:schemeClr val="accent1"/>
+          </a:fillRef>
+          <a:effectRef idx="2">
+            <a:schemeClr val="accent1"/>
+          </a:effectRef>
+          <a:fontRef idx="minor">
+            <a:schemeClr val="lt1"/>
+          </a:fontRef>
+        </p:style>
+        <p:txBody>
+          <a:bodyPr rtlCol="0" anchor="ctr"/>
+          <a:lstStyle/>
+          <a:p>
+            <a:pPr algn="ctr"/>
+          </a:p>
+        </p:txBody>
+      </p:sp>
+      <p:sp>
+        <p:nvSpPr>
+          <p:cNvPr id="21" name="Rectangle 20"/>
+          <p:cNvSpPr/>
+          <p:nvPr/>
+        </p:nvSpPr>
+        <p:spPr>
+          <a:xfrm>
+            <a:off x="4645152" y="2596896"/>
+            <a:ext cx="54864" cy="1499616"/>
+          </a:xfrm>
+          <a:prstGeom prst="rect">
+            <a:avLst/>
+          </a:prstGeom>
+          <a:solidFill>
+            <a:srgbClr val="D94261"/>
+          </a:solidFill>
+          <a:ln>
+            <a:noFill/>
+          </a:ln>
+        </p:spPr>
+        <p:style>
+          <a:lnRef idx="1">
+            <a:schemeClr val="accent1"/>
+          </a:lnRef>
+          <a:fillRef idx="3">
+            <a:schemeClr val="accent1"/>
+          </a:fillRef>
+          <a:effectRef idx="2">
+            <a:schemeClr val="accent1"/>
+          </a:effectRef>
+          <a:fontRef idx="minor">
+            <a:schemeClr val="lt1"/>
+          </a:fontRef>
+        </p:style>
+        <p:txBody>
+          <a:bodyPr rtlCol="0" anchor="ctr"/>
+          <a:lstStyle/>
+          <a:p>
+            <a:pPr algn="ctr"/>
+          </a:p>
+        </p:txBody>
+      </p:sp>
+      <p:sp>
+        <p:nvSpPr>
+          <p:cNvPr id="22" name="Rounded Rectangle 21"/>
+          <p:cNvSpPr/>
+          <p:nvPr/>
+        </p:nvSpPr>
+        <p:spPr>
+          <a:xfrm>
+            <a:off x="4809744" y="2734056"/>
+            <a:ext cx="310896" cy="310896"/>
+          </a:xfrm>
+          <a:prstGeom prst="roundRect">
+            <a:avLst/>
+          </a:prstGeom>
+          <a:solidFill>
+            <a:srgbClr val="D94261"/>
+          </a:solidFill>
+          <a:ln>
+            <a:noFill/>
+          </a:ln>
+        </p:spPr>
+        <p:style>
+          <a:lnRef idx="1">
+            <a:schemeClr val="accent1"/>
+          </a:lnRef>
+          <a:fillRef idx="3">
+            <a:schemeClr val="accent1"/>
+          </a:fillRef>
+          <a:effectRef idx="2">
+            <a:schemeClr val="accent1"/>
+          </a:effectRef>
+          <a:fontRef idx="minor">
+            <a:schemeClr val="lt1"/>
+          </a:fontRef>
+        </p:style>
+        <p:txBody>
+          <a:bodyPr rtlCol="0" anchor="ctr"/>
+          <a:lstStyle/>
+          <a:p>
+            <a:pPr algn="ctr"/>
+          </a:p>
+        </p:txBody>
+      </p:sp>
+      <p:sp>
+        <p:nvSpPr>
+          <p:cNvPr id="23" name="TextBox 22"/>
+          <p:cNvSpPr txBox="1"/>
+          <p:nvPr/>
+        </p:nvSpPr>
+        <p:spPr>
+          <a:xfrm>
+            <a:off x="4809744" y="2743200"/>
+            <a:ext cx="310896" cy="256032"/>
           </a:xfrm>
           <a:prstGeom prst="rect">
             <a:avLst/>
@@ -29544,27 +29822,72 @@
               </a:spcAft>
             </a:pPr>
             <a:r>
-              <a:rPr sz="1500" b="1">
+              <a:rPr sz="1100" b="1">
+                <a:solidFill>
+                  <a:srgbClr val="FFFFFF"/>
+                </a:solidFill>
+                <a:latin typeface="Arial"/>
+              </a:rPr>
+              <a:t>1</a:t>
+            </a:r>
+          </a:p>
+        </p:txBody>
+      </p:sp>
+      <p:sp>
+        <p:nvSpPr>
+          <p:cNvPr id="24" name="TextBox 23"/>
+          <p:cNvSpPr txBox="1"/>
+          <p:nvPr/>
+        </p:nvSpPr>
+        <p:spPr>
+          <a:xfrm>
+            <a:off x="5230368" y="2688336"/>
+            <a:ext cx="6217920" cy="310896"/>
+          </a:xfrm>
+          <a:prstGeom prst="rect">
+            <a:avLst/>
+          </a:prstGeom>
+          <a:noFill/>
+        </p:spPr>
+        <p:txBody>
+          <a:bodyPr wrap="square" anchor="t" lIns="0" rIns="0" tIns="0" bIns="0">
+            <a:spAutoFit/>
+          </a:bodyPr>
+          <a:lstStyle/>
+          <a:p>
+            <a:pPr algn="l">
+              <a:lnSpc>
+                <a:spcPct val="100000"/>
+              </a:lnSpc>
+              <a:spcBef>
+                <a:spcPts val="0"/>
+              </a:spcBef>
+              <a:spcAft>
+                <a:spcPts val="0"/>
+              </a:spcAft>
+            </a:pPr>
+            <a:r>
+              <a:rPr sz="1180" b="1">
                 <a:solidFill>
                   <a:srgbClr val="21172F"/>
                 </a:solidFill>
                 <a:latin typeface="Arial"/>
               </a:rPr>
-              <a:t>3</a:t>
-            </a:r>
-          </a:p>
-        </p:txBody>
-      </p:sp>
-      <p:sp>
-        <p:nvSpPr>
-          <p:cNvPr id="17" name="TextBox 16"/>
-          <p:cNvSpPr txBox="1"/>
-          <p:nvPr/>
-        </p:nvSpPr>
-        <p:spPr>
-          <a:xfrm>
-            <a:off x="5349240" y="3749040"/>
-            <a:ext cx="5623560" cy="274320"/>
+              <a:t>Найдите код</a:t>
+            </a:r>
+          </a:p>
+        </p:txBody>
+      </p:sp>
+      <p:sp>
+        <p:nvSpPr>
+          <p:cNvPr id="25" name="TextBox 24"/>
+          <p:cNvSpPr txBox="1"/>
+          <p:nvPr/>
+        </p:nvSpPr>
+        <p:spPr>
+          <a:xfrm>
+            <a:off x="5230368" y="3008376"/>
+            <a:ext cx="6217920" cy="1033271"/>
           </a:xfrm>
           <a:prstGeom prst="rect">
             <a:avLst/>
@@ -29589,27 +29912,158 @@
               </a:spcAft>
             </a:pPr>
             <a:r>
-              <a:rPr sz="1600" b="1">
+              <a:rPr sz="1000" b="0">
+                <a:solidFill>
+                  <a:srgbClr val="6E687D"/>
+                </a:solidFill>
+                <a:latin typeface="Arial"/>
+              </a:rPr>
+              <a:t>Код хранится внутри выполненного цифрового заказа.</a:t>
+            </a:r>
+          </a:p>
+        </p:txBody>
+      </p:sp>
+      <p:sp>
+        <p:nvSpPr>
+          <p:cNvPr id="26" name="Rectangle 25"/>
+          <p:cNvSpPr/>
+          <p:nvPr/>
+        </p:nvSpPr>
+        <p:spPr>
+          <a:xfrm>
+            <a:off x="4645152" y="4315968"/>
+            <a:ext cx="6949440" cy="877824"/>
+          </a:xfrm>
+          <a:prstGeom prst="rect">
+            <a:avLst/>
+          </a:prstGeom>
+          <a:solidFill>
+            <a:srgbClr val="E1F6F3"/>
+          </a:solidFill>
+          <a:ln>
+            <a:noFill/>
+          </a:ln>
+        </p:spPr>
+        <p:style>
+          <a:lnRef idx="1">
+            <a:schemeClr val="accent1"/>
+          </a:lnRef>
+          <a:fillRef idx="3">
+            <a:schemeClr val="accent1"/>
+          </a:fillRef>
+          <a:effectRef idx="2">
+            <a:schemeClr val="accent1"/>
+          </a:effectRef>
+          <a:fontRef idx="minor">
+            <a:schemeClr val="lt1"/>
+          </a:fontRef>
+        </p:style>
+        <p:txBody>
+          <a:bodyPr rtlCol="0" anchor="ctr"/>
+          <a:lstStyle/>
+          <a:p>
+            <a:pPr algn="ctr"/>
+          </a:p>
+        </p:txBody>
+      </p:sp>
+      <p:sp>
+        <p:nvSpPr>
+          <p:cNvPr id="27" name="Rectangle 26"/>
+          <p:cNvSpPr/>
+          <p:nvPr/>
+        </p:nvSpPr>
+        <p:spPr>
+          <a:xfrm>
+            <a:off x="4645152" y="4315968"/>
+            <a:ext cx="54864" cy="877824"/>
+          </a:xfrm>
+          <a:prstGeom prst="rect">
+            <a:avLst/>
+          </a:prstGeom>
+          <a:solidFill>
+            <a:srgbClr val="149B91"/>
+          </a:solidFill>
+          <a:ln>
+            <a:noFill/>
+          </a:ln>
+        </p:spPr>
+        <p:style>
+          <a:lnRef idx="1">
+            <a:schemeClr val="accent1"/>
+          </a:lnRef>
+          <a:fillRef idx="3">
+            <a:schemeClr val="accent1"/>
+          </a:fillRef>
+          <a:effectRef idx="2">
+            <a:schemeClr val="accent1"/>
+          </a:effectRef>
+          <a:fontRef idx="minor">
+            <a:schemeClr val="lt1"/>
+          </a:fontRef>
+        </p:style>
+        <p:txBody>
+          <a:bodyPr rtlCol="0" anchor="ctr"/>
+          <a:lstStyle/>
+          <a:p>
+            <a:pPr algn="ctr"/>
+          </a:p>
+        </p:txBody>
+      </p:sp>
+      <p:sp>
+        <p:nvSpPr>
+          <p:cNvPr id="28" name="TextBox 27"/>
+          <p:cNvSpPr txBox="1"/>
+          <p:nvPr/>
+        </p:nvSpPr>
+        <p:spPr>
+          <a:xfrm>
+            <a:off x="4846320" y="4425696"/>
+            <a:ext cx="6620255" cy="219456"/>
+          </a:xfrm>
+          <a:prstGeom prst="rect">
+            <a:avLst/>
+          </a:prstGeom>
+          <a:noFill/>
+        </p:spPr>
+        <p:txBody>
+          <a:bodyPr wrap="square" anchor="t" lIns="0" rIns="0" tIns="0" bIns="0">
+            <a:spAutoFit/>
+          </a:bodyPr>
+          <a:lstStyle/>
+          <a:p>
+            <a:pPr algn="l">
+              <a:lnSpc>
+                <a:spcPct val="100000"/>
+              </a:lnSpc>
+              <a:spcBef>
+                <a:spcPts val="0"/>
+              </a:spcBef>
+              <a:spcAft>
+                <a:spcPts val="0"/>
+              </a:spcAft>
+            </a:pPr>
+            <a:r>
+              <a:rPr sz="1150" b="1">
                 <a:solidFill>
                   <a:srgbClr val="21172F"/>
                 </a:solidFill>
                 <a:latin typeface="Arial"/>
               </a:rPr>
-              <a:t>Найти заказ</a:t>
-            </a:r>
-          </a:p>
-        </p:txBody>
-      </p:sp>
-      <p:sp>
-        <p:nvSpPr>
-          <p:cNvPr id="18" name="TextBox 17"/>
-          <p:cNvSpPr txBox="1"/>
-          <p:nvPr/>
-        </p:nvSpPr>
-        <p:spPr>
-          <a:xfrm>
-            <a:off x="5349240" y="4041648"/>
-            <a:ext cx="5623560" cy="438912"/>
+              <a:t>Проверка результата</a:t>
+            </a:r>
+          </a:p>
+        </p:txBody>
+      </p:sp>
+      <p:sp>
+        <p:nvSpPr>
+          <p:cNvPr id="29" name="TextBox 28"/>
+          <p:cNvSpPr txBox="1"/>
+          <p:nvPr/>
+        </p:nvSpPr>
+        <p:spPr>
+          <a:xfrm>
+            <a:off x="4846320" y="4681728"/>
+            <a:ext cx="6620255" cy="402336"/>
           </a:xfrm>
           <a:prstGeom prst="rect">
             <a:avLst/>
@@ -29634,27 +30088,27 @@
               </a:spcAft>
             </a:pPr>
             <a:r>
-              <a:rPr sz="1250" b="0">
+              <a:rPr sz="1000" b="0">
                 <a:solidFill>
                   <a:srgbClr val="6E687D"/>
                 </a:solidFill>
                 <a:latin typeface="Arial"/>
               </a:rPr>
-              <a:t>После покупки проверьте его состояние в заказах.</a:t>
-            </a:r>
-          </a:p>
-        </p:txBody>
-      </p:sp>
-      <p:sp>
-        <p:nvSpPr>
-          <p:cNvPr id="19" name="Rectangle 18"/>
+              <a:t>После нажатия дождитесь изменения экрана и переходите к следующему шагу.</a:t>
+            </a:r>
+          </a:p>
+        </p:txBody>
+      </p:sp>
+      <p:sp>
+        <p:nvSpPr>
+          <p:cNvPr id="30" name="Rectangle 29"/>
           <p:cNvSpPr/>
           <p:nvPr/>
         </p:nvSpPr>
         <p:spPr>
           <a:xfrm>
-            <a:off x="4828032" y="5230368"/>
-            <a:ext cx="6254496" cy="932688"/>
+            <a:off x="4645152" y="5413248"/>
+            <a:ext cx="6949440" cy="603504"/>
           </a:xfrm>
           <a:prstGeom prst="rect">
             <a:avLst/>
@@ -29690,20 +30144,65 @@
       </p:sp>
       <p:sp>
         <p:nvSpPr>
-          <p:cNvPr id="20" name="Rectangle 19"/>
+          <p:cNvPr id="31" name="TextBox 30"/>
+          <p:cNvSpPr txBox="1"/>
+          <p:nvPr/>
+        </p:nvSpPr>
+        <p:spPr>
+          <a:xfrm>
+            <a:off x="4809744" y="5559552"/>
+            <a:ext cx="6620255" cy="292608"/>
+          </a:xfrm>
+          <a:prstGeom prst="rect">
+            <a:avLst/>
+          </a:prstGeom>
+          <a:noFill/>
+        </p:spPr>
+        <p:txBody>
+          <a:bodyPr wrap="square" anchor="t" lIns="0" rIns="0" tIns="0" bIns="0">
+            <a:spAutoFit/>
+          </a:bodyPr>
+          <a:lstStyle/>
+          <a:p>
+            <a:pPr algn="l">
+              <a:lnSpc>
+                <a:spcPct val="100000"/>
+              </a:lnSpc>
+              <a:spcBef>
+                <a:spcPts val="0"/>
+              </a:spcBef>
+              <a:spcAft>
+                <a:spcPts val="0"/>
+              </a:spcAft>
+            </a:pPr>
+            <a:r>
+              <a:rPr sz="919" b="0">
+                <a:solidFill>
+                  <a:srgbClr val="6E687D"/>
+                </a:solidFill>
+                <a:latin typeface="Arial"/>
+              </a:rPr>
+              <a:t>Курсор и номер показывают единственное действие этого кадра.</a:t>
+            </a:r>
+          </a:p>
+        </p:txBody>
+      </p:sp>
+      <p:sp>
+        <p:nvSpPr>
+          <p:cNvPr id="32" name="Rectangle 31"/>
           <p:cNvSpPr/>
           <p:nvPr/>
         </p:nvSpPr>
         <p:spPr>
           <a:xfrm>
-            <a:off x="4828032" y="5230368"/>
-            <a:ext cx="54864" cy="932688"/>
+            <a:off x="438912" y="6537960"/>
+            <a:ext cx="11247120" cy="9144"/>
           </a:xfrm>
           <a:prstGeom prst="rect">
             <a:avLst/>
           </a:prstGeom>
           <a:solidFill>
-            <a:srgbClr val="FFD43B"/>
+            <a:srgbClr val="DED9E8"/>
           </a:solidFill>
           <a:ln>
             <a:noFill/>
@@ -29733,14 +30232,14 @@
       </p:sp>
       <p:sp>
         <p:nvSpPr>
-          <p:cNvPr id="21" name="TextBox 20"/>
-          <p:cNvSpPr txBox="1"/>
-          <p:nvPr/>
-        </p:nvSpPr>
-        <p:spPr>
-          <a:xfrm>
-            <a:off x="5029200" y="5358383"/>
-            <a:ext cx="5925312" cy="237744"/>
+          <p:cNvPr id="33" name="TextBox 32"/>
+          <p:cNvSpPr txBox="1"/>
+          <p:nvPr/>
+        </p:nvSpPr>
+        <p:spPr>
+          <a:xfrm>
+            <a:off x="438912" y="6601968"/>
+            <a:ext cx="7315200" cy="182880"/>
           </a:xfrm>
           <a:prstGeom prst="rect">
             <a:avLst/>
@@ -29765,27 +30264,186 @@
               </a:spcAft>
             </a:pPr>
             <a:r>
-              <a:rPr sz="1300" b="1">
+              <a:rPr sz="900" b="0">
+                <a:solidFill>
+                  <a:srgbClr val="6E687D"/>
+                </a:solidFill>
+                <a:latin typeface="Arial"/>
+              </a:rPr>
+              <a:t>Роль: Ученик · Algo MAX</a:t>
+            </a:r>
+          </a:p>
+        </p:txBody>
+      </p:sp>
+    </p:spTree>
+  </p:cSld>
+  <p:clrMapOvr>
+    <a:masterClrMapping/>
+  </p:clrMapOvr>
+</p:sld>
+</file>
+
+<file path=ppt/slides/slide28.xml><?xml version="1.0" encoding="utf-8"?>
+<p:sld xmlns:a="http://schemas.openxmlformats.org/drawingml/2006/main" xmlns:p="http://schemas.openxmlformats.org/presentationml/2006/main" xmlns:r="http://schemas.openxmlformats.org/officeDocument/2006/relationships">
+  <p:cSld>
+    <p:bg>
+      <p:bgPr>
+        <a:solidFill>
+          <a:srgbClr val="F7F6FA"/>
+        </a:solidFill>
+        <a:effectLst/>
+      </p:bgPr>
+    </p:bg>
+    <p:spTree>
+      <p:nvGrpSpPr>
+        <p:cNvPr id="1" name=""/>
+        <p:cNvGrpSpPr/>
+        <p:nvPr/>
+      </p:nvGrpSpPr>
+      <p:grpSpPr/>
+      <p:sp>
+        <p:nvSpPr>
+          <p:cNvPr id="2" name="Rounded Rectangle 1"/>
+          <p:cNvSpPr/>
+          <p:nvPr/>
+        </p:nvSpPr>
+        <p:spPr>
+          <a:xfrm>
+            <a:off x="411480" y="274320"/>
+            <a:ext cx="384048" cy="384048"/>
+          </a:xfrm>
+          <a:prstGeom prst="roundRect">
+            <a:avLst/>
+          </a:prstGeom>
+          <a:solidFill>
+            <a:srgbClr val="6F35D4"/>
+          </a:solidFill>
+          <a:ln>
+            <a:noFill/>
+          </a:ln>
+        </p:spPr>
+        <p:style>
+          <a:lnRef idx="1">
+            <a:schemeClr val="accent1"/>
+          </a:lnRef>
+          <a:fillRef idx="3">
+            <a:schemeClr val="accent1"/>
+          </a:fillRef>
+          <a:effectRef idx="2">
+            <a:schemeClr val="accent1"/>
+          </a:effectRef>
+          <a:fontRef idx="minor">
+            <a:schemeClr val="lt1"/>
+          </a:fontRef>
+        </p:style>
+        <p:txBody>
+          <a:bodyPr rtlCol="0" anchor="ctr"/>
+          <a:lstStyle/>
+          <a:p>
+            <a:pPr algn="ctr"/>
+          </a:p>
+        </p:txBody>
+      </p:sp>
+      <p:sp>
+        <p:nvSpPr>
+          <p:cNvPr id="3" name="TextBox 2"/>
+          <p:cNvSpPr txBox="1"/>
+          <p:nvPr/>
+        </p:nvSpPr>
+        <p:spPr>
+          <a:xfrm>
+            <a:off x="411480" y="283464"/>
+            <a:ext cx="384048" cy="347472"/>
+          </a:xfrm>
+          <a:prstGeom prst="rect">
+            <a:avLst/>
+          </a:prstGeom>
+          <a:noFill/>
+        </p:spPr>
+        <p:txBody>
+          <a:bodyPr wrap="square" anchor="ctr" lIns="0" rIns="0" tIns="0" bIns="0">
+            <a:spAutoFit/>
+          </a:bodyPr>
+          <a:lstStyle/>
+          <a:p>
+            <a:pPr algn="ctr">
+              <a:lnSpc>
+                <a:spcPct val="100000"/>
+              </a:lnSpc>
+              <a:spcBef>
+                <a:spcPts val="0"/>
+              </a:spcBef>
+              <a:spcAft>
+                <a:spcPts val="0"/>
+              </a:spcAft>
+            </a:pPr>
+            <a:r>
+              <a:rPr sz="1600" b="1">
+                <a:solidFill>
+                  <a:srgbClr val="FFFFFF"/>
+                </a:solidFill>
+                <a:latin typeface="Arial"/>
+              </a:rPr>
+              <a:t>A</a:t>
+            </a:r>
+          </a:p>
+        </p:txBody>
+      </p:sp>
+      <p:sp>
+        <p:nvSpPr>
+          <p:cNvPr id="4" name="TextBox 3"/>
+          <p:cNvSpPr txBox="1"/>
+          <p:nvPr/>
+        </p:nvSpPr>
+        <p:spPr>
+          <a:xfrm>
+            <a:off x="896112" y="301752"/>
+            <a:ext cx="1508760" cy="292608"/>
+          </a:xfrm>
+          <a:prstGeom prst="rect">
+            <a:avLst/>
+          </a:prstGeom>
+          <a:noFill/>
+        </p:spPr>
+        <p:txBody>
+          <a:bodyPr wrap="square" anchor="t" lIns="0" rIns="0" tIns="0" bIns="0">
+            <a:spAutoFit/>
+          </a:bodyPr>
+          <a:lstStyle/>
+          <a:p>
+            <a:pPr algn="l">
+              <a:lnSpc>
+                <a:spcPct val="100000"/>
+              </a:lnSpc>
+              <a:spcBef>
+                <a:spcPts val="0"/>
+              </a:spcBef>
+              <a:spcAft>
+                <a:spcPts val="0"/>
+              </a:spcAft>
+            </a:pPr>
+            <a:r>
+              <a:rPr sz="1700" b="1">
                 <a:solidFill>
                   <a:srgbClr val="21172F"/>
                 </a:solidFill>
                 <a:latin typeface="Arial"/>
               </a:rPr>
-              <a:t>Следующий материал</a:t>
-            </a:r>
-          </a:p>
-        </p:txBody>
-      </p:sp>
-      <p:sp>
-        <p:nvSpPr>
-          <p:cNvPr id="22" name="TextBox 21"/>
-          <p:cNvSpPr txBox="1"/>
-          <p:nvPr/>
-        </p:nvSpPr>
-        <p:spPr>
-          <a:xfrm>
-            <a:off x="5029200" y="5650992"/>
-            <a:ext cx="5925312" cy="384048"/>
+              <a:t>Algo MAX</a:t>
+            </a:r>
+          </a:p>
+        </p:txBody>
+      </p:sp>
+      <p:sp>
+        <p:nvSpPr>
+          <p:cNvPr id="5" name="TextBox 4"/>
+          <p:cNvSpPr txBox="1"/>
+          <p:nvPr/>
+        </p:nvSpPr>
+        <p:spPr>
+          <a:xfrm>
+            <a:off x="438912" y="896112"/>
+            <a:ext cx="3657600" cy="219456"/>
           </a:xfrm>
           <a:prstGeom prst="rect">
             <a:avLst/>
@@ -29810,13 +30468,2669 @@
               </a:spcAft>
             </a:pPr>
             <a:r>
-              <a:rPr sz="1150" b="0">
+              <a:rPr sz="1000" b="1">
+                <a:solidFill>
+                  <a:srgbClr val="6F35D4"/>
+                </a:solidFill>
+                <a:latin typeface="Arial"/>
+              </a:rPr>
+              <a:t>ЦИФРОВОЙ ТОВАР</a:t>
+            </a:r>
+          </a:p>
+        </p:txBody>
+      </p:sp>
+      <p:sp>
+        <p:nvSpPr>
+          <p:cNvPr id="6" name="TextBox 5"/>
+          <p:cNvSpPr txBox="1"/>
+          <p:nvPr/>
+        </p:nvSpPr>
+        <p:spPr>
+          <a:xfrm>
+            <a:off x="438912" y="1097280"/>
+            <a:ext cx="11018520" cy="512064"/>
+          </a:xfrm>
+          <a:prstGeom prst="rect">
+            <a:avLst/>
+          </a:prstGeom>
+          <a:noFill/>
+        </p:spPr>
+        <p:txBody>
+          <a:bodyPr wrap="square" anchor="t" lIns="0" rIns="0" tIns="0" bIns="0">
+            <a:spAutoFit/>
+          </a:bodyPr>
+          <a:lstStyle/>
+          <a:p>
+            <a:pPr algn="l">
+              <a:lnSpc>
+                <a:spcPct val="100000"/>
+              </a:lnSpc>
+              <a:spcBef>
+                <a:spcPts val="0"/>
+              </a:spcBef>
+              <a:spcAft>
+                <a:spcPts val="0"/>
+              </a:spcAft>
+            </a:pPr>
+            <a:r>
+              <a:rPr sz="2800" b="1">
+                <a:solidFill>
+                  <a:srgbClr val="21172F"/>
+                </a:solidFill>
+                <a:latin typeface="Arial"/>
+              </a:rPr>
+              <a:t>Получение и копирование кода</a:t>
+            </a:r>
+          </a:p>
+        </p:txBody>
+      </p:sp>
+      <p:sp>
+        <p:nvSpPr>
+          <p:cNvPr id="7" name="TextBox 6"/>
+          <p:cNvSpPr txBox="1"/>
+          <p:nvPr/>
+        </p:nvSpPr>
+        <p:spPr>
+          <a:xfrm>
+            <a:off x="11137392" y="310896"/>
+            <a:ext cx="548640" cy="256032"/>
+          </a:xfrm>
+          <a:prstGeom prst="rect">
+            <a:avLst/>
+          </a:prstGeom>
+          <a:noFill/>
+        </p:spPr>
+        <p:txBody>
+          <a:bodyPr wrap="square" anchor="t" lIns="0" rIns="0" tIns="0" bIns="0">
+            <a:spAutoFit/>
+          </a:bodyPr>
+          <a:lstStyle/>
+          <a:p>
+            <a:pPr algn="r">
+              <a:lnSpc>
+                <a:spcPct val="100000"/>
+              </a:lnSpc>
+              <a:spcBef>
+                <a:spcPts val="0"/>
+              </a:spcBef>
+              <a:spcAft>
+                <a:spcPts val="0"/>
+              </a:spcAft>
+            </a:pPr>
+            <a:r>
+              <a:rPr sz="1100" b="0">
                 <a:solidFill>
                   <a:srgbClr val="6E687D"/>
                 </a:solidFill>
                 <a:latin typeface="Arial"/>
               </a:rPr>
-              <a:t>Для редких операций и спорных ситуаций используйте полное руководство по ролям.</a:t>
+              <a:t>28</a:t>
+            </a:r>
+          </a:p>
+        </p:txBody>
+      </p:sp>
+      <p:sp>
+        <p:nvSpPr>
+          <p:cNvPr id="8" name="Rectangle 7"/>
+          <p:cNvSpPr/>
+          <p:nvPr/>
+        </p:nvSpPr>
+        <p:spPr>
+          <a:xfrm>
+            <a:off x="438912" y="1645920"/>
+            <a:ext cx="11228832" cy="329184"/>
+          </a:xfrm>
+          <a:prstGeom prst="rect">
+            <a:avLst/>
+          </a:prstGeom>
+          <a:solidFill>
+            <a:srgbClr val="EEE7FF"/>
+          </a:solidFill>
+          <a:ln>
+            <a:noFill/>
+          </a:ln>
+        </p:spPr>
+        <p:style>
+          <a:lnRef idx="1">
+            <a:schemeClr val="accent1"/>
+          </a:lnRef>
+          <a:fillRef idx="3">
+            <a:schemeClr val="accent1"/>
+          </a:fillRef>
+          <a:effectRef idx="2">
+            <a:schemeClr val="accent1"/>
+          </a:effectRef>
+          <a:fontRef idx="minor">
+            <a:schemeClr val="lt1"/>
+          </a:fontRef>
+        </p:style>
+        <p:txBody>
+          <a:bodyPr rtlCol="0" anchor="ctr"/>
+          <a:lstStyle/>
+          <a:p>
+            <a:pPr algn="ctr"/>
+          </a:p>
+        </p:txBody>
+      </p:sp>
+      <p:sp>
+        <p:nvSpPr>
+          <p:cNvPr id="9" name="TextBox 8"/>
+          <p:cNvSpPr txBox="1"/>
+          <p:nvPr/>
+        </p:nvSpPr>
+        <p:spPr>
+          <a:xfrm>
+            <a:off x="603504" y="1746504"/>
+            <a:ext cx="420624" cy="137160"/>
+          </a:xfrm>
+          <a:prstGeom prst="rect">
+            <a:avLst/>
+          </a:prstGeom>
+          <a:noFill/>
+        </p:spPr>
+        <p:txBody>
+          <a:bodyPr wrap="square" anchor="t" lIns="0" rIns="0" tIns="0" bIns="0">
+            <a:spAutoFit/>
+          </a:bodyPr>
+          <a:lstStyle/>
+          <a:p>
+            <a:pPr algn="l">
+              <a:lnSpc>
+                <a:spcPct val="100000"/>
+              </a:lnSpc>
+              <a:spcBef>
+                <a:spcPts val="0"/>
+              </a:spcBef>
+              <a:spcAft>
+                <a:spcPts val="0"/>
+              </a:spcAft>
+            </a:pPr>
+            <a:r>
+              <a:rPr sz="850" b="1">
+                <a:solidFill>
+                  <a:srgbClr val="6F35D4"/>
+                </a:solidFill>
+                <a:latin typeface="Arial"/>
+              </a:rPr>
+              <a:t>ПУТЬ</a:t>
+            </a:r>
+          </a:p>
+        </p:txBody>
+      </p:sp>
+      <p:sp>
+        <p:nvSpPr>
+          <p:cNvPr id="10" name="TextBox 9"/>
+          <p:cNvSpPr txBox="1"/>
+          <p:nvPr/>
+        </p:nvSpPr>
+        <p:spPr>
+          <a:xfrm>
+            <a:off x="1097280" y="1700784"/>
+            <a:ext cx="10287000" cy="201168"/>
+          </a:xfrm>
+          <a:prstGeom prst="rect">
+            <a:avLst/>
+          </a:prstGeom>
+          <a:noFill/>
+        </p:spPr>
+        <p:txBody>
+          <a:bodyPr wrap="square" anchor="t" lIns="0" rIns="0" tIns="0" bIns="0">
+            <a:spAutoFit/>
+          </a:bodyPr>
+          <a:lstStyle/>
+          <a:p>
+            <a:pPr algn="l">
+              <a:lnSpc>
+                <a:spcPct val="100000"/>
+              </a:lnSpc>
+              <a:spcBef>
+                <a:spcPts val="0"/>
+              </a:spcBef>
+              <a:spcAft>
+                <a:spcPts val="0"/>
+              </a:spcAft>
+            </a:pPr>
+            <a:r>
+              <a:rPr sz="1150" b="1">
+                <a:solidFill>
+                  <a:srgbClr val="21172F"/>
+                </a:solidFill>
+                <a:latin typeface="Arial"/>
+              </a:rPr>
+              <a:t>Заказы -&gt; Получены -&gt; Подробнее</a:t>
+            </a:r>
+          </a:p>
+        </p:txBody>
+      </p:sp>
+      <p:sp>
+        <p:nvSpPr>
+          <p:cNvPr id="11" name="Rectangle 10"/>
+          <p:cNvSpPr/>
+          <p:nvPr/>
+        </p:nvSpPr>
+        <p:spPr>
+          <a:xfrm>
+            <a:off x="530352" y="2066543"/>
+            <a:ext cx="3822191" cy="4206240"/>
+          </a:xfrm>
+          <a:prstGeom prst="rect">
+            <a:avLst/>
+          </a:prstGeom>
+          <a:solidFill>
+            <a:srgbClr val="FFFFFF"/>
+          </a:solidFill>
+          <a:ln w="10160">
+            <a:solidFill>
+              <a:srgbClr val="DED9E8"/>
+            </a:solidFill>
+          </a:ln>
+        </p:spPr>
+        <p:style>
+          <a:lnRef idx="1">
+            <a:schemeClr val="accent1"/>
+          </a:lnRef>
+          <a:fillRef idx="3">
+            <a:schemeClr val="accent1"/>
+          </a:fillRef>
+          <a:effectRef idx="2">
+            <a:schemeClr val="accent1"/>
+          </a:effectRef>
+          <a:fontRef idx="minor">
+            <a:schemeClr val="lt1"/>
+          </a:fontRef>
+        </p:style>
+        <p:txBody>
+          <a:bodyPr rtlCol="0" anchor="ctr"/>
+          <a:lstStyle/>
+          <a:p>
+            <a:pPr algn="ctr"/>
+          </a:p>
+        </p:txBody>
+      </p:sp>
+      <p:sp>
+        <p:nvSpPr>
+          <p:cNvPr id="12" name="Rectangle 11"/>
+          <p:cNvSpPr/>
+          <p:nvPr/>
+        </p:nvSpPr>
+        <p:spPr>
+          <a:xfrm>
+            <a:off x="530352" y="2066543"/>
+            <a:ext cx="3822191" cy="292608"/>
+          </a:xfrm>
+          <a:prstGeom prst="rect">
+            <a:avLst/>
+          </a:prstGeom>
+          <a:solidFill>
+            <a:srgbClr val="3B1F68"/>
+          </a:solidFill>
+          <a:ln>
+            <a:noFill/>
+          </a:ln>
+        </p:spPr>
+        <p:style>
+          <a:lnRef idx="1">
+            <a:schemeClr val="accent1"/>
+          </a:lnRef>
+          <a:fillRef idx="3">
+            <a:schemeClr val="accent1"/>
+          </a:fillRef>
+          <a:effectRef idx="2">
+            <a:schemeClr val="accent1"/>
+          </a:effectRef>
+          <a:fontRef idx="minor">
+            <a:schemeClr val="lt1"/>
+          </a:fontRef>
+        </p:style>
+        <p:txBody>
+          <a:bodyPr rtlCol="0" anchor="ctr"/>
+          <a:lstStyle/>
+          <a:p>
+            <a:pPr algn="ctr"/>
+          </a:p>
+        </p:txBody>
+      </p:sp>
+      <p:sp>
+        <p:nvSpPr>
+          <p:cNvPr id="13" name="TextBox 12"/>
+          <p:cNvSpPr txBox="1"/>
+          <p:nvPr/>
+        </p:nvSpPr>
+        <p:spPr>
+          <a:xfrm>
+            <a:off x="658368" y="2121408"/>
+            <a:ext cx="3566159" cy="182880"/>
+          </a:xfrm>
+          <a:prstGeom prst="rect">
+            <a:avLst/>
+          </a:prstGeom>
+          <a:noFill/>
+        </p:spPr>
+        <p:txBody>
+          <a:bodyPr wrap="square" anchor="t" lIns="0" rIns="0" tIns="0" bIns="0">
+            <a:spAutoFit/>
+          </a:bodyPr>
+          <a:lstStyle/>
+          <a:p>
+            <a:pPr algn="l">
+              <a:lnSpc>
+                <a:spcPct val="100000"/>
+              </a:lnSpc>
+              <a:spcBef>
+                <a:spcPts val="0"/>
+              </a:spcBef>
+              <a:spcAft>
+                <a:spcPts val="0"/>
+              </a:spcAft>
+            </a:pPr>
+            <a:r>
+              <a:rPr sz="950" b="1">
+                <a:solidFill>
+                  <a:srgbClr val="FFFFFF"/>
+                </a:solidFill>
+                <a:latin typeface="Arial"/>
+              </a:rPr>
+              <a:t>Экран на телефоне</a:t>
+            </a:r>
+          </a:p>
+        </p:txBody>
+      </p:sp>
+      <p:pic>
+        <p:nvPicPr>
+          <p:cNvPr id="14" name="Picture 13" descr="image.png"/>
+          <p:cNvPicPr>
+            <a:picLocks noChangeAspect="1"/>
+          </p:cNvPicPr>
+          <p:nvPr/>
+        </p:nvPicPr>
+        <p:blipFill>
+          <a:blip r:embed="rId2"/>
+          <a:stretch>
+            <a:fillRect/>
+          </a:stretch>
+        </p:blipFill>
+        <p:spPr>
+          <a:xfrm>
+            <a:off x="1639451" y="2432303"/>
+            <a:ext cx="1603993" cy="3767327"/>
+          </a:xfrm>
+          <a:prstGeom prst="rect">
+            <a:avLst/>
+          </a:prstGeom>
+        </p:spPr>
+      </p:pic>
+      <p:sp>
+        <p:nvSpPr>
+          <p:cNvPr id="15" name="Oval 14"/>
+          <p:cNvSpPr/>
+          <p:nvPr/>
+        </p:nvSpPr>
+        <p:spPr>
+          <a:xfrm>
+            <a:off x="2212848" y="4916180"/>
+            <a:ext cx="457200" cy="457200"/>
+          </a:xfrm>
+          <a:prstGeom prst="ellipse">
+            <a:avLst/>
+          </a:prstGeom>
+          <a:noFill/>
+          <a:ln w="27940">
+            <a:solidFill>
+              <a:srgbClr val="D94261"/>
+            </a:solidFill>
+          </a:ln>
+        </p:spPr>
+        <p:style>
+          <a:lnRef idx="1">
+            <a:schemeClr val="accent1"/>
+          </a:lnRef>
+          <a:fillRef idx="3">
+            <a:schemeClr val="accent1"/>
+          </a:fillRef>
+          <a:effectRef idx="2">
+            <a:schemeClr val="accent1"/>
+          </a:effectRef>
+          <a:fontRef idx="minor">
+            <a:schemeClr val="lt1"/>
+          </a:fontRef>
+        </p:style>
+        <p:txBody>
+          <a:bodyPr rtlCol="0" anchor="ctr"/>
+          <a:lstStyle/>
+          <a:p>
+            <a:pPr algn="ctr"/>
+          </a:p>
+        </p:txBody>
+      </p:sp>
+      <p:sp>
+        <p:nvSpPr>
+          <p:cNvPr id="16" name="Oval 15"/>
+          <p:cNvSpPr/>
+          <p:nvPr/>
+        </p:nvSpPr>
+        <p:spPr>
+          <a:xfrm>
+            <a:off x="2276856" y="4980188"/>
+            <a:ext cx="329184" cy="329184"/>
+          </a:xfrm>
+          <a:prstGeom prst="ellipse">
+            <a:avLst/>
+          </a:prstGeom>
+          <a:solidFill>
+            <a:srgbClr val="D94261"/>
+          </a:solidFill>
+          <a:ln>
+            <a:noFill/>
+          </a:ln>
+        </p:spPr>
+        <p:style>
+          <a:lnRef idx="1">
+            <a:schemeClr val="accent1"/>
+          </a:lnRef>
+          <a:fillRef idx="3">
+            <a:schemeClr val="accent1"/>
+          </a:fillRef>
+          <a:effectRef idx="2">
+            <a:schemeClr val="accent1"/>
+          </a:effectRef>
+          <a:fontRef idx="minor">
+            <a:schemeClr val="lt1"/>
+          </a:fontRef>
+        </p:style>
+        <p:txBody>
+          <a:bodyPr rtlCol="0" anchor="ctr" lIns="0" rIns="0" tIns="0" bIns="0"/>
+          <a:lstStyle/>
+          <a:p>
+            <a:pPr algn="ctr"/>
+            <a:r>
+              <a:rPr sz="1200" b="1">
+                <a:solidFill>
+                  <a:srgbClr val="FFFFFF"/>
+                </a:solidFill>
+                <a:latin typeface="Arial"/>
+              </a:rPr>
+              <a:t>2</a:t>
+            </a:r>
+          </a:p>
+        </p:txBody>
+      </p:sp>
+      <p:sp>
+        <p:nvSpPr>
+          <p:cNvPr id="17" name="Up Arrow 16"/>
+          <p:cNvSpPr/>
+          <p:nvPr/>
+        </p:nvSpPr>
+        <p:spPr>
+          <a:xfrm rot="18900000">
+            <a:off x="2532888" y="5254508"/>
+            <a:ext cx="256032" cy="365760"/>
+          </a:xfrm>
+          <a:prstGeom prst="upArrow">
+            <a:avLst/>
+          </a:prstGeom>
+          <a:solidFill>
+            <a:srgbClr val="FFFFFF"/>
+          </a:solidFill>
+          <a:ln w="17780">
+            <a:solidFill>
+              <a:srgbClr val="3B1F68"/>
+            </a:solidFill>
+          </a:ln>
+        </p:spPr>
+        <p:style>
+          <a:lnRef idx="1">
+            <a:schemeClr val="accent1"/>
+          </a:lnRef>
+          <a:fillRef idx="3">
+            <a:schemeClr val="accent1"/>
+          </a:fillRef>
+          <a:effectRef idx="2">
+            <a:schemeClr val="accent1"/>
+          </a:effectRef>
+          <a:fontRef idx="minor">
+            <a:schemeClr val="lt1"/>
+          </a:fontRef>
+        </p:style>
+        <p:txBody>
+          <a:bodyPr rtlCol="0" anchor="ctr"/>
+          <a:lstStyle/>
+          <a:p>
+            <a:pPr algn="ctr"/>
+          </a:p>
+        </p:txBody>
+      </p:sp>
+      <p:sp>
+        <p:nvSpPr>
+          <p:cNvPr id="18" name="Rectangle 17"/>
+          <p:cNvSpPr/>
+          <p:nvPr/>
+        </p:nvSpPr>
+        <p:spPr>
+          <a:xfrm>
+            <a:off x="4645152" y="2066543"/>
+            <a:ext cx="6949440" cy="420624"/>
+          </a:xfrm>
+          <a:prstGeom prst="rect">
+            <a:avLst/>
+          </a:prstGeom>
+          <a:solidFill>
+            <a:srgbClr val="3B1F68"/>
+          </a:solidFill>
+          <a:ln>
+            <a:noFill/>
+          </a:ln>
+        </p:spPr>
+        <p:style>
+          <a:lnRef idx="1">
+            <a:schemeClr val="accent1"/>
+          </a:lnRef>
+          <a:fillRef idx="3">
+            <a:schemeClr val="accent1"/>
+          </a:fillRef>
+          <a:effectRef idx="2">
+            <a:schemeClr val="accent1"/>
+          </a:effectRef>
+          <a:fontRef idx="minor">
+            <a:schemeClr val="lt1"/>
+          </a:fontRef>
+        </p:style>
+        <p:txBody>
+          <a:bodyPr rtlCol="0" anchor="ctr"/>
+          <a:lstStyle/>
+          <a:p>
+            <a:pPr algn="ctr"/>
+          </a:p>
+        </p:txBody>
+      </p:sp>
+      <p:sp>
+        <p:nvSpPr>
+          <p:cNvPr id="19" name="TextBox 18"/>
+          <p:cNvSpPr txBox="1"/>
+          <p:nvPr/>
+        </p:nvSpPr>
+        <p:spPr>
+          <a:xfrm>
+            <a:off x="4809744" y="2185416"/>
+            <a:ext cx="6620255" cy="164592"/>
+          </a:xfrm>
+          <a:prstGeom prst="rect">
+            <a:avLst/>
+          </a:prstGeom>
+          <a:noFill/>
+        </p:spPr>
+        <p:txBody>
+          <a:bodyPr wrap="square" anchor="t" lIns="0" rIns="0" tIns="0" bIns="0">
+            <a:spAutoFit/>
+          </a:bodyPr>
+          <a:lstStyle/>
+          <a:p>
+            <a:pPr algn="l">
+              <a:lnSpc>
+                <a:spcPct val="100000"/>
+              </a:lnSpc>
+              <a:spcBef>
+                <a:spcPts val="0"/>
+              </a:spcBef>
+              <a:spcAft>
+                <a:spcPts val="0"/>
+              </a:spcAft>
+            </a:pPr>
+            <a:r>
+              <a:rPr sz="950" b="1">
+                <a:solidFill>
+                  <a:srgbClr val="FFFFFF"/>
+                </a:solidFill>
+                <a:latin typeface="Arial"/>
+              </a:rPr>
+              <a:t>ШАГ 2 ИЗ 3</a:t>
+            </a:r>
+          </a:p>
+        </p:txBody>
+      </p:sp>
+      <p:sp>
+        <p:nvSpPr>
+          <p:cNvPr id="20" name="Rectangle 19"/>
+          <p:cNvSpPr/>
+          <p:nvPr/>
+        </p:nvSpPr>
+        <p:spPr>
+          <a:xfrm>
+            <a:off x="4645152" y="2596896"/>
+            <a:ext cx="6949440" cy="1499616"/>
+          </a:xfrm>
+          <a:prstGeom prst="rect">
+            <a:avLst/>
+          </a:prstGeom>
+          <a:solidFill>
+            <a:srgbClr val="FFFFFF"/>
+          </a:solidFill>
+          <a:ln w="10160">
+            <a:solidFill>
+              <a:srgbClr val="DED9E8"/>
+            </a:solidFill>
+          </a:ln>
+        </p:spPr>
+        <p:style>
+          <a:lnRef idx="1">
+            <a:schemeClr val="accent1"/>
+          </a:lnRef>
+          <a:fillRef idx="3">
+            <a:schemeClr val="accent1"/>
+          </a:fillRef>
+          <a:effectRef idx="2">
+            <a:schemeClr val="accent1"/>
+          </a:effectRef>
+          <a:fontRef idx="minor">
+            <a:schemeClr val="lt1"/>
+          </a:fontRef>
+        </p:style>
+        <p:txBody>
+          <a:bodyPr rtlCol="0" anchor="ctr"/>
+          <a:lstStyle/>
+          <a:p>
+            <a:pPr algn="ctr"/>
+          </a:p>
+        </p:txBody>
+      </p:sp>
+      <p:sp>
+        <p:nvSpPr>
+          <p:cNvPr id="21" name="Rectangle 20"/>
+          <p:cNvSpPr/>
+          <p:nvPr/>
+        </p:nvSpPr>
+        <p:spPr>
+          <a:xfrm>
+            <a:off x="4645152" y="2596896"/>
+            <a:ext cx="54864" cy="1499616"/>
+          </a:xfrm>
+          <a:prstGeom prst="rect">
+            <a:avLst/>
+          </a:prstGeom>
+          <a:solidFill>
+            <a:srgbClr val="D94261"/>
+          </a:solidFill>
+          <a:ln>
+            <a:noFill/>
+          </a:ln>
+        </p:spPr>
+        <p:style>
+          <a:lnRef idx="1">
+            <a:schemeClr val="accent1"/>
+          </a:lnRef>
+          <a:fillRef idx="3">
+            <a:schemeClr val="accent1"/>
+          </a:fillRef>
+          <a:effectRef idx="2">
+            <a:schemeClr val="accent1"/>
+          </a:effectRef>
+          <a:fontRef idx="minor">
+            <a:schemeClr val="lt1"/>
+          </a:fontRef>
+        </p:style>
+        <p:txBody>
+          <a:bodyPr rtlCol="0" anchor="ctr"/>
+          <a:lstStyle/>
+          <a:p>
+            <a:pPr algn="ctr"/>
+          </a:p>
+        </p:txBody>
+      </p:sp>
+      <p:sp>
+        <p:nvSpPr>
+          <p:cNvPr id="22" name="Rounded Rectangle 21"/>
+          <p:cNvSpPr/>
+          <p:nvPr/>
+        </p:nvSpPr>
+        <p:spPr>
+          <a:xfrm>
+            <a:off x="4809744" y="2734056"/>
+            <a:ext cx="310896" cy="310896"/>
+          </a:xfrm>
+          <a:prstGeom prst="roundRect">
+            <a:avLst/>
+          </a:prstGeom>
+          <a:solidFill>
+            <a:srgbClr val="D94261"/>
+          </a:solidFill>
+          <a:ln>
+            <a:noFill/>
+          </a:ln>
+        </p:spPr>
+        <p:style>
+          <a:lnRef idx="1">
+            <a:schemeClr val="accent1"/>
+          </a:lnRef>
+          <a:fillRef idx="3">
+            <a:schemeClr val="accent1"/>
+          </a:fillRef>
+          <a:effectRef idx="2">
+            <a:schemeClr val="accent1"/>
+          </a:effectRef>
+          <a:fontRef idx="minor">
+            <a:schemeClr val="lt1"/>
+          </a:fontRef>
+        </p:style>
+        <p:txBody>
+          <a:bodyPr rtlCol="0" anchor="ctr"/>
+          <a:lstStyle/>
+          <a:p>
+            <a:pPr algn="ctr"/>
+          </a:p>
+        </p:txBody>
+      </p:sp>
+      <p:sp>
+        <p:nvSpPr>
+          <p:cNvPr id="23" name="TextBox 22"/>
+          <p:cNvSpPr txBox="1"/>
+          <p:nvPr/>
+        </p:nvSpPr>
+        <p:spPr>
+          <a:xfrm>
+            <a:off x="4809744" y="2743200"/>
+            <a:ext cx="310896" cy="256032"/>
+          </a:xfrm>
+          <a:prstGeom prst="rect">
+            <a:avLst/>
+          </a:prstGeom>
+          <a:noFill/>
+        </p:spPr>
+        <p:txBody>
+          <a:bodyPr wrap="square" anchor="ctr" lIns="0" rIns="0" tIns="0" bIns="0">
+            <a:spAutoFit/>
+          </a:bodyPr>
+          <a:lstStyle/>
+          <a:p>
+            <a:pPr algn="ctr">
+              <a:lnSpc>
+                <a:spcPct val="100000"/>
+              </a:lnSpc>
+              <a:spcBef>
+                <a:spcPts val="0"/>
+              </a:spcBef>
+              <a:spcAft>
+                <a:spcPts val="0"/>
+              </a:spcAft>
+            </a:pPr>
+            <a:r>
+              <a:rPr sz="1100" b="1">
+                <a:solidFill>
+                  <a:srgbClr val="FFFFFF"/>
+                </a:solidFill>
+                <a:latin typeface="Arial"/>
+              </a:rPr>
+              <a:t>2</a:t>
+            </a:r>
+          </a:p>
+        </p:txBody>
+      </p:sp>
+      <p:sp>
+        <p:nvSpPr>
+          <p:cNvPr id="24" name="TextBox 23"/>
+          <p:cNvSpPr txBox="1"/>
+          <p:nvPr/>
+        </p:nvSpPr>
+        <p:spPr>
+          <a:xfrm>
+            <a:off x="5230368" y="2688336"/>
+            <a:ext cx="6217920" cy="310896"/>
+          </a:xfrm>
+          <a:prstGeom prst="rect">
+            <a:avLst/>
+          </a:prstGeom>
+          <a:noFill/>
+        </p:spPr>
+        <p:txBody>
+          <a:bodyPr wrap="square" anchor="t" lIns="0" rIns="0" tIns="0" bIns="0">
+            <a:spAutoFit/>
+          </a:bodyPr>
+          <a:lstStyle/>
+          <a:p>
+            <a:pPr algn="l">
+              <a:lnSpc>
+                <a:spcPct val="100000"/>
+              </a:lnSpc>
+              <a:spcBef>
+                <a:spcPts val="0"/>
+              </a:spcBef>
+              <a:spcAft>
+                <a:spcPts val="0"/>
+              </a:spcAft>
+            </a:pPr>
+            <a:r>
+              <a:rPr sz="1180" b="1">
+                <a:solidFill>
+                  <a:srgbClr val="21172F"/>
+                </a:solidFill>
+                <a:latin typeface="Arial"/>
+              </a:rPr>
+              <a:t>Скопируйте</a:t>
+            </a:r>
+          </a:p>
+        </p:txBody>
+      </p:sp>
+      <p:sp>
+        <p:nvSpPr>
+          <p:cNvPr id="25" name="TextBox 24"/>
+          <p:cNvSpPr txBox="1"/>
+          <p:nvPr/>
+        </p:nvSpPr>
+        <p:spPr>
+          <a:xfrm>
+            <a:off x="5230368" y="3008376"/>
+            <a:ext cx="6217920" cy="1033271"/>
+          </a:xfrm>
+          <a:prstGeom prst="rect">
+            <a:avLst/>
+          </a:prstGeom>
+          <a:noFill/>
+        </p:spPr>
+        <p:txBody>
+          <a:bodyPr wrap="square" anchor="t" lIns="0" rIns="0" tIns="0" bIns="0">
+            <a:spAutoFit/>
+          </a:bodyPr>
+          <a:lstStyle/>
+          <a:p>
+            <a:pPr algn="l">
+              <a:lnSpc>
+                <a:spcPct val="100000"/>
+              </a:lnSpc>
+              <a:spcBef>
+                <a:spcPts val="0"/>
+              </a:spcBef>
+              <a:spcAft>
+                <a:spcPts val="0"/>
+              </a:spcAft>
+            </a:pPr>
+            <a:r>
+              <a:rPr sz="1000" b="0">
+                <a:solidFill>
+                  <a:srgbClr val="6E687D"/>
+                </a:solidFill>
+                <a:latin typeface="Arial"/>
+              </a:rPr>
+              <a:t>Используйте кнопку рядом с кодом.</a:t>
+            </a:r>
+          </a:p>
+        </p:txBody>
+      </p:sp>
+      <p:sp>
+        <p:nvSpPr>
+          <p:cNvPr id="26" name="Rectangle 25"/>
+          <p:cNvSpPr/>
+          <p:nvPr/>
+        </p:nvSpPr>
+        <p:spPr>
+          <a:xfrm>
+            <a:off x="4645152" y="4315968"/>
+            <a:ext cx="6949440" cy="877824"/>
+          </a:xfrm>
+          <a:prstGeom prst="rect">
+            <a:avLst/>
+          </a:prstGeom>
+          <a:solidFill>
+            <a:srgbClr val="E1F6F3"/>
+          </a:solidFill>
+          <a:ln>
+            <a:noFill/>
+          </a:ln>
+        </p:spPr>
+        <p:style>
+          <a:lnRef idx="1">
+            <a:schemeClr val="accent1"/>
+          </a:lnRef>
+          <a:fillRef idx="3">
+            <a:schemeClr val="accent1"/>
+          </a:fillRef>
+          <a:effectRef idx="2">
+            <a:schemeClr val="accent1"/>
+          </a:effectRef>
+          <a:fontRef idx="minor">
+            <a:schemeClr val="lt1"/>
+          </a:fontRef>
+        </p:style>
+        <p:txBody>
+          <a:bodyPr rtlCol="0" anchor="ctr"/>
+          <a:lstStyle/>
+          <a:p>
+            <a:pPr algn="ctr"/>
+          </a:p>
+        </p:txBody>
+      </p:sp>
+      <p:sp>
+        <p:nvSpPr>
+          <p:cNvPr id="27" name="Rectangle 26"/>
+          <p:cNvSpPr/>
+          <p:nvPr/>
+        </p:nvSpPr>
+        <p:spPr>
+          <a:xfrm>
+            <a:off x="4645152" y="4315968"/>
+            <a:ext cx="54864" cy="877824"/>
+          </a:xfrm>
+          <a:prstGeom prst="rect">
+            <a:avLst/>
+          </a:prstGeom>
+          <a:solidFill>
+            <a:srgbClr val="149B91"/>
+          </a:solidFill>
+          <a:ln>
+            <a:noFill/>
+          </a:ln>
+        </p:spPr>
+        <p:style>
+          <a:lnRef idx="1">
+            <a:schemeClr val="accent1"/>
+          </a:lnRef>
+          <a:fillRef idx="3">
+            <a:schemeClr val="accent1"/>
+          </a:fillRef>
+          <a:effectRef idx="2">
+            <a:schemeClr val="accent1"/>
+          </a:effectRef>
+          <a:fontRef idx="minor">
+            <a:schemeClr val="lt1"/>
+          </a:fontRef>
+        </p:style>
+        <p:txBody>
+          <a:bodyPr rtlCol="0" anchor="ctr"/>
+          <a:lstStyle/>
+          <a:p>
+            <a:pPr algn="ctr"/>
+          </a:p>
+        </p:txBody>
+      </p:sp>
+      <p:sp>
+        <p:nvSpPr>
+          <p:cNvPr id="28" name="TextBox 27"/>
+          <p:cNvSpPr txBox="1"/>
+          <p:nvPr/>
+        </p:nvSpPr>
+        <p:spPr>
+          <a:xfrm>
+            <a:off x="4846320" y="4425696"/>
+            <a:ext cx="6620255" cy="219456"/>
+          </a:xfrm>
+          <a:prstGeom prst="rect">
+            <a:avLst/>
+          </a:prstGeom>
+          <a:noFill/>
+        </p:spPr>
+        <p:txBody>
+          <a:bodyPr wrap="square" anchor="t" lIns="0" rIns="0" tIns="0" bIns="0">
+            <a:spAutoFit/>
+          </a:bodyPr>
+          <a:lstStyle/>
+          <a:p>
+            <a:pPr algn="l">
+              <a:lnSpc>
+                <a:spcPct val="100000"/>
+              </a:lnSpc>
+              <a:spcBef>
+                <a:spcPts val="0"/>
+              </a:spcBef>
+              <a:spcAft>
+                <a:spcPts val="0"/>
+              </a:spcAft>
+            </a:pPr>
+            <a:r>
+              <a:rPr sz="1150" b="1">
+                <a:solidFill>
+                  <a:srgbClr val="21172F"/>
+                </a:solidFill>
+                <a:latin typeface="Arial"/>
+              </a:rPr>
+              <a:t>Проверка результата</a:t>
+            </a:r>
+          </a:p>
+        </p:txBody>
+      </p:sp>
+      <p:sp>
+        <p:nvSpPr>
+          <p:cNvPr id="29" name="TextBox 28"/>
+          <p:cNvSpPr txBox="1"/>
+          <p:nvPr/>
+        </p:nvSpPr>
+        <p:spPr>
+          <a:xfrm>
+            <a:off x="4846320" y="4681728"/>
+            <a:ext cx="6620255" cy="402336"/>
+          </a:xfrm>
+          <a:prstGeom prst="rect">
+            <a:avLst/>
+          </a:prstGeom>
+          <a:noFill/>
+        </p:spPr>
+        <p:txBody>
+          <a:bodyPr wrap="square" anchor="t" lIns="0" rIns="0" tIns="0" bIns="0">
+            <a:spAutoFit/>
+          </a:bodyPr>
+          <a:lstStyle/>
+          <a:p>
+            <a:pPr algn="l">
+              <a:lnSpc>
+                <a:spcPct val="100000"/>
+              </a:lnSpc>
+              <a:spcBef>
+                <a:spcPts val="0"/>
+              </a:spcBef>
+              <a:spcAft>
+                <a:spcPts val="0"/>
+              </a:spcAft>
+            </a:pPr>
+            <a:r>
+              <a:rPr sz="1000" b="0">
+                <a:solidFill>
+                  <a:srgbClr val="6E687D"/>
+                </a:solidFill>
+                <a:latin typeface="Arial"/>
+              </a:rPr>
+              <a:t>После нажатия дождитесь изменения экрана и переходите к следующему шагу.</a:t>
+            </a:r>
+          </a:p>
+        </p:txBody>
+      </p:sp>
+      <p:sp>
+        <p:nvSpPr>
+          <p:cNvPr id="30" name="Rectangle 29"/>
+          <p:cNvSpPr/>
+          <p:nvPr/>
+        </p:nvSpPr>
+        <p:spPr>
+          <a:xfrm>
+            <a:off x="4645152" y="5413248"/>
+            <a:ext cx="6949440" cy="603504"/>
+          </a:xfrm>
+          <a:prstGeom prst="rect">
+            <a:avLst/>
+          </a:prstGeom>
+          <a:solidFill>
+            <a:srgbClr val="FFF5C9"/>
+          </a:solidFill>
+          <a:ln>
+            <a:noFill/>
+          </a:ln>
+        </p:spPr>
+        <p:style>
+          <a:lnRef idx="1">
+            <a:schemeClr val="accent1"/>
+          </a:lnRef>
+          <a:fillRef idx="3">
+            <a:schemeClr val="accent1"/>
+          </a:fillRef>
+          <a:effectRef idx="2">
+            <a:schemeClr val="accent1"/>
+          </a:effectRef>
+          <a:fontRef idx="minor">
+            <a:schemeClr val="lt1"/>
+          </a:fontRef>
+        </p:style>
+        <p:txBody>
+          <a:bodyPr rtlCol="0" anchor="ctr"/>
+          <a:lstStyle/>
+          <a:p>
+            <a:pPr algn="ctr"/>
+          </a:p>
+        </p:txBody>
+      </p:sp>
+      <p:sp>
+        <p:nvSpPr>
+          <p:cNvPr id="31" name="TextBox 30"/>
+          <p:cNvSpPr txBox="1"/>
+          <p:nvPr/>
+        </p:nvSpPr>
+        <p:spPr>
+          <a:xfrm>
+            <a:off x="4809744" y="5559552"/>
+            <a:ext cx="6620255" cy="292608"/>
+          </a:xfrm>
+          <a:prstGeom prst="rect">
+            <a:avLst/>
+          </a:prstGeom>
+          <a:noFill/>
+        </p:spPr>
+        <p:txBody>
+          <a:bodyPr wrap="square" anchor="t" lIns="0" rIns="0" tIns="0" bIns="0">
+            <a:spAutoFit/>
+          </a:bodyPr>
+          <a:lstStyle/>
+          <a:p>
+            <a:pPr algn="l">
+              <a:lnSpc>
+                <a:spcPct val="100000"/>
+              </a:lnSpc>
+              <a:spcBef>
+                <a:spcPts val="0"/>
+              </a:spcBef>
+              <a:spcAft>
+                <a:spcPts val="0"/>
+              </a:spcAft>
+            </a:pPr>
+            <a:r>
+              <a:rPr sz="919" b="0">
+                <a:solidFill>
+                  <a:srgbClr val="6E687D"/>
+                </a:solidFill>
+                <a:latin typeface="Arial"/>
+              </a:rPr>
+              <a:t>Курсор и номер показывают единственное действие этого кадра.</a:t>
+            </a:r>
+          </a:p>
+        </p:txBody>
+      </p:sp>
+      <p:sp>
+        <p:nvSpPr>
+          <p:cNvPr id="32" name="Rectangle 31"/>
+          <p:cNvSpPr/>
+          <p:nvPr/>
+        </p:nvSpPr>
+        <p:spPr>
+          <a:xfrm>
+            <a:off x="438912" y="6537960"/>
+            <a:ext cx="11247120" cy="9144"/>
+          </a:xfrm>
+          <a:prstGeom prst="rect">
+            <a:avLst/>
+          </a:prstGeom>
+          <a:solidFill>
+            <a:srgbClr val="DED9E8"/>
+          </a:solidFill>
+          <a:ln>
+            <a:noFill/>
+          </a:ln>
+        </p:spPr>
+        <p:style>
+          <a:lnRef idx="1">
+            <a:schemeClr val="accent1"/>
+          </a:lnRef>
+          <a:fillRef idx="3">
+            <a:schemeClr val="accent1"/>
+          </a:fillRef>
+          <a:effectRef idx="2">
+            <a:schemeClr val="accent1"/>
+          </a:effectRef>
+          <a:fontRef idx="minor">
+            <a:schemeClr val="lt1"/>
+          </a:fontRef>
+        </p:style>
+        <p:txBody>
+          <a:bodyPr rtlCol="0" anchor="ctr"/>
+          <a:lstStyle/>
+          <a:p>
+            <a:pPr algn="ctr"/>
+          </a:p>
+        </p:txBody>
+      </p:sp>
+      <p:sp>
+        <p:nvSpPr>
+          <p:cNvPr id="33" name="TextBox 32"/>
+          <p:cNvSpPr txBox="1"/>
+          <p:nvPr/>
+        </p:nvSpPr>
+        <p:spPr>
+          <a:xfrm>
+            <a:off x="438912" y="6601968"/>
+            <a:ext cx="7315200" cy="182880"/>
+          </a:xfrm>
+          <a:prstGeom prst="rect">
+            <a:avLst/>
+          </a:prstGeom>
+          <a:noFill/>
+        </p:spPr>
+        <p:txBody>
+          <a:bodyPr wrap="square" anchor="t" lIns="0" rIns="0" tIns="0" bIns="0">
+            <a:spAutoFit/>
+          </a:bodyPr>
+          <a:lstStyle/>
+          <a:p>
+            <a:pPr algn="l">
+              <a:lnSpc>
+                <a:spcPct val="100000"/>
+              </a:lnSpc>
+              <a:spcBef>
+                <a:spcPts val="0"/>
+              </a:spcBef>
+              <a:spcAft>
+                <a:spcPts val="0"/>
+              </a:spcAft>
+            </a:pPr>
+            <a:r>
+              <a:rPr sz="900" b="0">
+                <a:solidFill>
+                  <a:srgbClr val="6E687D"/>
+                </a:solidFill>
+                <a:latin typeface="Arial"/>
+              </a:rPr>
+              <a:t>Роль: Ученик · Algo MAX</a:t>
+            </a:r>
+          </a:p>
+        </p:txBody>
+      </p:sp>
+    </p:spTree>
+  </p:cSld>
+  <p:clrMapOvr>
+    <a:masterClrMapping/>
+  </p:clrMapOvr>
+</p:sld>
+</file>
+
+<file path=ppt/slides/slide29.xml><?xml version="1.0" encoding="utf-8"?>
+<p:sld xmlns:a="http://schemas.openxmlformats.org/drawingml/2006/main" xmlns:p="http://schemas.openxmlformats.org/presentationml/2006/main" xmlns:r="http://schemas.openxmlformats.org/officeDocument/2006/relationships">
+  <p:cSld>
+    <p:bg>
+      <p:bgPr>
+        <a:solidFill>
+          <a:srgbClr val="F7F6FA"/>
+        </a:solidFill>
+        <a:effectLst/>
+      </p:bgPr>
+    </p:bg>
+    <p:spTree>
+      <p:nvGrpSpPr>
+        <p:cNvPr id="1" name=""/>
+        <p:cNvGrpSpPr/>
+        <p:nvPr/>
+      </p:nvGrpSpPr>
+      <p:grpSpPr/>
+      <p:sp>
+        <p:nvSpPr>
+          <p:cNvPr id="2" name="Rounded Rectangle 1"/>
+          <p:cNvSpPr/>
+          <p:nvPr/>
+        </p:nvSpPr>
+        <p:spPr>
+          <a:xfrm>
+            <a:off x="411480" y="274320"/>
+            <a:ext cx="384048" cy="384048"/>
+          </a:xfrm>
+          <a:prstGeom prst="roundRect">
+            <a:avLst/>
+          </a:prstGeom>
+          <a:solidFill>
+            <a:srgbClr val="6F35D4"/>
+          </a:solidFill>
+          <a:ln>
+            <a:noFill/>
+          </a:ln>
+        </p:spPr>
+        <p:style>
+          <a:lnRef idx="1">
+            <a:schemeClr val="accent1"/>
+          </a:lnRef>
+          <a:fillRef idx="3">
+            <a:schemeClr val="accent1"/>
+          </a:fillRef>
+          <a:effectRef idx="2">
+            <a:schemeClr val="accent1"/>
+          </a:effectRef>
+          <a:fontRef idx="minor">
+            <a:schemeClr val="lt1"/>
+          </a:fontRef>
+        </p:style>
+        <p:txBody>
+          <a:bodyPr rtlCol="0" anchor="ctr"/>
+          <a:lstStyle/>
+          <a:p>
+            <a:pPr algn="ctr"/>
+          </a:p>
+        </p:txBody>
+      </p:sp>
+      <p:sp>
+        <p:nvSpPr>
+          <p:cNvPr id="3" name="TextBox 2"/>
+          <p:cNvSpPr txBox="1"/>
+          <p:nvPr/>
+        </p:nvSpPr>
+        <p:spPr>
+          <a:xfrm>
+            <a:off x="411480" y="283464"/>
+            <a:ext cx="384048" cy="347472"/>
+          </a:xfrm>
+          <a:prstGeom prst="rect">
+            <a:avLst/>
+          </a:prstGeom>
+          <a:noFill/>
+        </p:spPr>
+        <p:txBody>
+          <a:bodyPr wrap="square" anchor="ctr" lIns="0" rIns="0" tIns="0" bIns="0">
+            <a:spAutoFit/>
+          </a:bodyPr>
+          <a:lstStyle/>
+          <a:p>
+            <a:pPr algn="ctr">
+              <a:lnSpc>
+                <a:spcPct val="100000"/>
+              </a:lnSpc>
+              <a:spcBef>
+                <a:spcPts val="0"/>
+              </a:spcBef>
+              <a:spcAft>
+                <a:spcPts val="0"/>
+              </a:spcAft>
+            </a:pPr>
+            <a:r>
+              <a:rPr sz="1600" b="1">
+                <a:solidFill>
+                  <a:srgbClr val="FFFFFF"/>
+                </a:solidFill>
+                <a:latin typeface="Arial"/>
+              </a:rPr>
+              <a:t>A</a:t>
+            </a:r>
+          </a:p>
+        </p:txBody>
+      </p:sp>
+      <p:sp>
+        <p:nvSpPr>
+          <p:cNvPr id="4" name="TextBox 3"/>
+          <p:cNvSpPr txBox="1"/>
+          <p:nvPr/>
+        </p:nvSpPr>
+        <p:spPr>
+          <a:xfrm>
+            <a:off x="896112" y="301752"/>
+            <a:ext cx="1508760" cy="292608"/>
+          </a:xfrm>
+          <a:prstGeom prst="rect">
+            <a:avLst/>
+          </a:prstGeom>
+          <a:noFill/>
+        </p:spPr>
+        <p:txBody>
+          <a:bodyPr wrap="square" anchor="t" lIns="0" rIns="0" tIns="0" bIns="0">
+            <a:spAutoFit/>
+          </a:bodyPr>
+          <a:lstStyle/>
+          <a:p>
+            <a:pPr algn="l">
+              <a:lnSpc>
+                <a:spcPct val="100000"/>
+              </a:lnSpc>
+              <a:spcBef>
+                <a:spcPts val="0"/>
+              </a:spcBef>
+              <a:spcAft>
+                <a:spcPts val="0"/>
+              </a:spcAft>
+            </a:pPr>
+            <a:r>
+              <a:rPr sz="1700" b="1">
+                <a:solidFill>
+                  <a:srgbClr val="21172F"/>
+                </a:solidFill>
+                <a:latin typeface="Arial"/>
+              </a:rPr>
+              <a:t>Algo MAX</a:t>
+            </a:r>
+          </a:p>
+        </p:txBody>
+      </p:sp>
+      <p:sp>
+        <p:nvSpPr>
+          <p:cNvPr id="5" name="TextBox 4"/>
+          <p:cNvSpPr txBox="1"/>
+          <p:nvPr/>
+        </p:nvSpPr>
+        <p:spPr>
+          <a:xfrm>
+            <a:off x="438912" y="896112"/>
+            <a:ext cx="3657600" cy="219456"/>
+          </a:xfrm>
+          <a:prstGeom prst="rect">
+            <a:avLst/>
+          </a:prstGeom>
+          <a:noFill/>
+        </p:spPr>
+        <p:txBody>
+          <a:bodyPr wrap="square" anchor="t" lIns="0" rIns="0" tIns="0" bIns="0">
+            <a:spAutoFit/>
+          </a:bodyPr>
+          <a:lstStyle/>
+          <a:p>
+            <a:pPr algn="l">
+              <a:lnSpc>
+                <a:spcPct val="100000"/>
+              </a:lnSpc>
+              <a:spcBef>
+                <a:spcPts val="0"/>
+              </a:spcBef>
+              <a:spcAft>
+                <a:spcPts val="0"/>
+              </a:spcAft>
+            </a:pPr>
+            <a:r>
+              <a:rPr sz="1000" b="1">
+                <a:solidFill>
+                  <a:srgbClr val="6F35D4"/>
+                </a:solidFill>
+                <a:latin typeface="Arial"/>
+              </a:rPr>
+              <a:t>ЦИФРОВОЙ ТОВАР</a:t>
+            </a:r>
+          </a:p>
+        </p:txBody>
+      </p:sp>
+      <p:sp>
+        <p:nvSpPr>
+          <p:cNvPr id="6" name="TextBox 5"/>
+          <p:cNvSpPr txBox="1"/>
+          <p:nvPr/>
+        </p:nvSpPr>
+        <p:spPr>
+          <a:xfrm>
+            <a:off x="438912" y="1097280"/>
+            <a:ext cx="11018520" cy="512064"/>
+          </a:xfrm>
+          <a:prstGeom prst="rect">
+            <a:avLst/>
+          </a:prstGeom>
+          <a:noFill/>
+        </p:spPr>
+        <p:txBody>
+          <a:bodyPr wrap="square" anchor="t" lIns="0" rIns="0" tIns="0" bIns="0">
+            <a:spAutoFit/>
+          </a:bodyPr>
+          <a:lstStyle/>
+          <a:p>
+            <a:pPr algn="l">
+              <a:lnSpc>
+                <a:spcPct val="100000"/>
+              </a:lnSpc>
+              <a:spcBef>
+                <a:spcPts val="0"/>
+              </a:spcBef>
+              <a:spcAft>
+                <a:spcPts val="0"/>
+              </a:spcAft>
+            </a:pPr>
+            <a:r>
+              <a:rPr sz="2800" b="1">
+                <a:solidFill>
+                  <a:srgbClr val="21172F"/>
+                </a:solidFill>
+                <a:latin typeface="Arial"/>
+              </a:rPr>
+              <a:t>Получение и копирование кода</a:t>
+            </a:r>
+          </a:p>
+        </p:txBody>
+      </p:sp>
+      <p:sp>
+        <p:nvSpPr>
+          <p:cNvPr id="7" name="TextBox 6"/>
+          <p:cNvSpPr txBox="1"/>
+          <p:nvPr/>
+        </p:nvSpPr>
+        <p:spPr>
+          <a:xfrm>
+            <a:off x="11137392" y="310896"/>
+            <a:ext cx="548640" cy="256032"/>
+          </a:xfrm>
+          <a:prstGeom prst="rect">
+            <a:avLst/>
+          </a:prstGeom>
+          <a:noFill/>
+        </p:spPr>
+        <p:txBody>
+          <a:bodyPr wrap="square" anchor="t" lIns="0" rIns="0" tIns="0" bIns="0">
+            <a:spAutoFit/>
+          </a:bodyPr>
+          <a:lstStyle/>
+          <a:p>
+            <a:pPr algn="r">
+              <a:lnSpc>
+                <a:spcPct val="100000"/>
+              </a:lnSpc>
+              <a:spcBef>
+                <a:spcPts val="0"/>
+              </a:spcBef>
+              <a:spcAft>
+                <a:spcPts val="0"/>
+              </a:spcAft>
+            </a:pPr>
+            <a:r>
+              <a:rPr sz="1100" b="0">
+                <a:solidFill>
+                  <a:srgbClr val="6E687D"/>
+                </a:solidFill>
+                <a:latin typeface="Arial"/>
+              </a:rPr>
+              <a:t>29</a:t>
+            </a:r>
+          </a:p>
+        </p:txBody>
+      </p:sp>
+      <p:sp>
+        <p:nvSpPr>
+          <p:cNvPr id="8" name="Rectangle 7"/>
+          <p:cNvSpPr/>
+          <p:nvPr/>
+        </p:nvSpPr>
+        <p:spPr>
+          <a:xfrm>
+            <a:off x="438912" y="1645920"/>
+            <a:ext cx="11228832" cy="329184"/>
+          </a:xfrm>
+          <a:prstGeom prst="rect">
+            <a:avLst/>
+          </a:prstGeom>
+          <a:solidFill>
+            <a:srgbClr val="EEE7FF"/>
+          </a:solidFill>
+          <a:ln>
+            <a:noFill/>
+          </a:ln>
+        </p:spPr>
+        <p:style>
+          <a:lnRef idx="1">
+            <a:schemeClr val="accent1"/>
+          </a:lnRef>
+          <a:fillRef idx="3">
+            <a:schemeClr val="accent1"/>
+          </a:fillRef>
+          <a:effectRef idx="2">
+            <a:schemeClr val="accent1"/>
+          </a:effectRef>
+          <a:fontRef idx="minor">
+            <a:schemeClr val="lt1"/>
+          </a:fontRef>
+        </p:style>
+        <p:txBody>
+          <a:bodyPr rtlCol="0" anchor="ctr"/>
+          <a:lstStyle/>
+          <a:p>
+            <a:pPr algn="ctr"/>
+          </a:p>
+        </p:txBody>
+      </p:sp>
+      <p:sp>
+        <p:nvSpPr>
+          <p:cNvPr id="9" name="TextBox 8"/>
+          <p:cNvSpPr txBox="1"/>
+          <p:nvPr/>
+        </p:nvSpPr>
+        <p:spPr>
+          <a:xfrm>
+            <a:off x="603504" y="1746504"/>
+            <a:ext cx="420624" cy="137160"/>
+          </a:xfrm>
+          <a:prstGeom prst="rect">
+            <a:avLst/>
+          </a:prstGeom>
+          <a:noFill/>
+        </p:spPr>
+        <p:txBody>
+          <a:bodyPr wrap="square" anchor="t" lIns="0" rIns="0" tIns="0" bIns="0">
+            <a:spAutoFit/>
+          </a:bodyPr>
+          <a:lstStyle/>
+          <a:p>
+            <a:pPr algn="l">
+              <a:lnSpc>
+                <a:spcPct val="100000"/>
+              </a:lnSpc>
+              <a:spcBef>
+                <a:spcPts val="0"/>
+              </a:spcBef>
+              <a:spcAft>
+                <a:spcPts val="0"/>
+              </a:spcAft>
+            </a:pPr>
+            <a:r>
+              <a:rPr sz="850" b="1">
+                <a:solidFill>
+                  <a:srgbClr val="6F35D4"/>
+                </a:solidFill>
+                <a:latin typeface="Arial"/>
+              </a:rPr>
+              <a:t>ПУТЬ</a:t>
+            </a:r>
+          </a:p>
+        </p:txBody>
+      </p:sp>
+      <p:sp>
+        <p:nvSpPr>
+          <p:cNvPr id="10" name="TextBox 9"/>
+          <p:cNvSpPr txBox="1"/>
+          <p:nvPr/>
+        </p:nvSpPr>
+        <p:spPr>
+          <a:xfrm>
+            <a:off x="1097280" y="1700784"/>
+            <a:ext cx="10287000" cy="201168"/>
+          </a:xfrm>
+          <a:prstGeom prst="rect">
+            <a:avLst/>
+          </a:prstGeom>
+          <a:noFill/>
+        </p:spPr>
+        <p:txBody>
+          <a:bodyPr wrap="square" anchor="t" lIns="0" rIns="0" tIns="0" bIns="0">
+            <a:spAutoFit/>
+          </a:bodyPr>
+          <a:lstStyle/>
+          <a:p>
+            <a:pPr algn="l">
+              <a:lnSpc>
+                <a:spcPct val="100000"/>
+              </a:lnSpc>
+              <a:spcBef>
+                <a:spcPts val="0"/>
+              </a:spcBef>
+              <a:spcAft>
+                <a:spcPts val="0"/>
+              </a:spcAft>
+            </a:pPr>
+            <a:r>
+              <a:rPr sz="1150" b="1">
+                <a:solidFill>
+                  <a:srgbClr val="21172F"/>
+                </a:solidFill>
+                <a:latin typeface="Arial"/>
+              </a:rPr>
+              <a:t>Заказы -&gt; Получены -&gt; Подробнее</a:t>
+            </a:r>
+          </a:p>
+        </p:txBody>
+      </p:sp>
+      <p:sp>
+        <p:nvSpPr>
+          <p:cNvPr id="11" name="Rectangle 10"/>
+          <p:cNvSpPr/>
+          <p:nvPr/>
+        </p:nvSpPr>
+        <p:spPr>
+          <a:xfrm>
+            <a:off x="530352" y="2066543"/>
+            <a:ext cx="3822191" cy="4206240"/>
+          </a:xfrm>
+          <a:prstGeom prst="rect">
+            <a:avLst/>
+          </a:prstGeom>
+          <a:solidFill>
+            <a:srgbClr val="FFFFFF"/>
+          </a:solidFill>
+          <a:ln w="10160">
+            <a:solidFill>
+              <a:srgbClr val="DED9E8"/>
+            </a:solidFill>
+          </a:ln>
+        </p:spPr>
+        <p:style>
+          <a:lnRef idx="1">
+            <a:schemeClr val="accent1"/>
+          </a:lnRef>
+          <a:fillRef idx="3">
+            <a:schemeClr val="accent1"/>
+          </a:fillRef>
+          <a:effectRef idx="2">
+            <a:schemeClr val="accent1"/>
+          </a:effectRef>
+          <a:fontRef idx="minor">
+            <a:schemeClr val="lt1"/>
+          </a:fontRef>
+        </p:style>
+        <p:txBody>
+          <a:bodyPr rtlCol="0" anchor="ctr"/>
+          <a:lstStyle/>
+          <a:p>
+            <a:pPr algn="ctr"/>
+          </a:p>
+        </p:txBody>
+      </p:sp>
+      <p:sp>
+        <p:nvSpPr>
+          <p:cNvPr id="12" name="Rectangle 11"/>
+          <p:cNvSpPr/>
+          <p:nvPr/>
+        </p:nvSpPr>
+        <p:spPr>
+          <a:xfrm>
+            <a:off x="530352" y="2066543"/>
+            <a:ext cx="3822191" cy="292608"/>
+          </a:xfrm>
+          <a:prstGeom prst="rect">
+            <a:avLst/>
+          </a:prstGeom>
+          <a:solidFill>
+            <a:srgbClr val="3B1F68"/>
+          </a:solidFill>
+          <a:ln>
+            <a:noFill/>
+          </a:ln>
+        </p:spPr>
+        <p:style>
+          <a:lnRef idx="1">
+            <a:schemeClr val="accent1"/>
+          </a:lnRef>
+          <a:fillRef idx="3">
+            <a:schemeClr val="accent1"/>
+          </a:fillRef>
+          <a:effectRef idx="2">
+            <a:schemeClr val="accent1"/>
+          </a:effectRef>
+          <a:fontRef idx="minor">
+            <a:schemeClr val="lt1"/>
+          </a:fontRef>
+        </p:style>
+        <p:txBody>
+          <a:bodyPr rtlCol="0" anchor="ctr"/>
+          <a:lstStyle/>
+          <a:p>
+            <a:pPr algn="ctr"/>
+          </a:p>
+        </p:txBody>
+      </p:sp>
+      <p:sp>
+        <p:nvSpPr>
+          <p:cNvPr id="13" name="TextBox 12"/>
+          <p:cNvSpPr txBox="1"/>
+          <p:nvPr/>
+        </p:nvSpPr>
+        <p:spPr>
+          <a:xfrm>
+            <a:off x="658368" y="2121408"/>
+            <a:ext cx="3566159" cy="182880"/>
+          </a:xfrm>
+          <a:prstGeom prst="rect">
+            <a:avLst/>
+          </a:prstGeom>
+          <a:noFill/>
+        </p:spPr>
+        <p:txBody>
+          <a:bodyPr wrap="square" anchor="t" lIns="0" rIns="0" tIns="0" bIns="0">
+            <a:spAutoFit/>
+          </a:bodyPr>
+          <a:lstStyle/>
+          <a:p>
+            <a:pPr algn="l">
+              <a:lnSpc>
+                <a:spcPct val="100000"/>
+              </a:lnSpc>
+              <a:spcBef>
+                <a:spcPts val="0"/>
+              </a:spcBef>
+              <a:spcAft>
+                <a:spcPts val="0"/>
+              </a:spcAft>
+            </a:pPr>
+            <a:r>
+              <a:rPr sz="950" b="1">
+                <a:solidFill>
+                  <a:srgbClr val="FFFFFF"/>
+                </a:solidFill>
+                <a:latin typeface="Arial"/>
+              </a:rPr>
+              <a:t>Экран на телефоне</a:t>
+            </a:r>
+          </a:p>
+        </p:txBody>
+      </p:sp>
+      <p:pic>
+        <p:nvPicPr>
+          <p:cNvPr id="14" name="Picture 13" descr="image.png"/>
+          <p:cNvPicPr>
+            <a:picLocks noChangeAspect="1"/>
+          </p:cNvPicPr>
+          <p:nvPr/>
+        </p:nvPicPr>
+        <p:blipFill>
+          <a:blip r:embed="rId2"/>
+          <a:stretch>
+            <a:fillRect/>
+          </a:stretch>
+        </p:blipFill>
+        <p:spPr>
+          <a:xfrm>
+            <a:off x="1639451" y="2432303"/>
+            <a:ext cx="1603993" cy="3767327"/>
+          </a:xfrm>
+          <a:prstGeom prst="rect">
+            <a:avLst/>
+          </a:prstGeom>
+        </p:spPr>
+      </p:pic>
+      <p:sp>
+        <p:nvSpPr>
+          <p:cNvPr id="15" name="Oval 14"/>
+          <p:cNvSpPr/>
+          <p:nvPr/>
+        </p:nvSpPr>
+        <p:spPr>
+          <a:xfrm>
+            <a:off x="2212848" y="5518952"/>
+            <a:ext cx="457200" cy="457200"/>
+          </a:xfrm>
+          <a:prstGeom prst="ellipse">
+            <a:avLst/>
+          </a:prstGeom>
+          <a:noFill/>
+          <a:ln w="27940">
+            <a:solidFill>
+              <a:srgbClr val="D94261"/>
+            </a:solidFill>
+          </a:ln>
+        </p:spPr>
+        <p:style>
+          <a:lnRef idx="1">
+            <a:schemeClr val="accent1"/>
+          </a:lnRef>
+          <a:fillRef idx="3">
+            <a:schemeClr val="accent1"/>
+          </a:fillRef>
+          <a:effectRef idx="2">
+            <a:schemeClr val="accent1"/>
+          </a:effectRef>
+          <a:fontRef idx="minor">
+            <a:schemeClr val="lt1"/>
+          </a:fontRef>
+        </p:style>
+        <p:txBody>
+          <a:bodyPr rtlCol="0" anchor="ctr"/>
+          <a:lstStyle/>
+          <a:p>
+            <a:pPr algn="ctr"/>
+          </a:p>
+        </p:txBody>
+      </p:sp>
+      <p:sp>
+        <p:nvSpPr>
+          <p:cNvPr id="16" name="Oval 15"/>
+          <p:cNvSpPr/>
+          <p:nvPr/>
+        </p:nvSpPr>
+        <p:spPr>
+          <a:xfrm>
+            <a:off x="2276856" y="5582960"/>
+            <a:ext cx="329184" cy="329184"/>
+          </a:xfrm>
+          <a:prstGeom prst="ellipse">
+            <a:avLst/>
+          </a:prstGeom>
+          <a:solidFill>
+            <a:srgbClr val="D94261"/>
+          </a:solidFill>
+          <a:ln>
+            <a:noFill/>
+          </a:ln>
+        </p:spPr>
+        <p:style>
+          <a:lnRef idx="1">
+            <a:schemeClr val="accent1"/>
+          </a:lnRef>
+          <a:fillRef idx="3">
+            <a:schemeClr val="accent1"/>
+          </a:fillRef>
+          <a:effectRef idx="2">
+            <a:schemeClr val="accent1"/>
+          </a:effectRef>
+          <a:fontRef idx="minor">
+            <a:schemeClr val="lt1"/>
+          </a:fontRef>
+        </p:style>
+        <p:txBody>
+          <a:bodyPr rtlCol="0" anchor="ctr" lIns="0" rIns="0" tIns="0" bIns="0"/>
+          <a:lstStyle/>
+          <a:p>
+            <a:pPr algn="ctr"/>
+            <a:r>
+              <a:rPr sz="1200" b="1">
+                <a:solidFill>
+                  <a:srgbClr val="FFFFFF"/>
+                </a:solidFill>
+                <a:latin typeface="Arial"/>
+              </a:rPr>
+              <a:t>3</a:t>
+            </a:r>
+          </a:p>
+        </p:txBody>
+      </p:sp>
+      <p:sp>
+        <p:nvSpPr>
+          <p:cNvPr id="17" name="Up Arrow 16"/>
+          <p:cNvSpPr/>
+          <p:nvPr/>
+        </p:nvSpPr>
+        <p:spPr>
+          <a:xfrm rot="18900000">
+            <a:off x="2532888" y="5857280"/>
+            <a:ext cx="256032" cy="365760"/>
+          </a:xfrm>
+          <a:prstGeom prst="upArrow">
+            <a:avLst/>
+          </a:prstGeom>
+          <a:solidFill>
+            <a:srgbClr val="FFFFFF"/>
+          </a:solidFill>
+          <a:ln w="17780">
+            <a:solidFill>
+              <a:srgbClr val="3B1F68"/>
+            </a:solidFill>
+          </a:ln>
+        </p:spPr>
+        <p:style>
+          <a:lnRef idx="1">
+            <a:schemeClr val="accent1"/>
+          </a:lnRef>
+          <a:fillRef idx="3">
+            <a:schemeClr val="accent1"/>
+          </a:fillRef>
+          <a:effectRef idx="2">
+            <a:schemeClr val="accent1"/>
+          </a:effectRef>
+          <a:fontRef idx="minor">
+            <a:schemeClr val="lt1"/>
+          </a:fontRef>
+        </p:style>
+        <p:txBody>
+          <a:bodyPr rtlCol="0" anchor="ctr"/>
+          <a:lstStyle/>
+          <a:p>
+            <a:pPr algn="ctr"/>
+          </a:p>
+        </p:txBody>
+      </p:sp>
+      <p:sp>
+        <p:nvSpPr>
+          <p:cNvPr id="18" name="Rectangle 17"/>
+          <p:cNvSpPr/>
+          <p:nvPr/>
+        </p:nvSpPr>
+        <p:spPr>
+          <a:xfrm>
+            <a:off x="4645152" y="2066543"/>
+            <a:ext cx="6949440" cy="420624"/>
+          </a:xfrm>
+          <a:prstGeom prst="rect">
+            <a:avLst/>
+          </a:prstGeom>
+          <a:solidFill>
+            <a:srgbClr val="3B1F68"/>
+          </a:solidFill>
+          <a:ln>
+            <a:noFill/>
+          </a:ln>
+        </p:spPr>
+        <p:style>
+          <a:lnRef idx="1">
+            <a:schemeClr val="accent1"/>
+          </a:lnRef>
+          <a:fillRef idx="3">
+            <a:schemeClr val="accent1"/>
+          </a:fillRef>
+          <a:effectRef idx="2">
+            <a:schemeClr val="accent1"/>
+          </a:effectRef>
+          <a:fontRef idx="minor">
+            <a:schemeClr val="lt1"/>
+          </a:fontRef>
+        </p:style>
+        <p:txBody>
+          <a:bodyPr rtlCol="0" anchor="ctr"/>
+          <a:lstStyle/>
+          <a:p>
+            <a:pPr algn="ctr"/>
+          </a:p>
+        </p:txBody>
+      </p:sp>
+      <p:sp>
+        <p:nvSpPr>
+          <p:cNvPr id="19" name="TextBox 18"/>
+          <p:cNvSpPr txBox="1"/>
+          <p:nvPr/>
+        </p:nvSpPr>
+        <p:spPr>
+          <a:xfrm>
+            <a:off x="4809744" y="2185416"/>
+            <a:ext cx="6620255" cy="164592"/>
+          </a:xfrm>
+          <a:prstGeom prst="rect">
+            <a:avLst/>
+          </a:prstGeom>
+          <a:noFill/>
+        </p:spPr>
+        <p:txBody>
+          <a:bodyPr wrap="square" anchor="t" lIns="0" rIns="0" tIns="0" bIns="0">
+            <a:spAutoFit/>
+          </a:bodyPr>
+          <a:lstStyle/>
+          <a:p>
+            <a:pPr algn="l">
+              <a:lnSpc>
+                <a:spcPct val="100000"/>
+              </a:lnSpc>
+              <a:spcBef>
+                <a:spcPts val="0"/>
+              </a:spcBef>
+              <a:spcAft>
+                <a:spcPts val="0"/>
+              </a:spcAft>
+            </a:pPr>
+            <a:r>
+              <a:rPr sz="950" b="1">
+                <a:solidFill>
+                  <a:srgbClr val="FFFFFF"/>
+                </a:solidFill>
+                <a:latin typeface="Arial"/>
+              </a:rPr>
+              <a:t>ШАГ 3 ИЗ 3</a:t>
+            </a:r>
+          </a:p>
+        </p:txBody>
+      </p:sp>
+      <p:sp>
+        <p:nvSpPr>
+          <p:cNvPr id="20" name="Rectangle 19"/>
+          <p:cNvSpPr/>
+          <p:nvPr/>
+        </p:nvSpPr>
+        <p:spPr>
+          <a:xfrm>
+            <a:off x="4645152" y="2596896"/>
+            <a:ext cx="6949440" cy="1499616"/>
+          </a:xfrm>
+          <a:prstGeom prst="rect">
+            <a:avLst/>
+          </a:prstGeom>
+          <a:solidFill>
+            <a:srgbClr val="FFFFFF"/>
+          </a:solidFill>
+          <a:ln w="10160">
+            <a:solidFill>
+              <a:srgbClr val="DED9E8"/>
+            </a:solidFill>
+          </a:ln>
+        </p:spPr>
+        <p:style>
+          <a:lnRef idx="1">
+            <a:schemeClr val="accent1"/>
+          </a:lnRef>
+          <a:fillRef idx="3">
+            <a:schemeClr val="accent1"/>
+          </a:fillRef>
+          <a:effectRef idx="2">
+            <a:schemeClr val="accent1"/>
+          </a:effectRef>
+          <a:fontRef idx="minor">
+            <a:schemeClr val="lt1"/>
+          </a:fontRef>
+        </p:style>
+        <p:txBody>
+          <a:bodyPr rtlCol="0" anchor="ctr"/>
+          <a:lstStyle/>
+          <a:p>
+            <a:pPr algn="ctr"/>
+          </a:p>
+        </p:txBody>
+      </p:sp>
+      <p:sp>
+        <p:nvSpPr>
+          <p:cNvPr id="21" name="Rectangle 20"/>
+          <p:cNvSpPr/>
+          <p:nvPr/>
+        </p:nvSpPr>
+        <p:spPr>
+          <a:xfrm>
+            <a:off x="4645152" y="2596896"/>
+            <a:ext cx="54864" cy="1499616"/>
+          </a:xfrm>
+          <a:prstGeom prst="rect">
+            <a:avLst/>
+          </a:prstGeom>
+          <a:solidFill>
+            <a:srgbClr val="D94261"/>
+          </a:solidFill>
+          <a:ln>
+            <a:noFill/>
+          </a:ln>
+        </p:spPr>
+        <p:style>
+          <a:lnRef idx="1">
+            <a:schemeClr val="accent1"/>
+          </a:lnRef>
+          <a:fillRef idx="3">
+            <a:schemeClr val="accent1"/>
+          </a:fillRef>
+          <a:effectRef idx="2">
+            <a:schemeClr val="accent1"/>
+          </a:effectRef>
+          <a:fontRef idx="minor">
+            <a:schemeClr val="lt1"/>
+          </a:fontRef>
+        </p:style>
+        <p:txBody>
+          <a:bodyPr rtlCol="0" anchor="ctr"/>
+          <a:lstStyle/>
+          <a:p>
+            <a:pPr algn="ctr"/>
+          </a:p>
+        </p:txBody>
+      </p:sp>
+      <p:sp>
+        <p:nvSpPr>
+          <p:cNvPr id="22" name="Rounded Rectangle 21"/>
+          <p:cNvSpPr/>
+          <p:nvPr/>
+        </p:nvSpPr>
+        <p:spPr>
+          <a:xfrm>
+            <a:off x="4809744" y="2734056"/>
+            <a:ext cx="310896" cy="310896"/>
+          </a:xfrm>
+          <a:prstGeom prst="roundRect">
+            <a:avLst/>
+          </a:prstGeom>
+          <a:solidFill>
+            <a:srgbClr val="D94261"/>
+          </a:solidFill>
+          <a:ln>
+            <a:noFill/>
+          </a:ln>
+        </p:spPr>
+        <p:style>
+          <a:lnRef idx="1">
+            <a:schemeClr val="accent1"/>
+          </a:lnRef>
+          <a:fillRef idx="3">
+            <a:schemeClr val="accent1"/>
+          </a:fillRef>
+          <a:effectRef idx="2">
+            <a:schemeClr val="accent1"/>
+          </a:effectRef>
+          <a:fontRef idx="minor">
+            <a:schemeClr val="lt1"/>
+          </a:fontRef>
+        </p:style>
+        <p:txBody>
+          <a:bodyPr rtlCol="0" anchor="ctr"/>
+          <a:lstStyle/>
+          <a:p>
+            <a:pPr algn="ctr"/>
+          </a:p>
+        </p:txBody>
+      </p:sp>
+      <p:sp>
+        <p:nvSpPr>
+          <p:cNvPr id="23" name="TextBox 22"/>
+          <p:cNvSpPr txBox="1"/>
+          <p:nvPr/>
+        </p:nvSpPr>
+        <p:spPr>
+          <a:xfrm>
+            <a:off x="4809744" y="2743200"/>
+            <a:ext cx="310896" cy="256032"/>
+          </a:xfrm>
+          <a:prstGeom prst="rect">
+            <a:avLst/>
+          </a:prstGeom>
+          <a:noFill/>
+        </p:spPr>
+        <p:txBody>
+          <a:bodyPr wrap="square" anchor="ctr" lIns="0" rIns="0" tIns="0" bIns="0">
+            <a:spAutoFit/>
+          </a:bodyPr>
+          <a:lstStyle/>
+          <a:p>
+            <a:pPr algn="ctr">
+              <a:lnSpc>
+                <a:spcPct val="100000"/>
+              </a:lnSpc>
+              <a:spcBef>
+                <a:spcPts val="0"/>
+              </a:spcBef>
+              <a:spcAft>
+                <a:spcPts val="0"/>
+              </a:spcAft>
+            </a:pPr>
+            <a:r>
+              <a:rPr sz="1100" b="1">
+                <a:solidFill>
+                  <a:srgbClr val="FFFFFF"/>
+                </a:solidFill>
+                <a:latin typeface="Arial"/>
+              </a:rPr>
+              <a:t>3</a:t>
+            </a:r>
+          </a:p>
+        </p:txBody>
+      </p:sp>
+      <p:sp>
+        <p:nvSpPr>
+          <p:cNvPr id="24" name="TextBox 23"/>
+          <p:cNvSpPr txBox="1"/>
+          <p:nvPr/>
+        </p:nvSpPr>
+        <p:spPr>
+          <a:xfrm>
+            <a:off x="5230368" y="2688336"/>
+            <a:ext cx="6217920" cy="310896"/>
+          </a:xfrm>
+          <a:prstGeom prst="rect">
+            <a:avLst/>
+          </a:prstGeom>
+          <a:noFill/>
+        </p:spPr>
+        <p:txBody>
+          <a:bodyPr wrap="square" anchor="t" lIns="0" rIns="0" tIns="0" bIns="0">
+            <a:spAutoFit/>
+          </a:bodyPr>
+          <a:lstStyle/>
+          <a:p>
+            <a:pPr algn="l">
+              <a:lnSpc>
+                <a:spcPct val="100000"/>
+              </a:lnSpc>
+              <a:spcBef>
+                <a:spcPts val="0"/>
+              </a:spcBef>
+              <a:spcAft>
+                <a:spcPts val="0"/>
+              </a:spcAft>
+            </a:pPr>
+            <a:r>
+              <a:rPr sz="1180" b="1">
+                <a:solidFill>
+                  <a:srgbClr val="21172F"/>
+                </a:solidFill>
+                <a:latin typeface="Arial"/>
+              </a:rPr>
+              <a:t>Проверьте выдачу</a:t>
+            </a:r>
+          </a:p>
+        </p:txBody>
+      </p:sp>
+      <p:sp>
+        <p:nvSpPr>
+          <p:cNvPr id="25" name="TextBox 24"/>
+          <p:cNvSpPr txBox="1"/>
+          <p:nvPr/>
+        </p:nvSpPr>
+        <p:spPr>
+          <a:xfrm>
+            <a:off x="5230368" y="3008376"/>
+            <a:ext cx="6217920" cy="1033271"/>
+          </a:xfrm>
+          <a:prstGeom prst="rect">
+            <a:avLst/>
+          </a:prstGeom>
+          <a:noFill/>
+        </p:spPr>
+        <p:txBody>
+          <a:bodyPr wrap="square" anchor="t" lIns="0" rIns="0" tIns="0" bIns="0">
+            <a:spAutoFit/>
+          </a:bodyPr>
+          <a:lstStyle/>
+          <a:p>
+            <a:pPr algn="l">
+              <a:lnSpc>
+                <a:spcPct val="100000"/>
+              </a:lnSpc>
+              <a:spcBef>
+                <a:spcPts val="0"/>
+              </a:spcBef>
+              <a:spcAft>
+                <a:spcPts val="0"/>
+              </a:spcAft>
+            </a:pPr>
+            <a:r>
+              <a:rPr sz="1000" b="0">
+                <a:solidFill>
+                  <a:srgbClr val="6E687D"/>
+                </a:solidFill>
+                <a:latin typeface="Arial"/>
+              </a:rPr>
+              <a:t>История подтверждает автоматическую выдачу.</a:t>
+            </a:r>
+          </a:p>
+        </p:txBody>
+      </p:sp>
+      <p:sp>
+        <p:nvSpPr>
+          <p:cNvPr id="26" name="Rectangle 25"/>
+          <p:cNvSpPr/>
+          <p:nvPr/>
+        </p:nvSpPr>
+        <p:spPr>
+          <a:xfrm>
+            <a:off x="4645152" y="4315968"/>
+            <a:ext cx="6949440" cy="877824"/>
+          </a:xfrm>
+          <a:prstGeom prst="rect">
+            <a:avLst/>
+          </a:prstGeom>
+          <a:solidFill>
+            <a:srgbClr val="E1F6F3"/>
+          </a:solidFill>
+          <a:ln>
+            <a:noFill/>
+          </a:ln>
+        </p:spPr>
+        <p:style>
+          <a:lnRef idx="1">
+            <a:schemeClr val="accent1"/>
+          </a:lnRef>
+          <a:fillRef idx="3">
+            <a:schemeClr val="accent1"/>
+          </a:fillRef>
+          <a:effectRef idx="2">
+            <a:schemeClr val="accent1"/>
+          </a:effectRef>
+          <a:fontRef idx="minor">
+            <a:schemeClr val="lt1"/>
+          </a:fontRef>
+        </p:style>
+        <p:txBody>
+          <a:bodyPr rtlCol="0" anchor="ctr"/>
+          <a:lstStyle/>
+          <a:p>
+            <a:pPr algn="ctr"/>
+          </a:p>
+        </p:txBody>
+      </p:sp>
+      <p:sp>
+        <p:nvSpPr>
+          <p:cNvPr id="27" name="Rectangle 26"/>
+          <p:cNvSpPr/>
+          <p:nvPr/>
+        </p:nvSpPr>
+        <p:spPr>
+          <a:xfrm>
+            <a:off x="4645152" y="4315968"/>
+            <a:ext cx="54864" cy="877824"/>
+          </a:xfrm>
+          <a:prstGeom prst="rect">
+            <a:avLst/>
+          </a:prstGeom>
+          <a:solidFill>
+            <a:srgbClr val="149B91"/>
+          </a:solidFill>
+          <a:ln>
+            <a:noFill/>
+          </a:ln>
+        </p:spPr>
+        <p:style>
+          <a:lnRef idx="1">
+            <a:schemeClr val="accent1"/>
+          </a:lnRef>
+          <a:fillRef idx="3">
+            <a:schemeClr val="accent1"/>
+          </a:fillRef>
+          <a:effectRef idx="2">
+            <a:schemeClr val="accent1"/>
+          </a:effectRef>
+          <a:fontRef idx="minor">
+            <a:schemeClr val="lt1"/>
+          </a:fontRef>
+        </p:style>
+        <p:txBody>
+          <a:bodyPr rtlCol="0" anchor="ctr"/>
+          <a:lstStyle/>
+          <a:p>
+            <a:pPr algn="ctr"/>
+          </a:p>
+        </p:txBody>
+      </p:sp>
+      <p:sp>
+        <p:nvSpPr>
+          <p:cNvPr id="28" name="TextBox 27"/>
+          <p:cNvSpPr txBox="1"/>
+          <p:nvPr/>
+        </p:nvSpPr>
+        <p:spPr>
+          <a:xfrm>
+            <a:off x="4846320" y="4425696"/>
+            <a:ext cx="6620255" cy="219456"/>
+          </a:xfrm>
+          <a:prstGeom prst="rect">
+            <a:avLst/>
+          </a:prstGeom>
+          <a:noFill/>
+        </p:spPr>
+        <p:txBody>
+          <a:bodyPr wrap="square" anchor="t" lIns="0" rIns="0" tIns="0" bIns="0">
+            <a:spAutoFit/>
+          </a:bodyPr>
+          <a:lstStyle/>
+          <a:p>
+            <a:pPr algn="l">
+              <a:lnSpc>
+                <a:spcPct val="100000"/>
+              </a:lnSpc>
+              <a:spcBef>
+                <a:spcPts val="0"/>
+              </a:spcBef>
+              <a:spcAft>
+                <a:spcPts val="0"/>
+              </a:spcAft>
+            </a:pPr>
+            <a:r>
+              <a:rPr sz="1150" b="1">
+                <a:solidFill>
+                  <a:srgbClr val="21172F"/>
+                </a:solidFill>
+                <a:latin typeface="Arial"/>
+              </a:rPr>
+              <a:t>Проверка результата</a:t>
+            </a:r>
+          </a:p>
+        </p:txBody>
+      </p:sp>
+      <p:sp>
+        <p:nvSpPr>
+          <p:cNvPr id="29" name="TextBox 28"/>
+          <p:cNvSpPr txBox="1"/>
+          <p:nvPr/>
+        </p:nvSpPr>
+        <p:spPr>
+          <a:xfrm>
+            <a:off x="4846320" y="4681728"/>
+            <a:ext cx="6620255" cy="402336"/>
+          </a:xfrm>
+          <a:prstGeom prst="rect">
+            <a:avLst/>
+          </a:prstGeom>
+          <a:noFill/>
+        </p:spPr>
+        <p:txBody>
+          <a:bodyPr wrap="square" anchor="t" lIns="0" rIns="0" tIns="0" bIns="0">
+            <a:spAutoFit/>
+          </a:bodyPr>
+          <a:lstStyle/>
+          <a:p>
+            <a:pPr algn="l">
+              <a:lnSpc>
+                <a:spcPct val="100000"/>
+              </a:lnSpc>
+              <a:spcBef>
+                <a:spcPts val="0"/>
+              </a:spcBef>
+              <a:spcAft>
+                <a:spcPts val="0"/>
+              </a:spcAft>
+            </a:pPr>
+            <a:r>
+              <a:rPr sz="1000" b="0">
+                <a:solidFill>
+                  <a:srgbClr val="6E687D"/>
+                </a:solidFill>
+                <a:latin typeface="Arial"/>
+              </a:rPr>
+              <a:t>Один цифровой код выдается один раз и исключается из повторной продажи.</a:t>
+            </a:r>
+          </a:p>
+        </p:txBody>
+      </p:sp>
+      <p:sp>
+        <p:nvSpPr>
+          <p:cNvPr id="30" name="Rectangle 29"/>
+          <p:cNvSpPr/>
+          <p:nvPr/>
+        </p:nvSpPr>
+        <p:spPr>
+          <a:xfrm>
+            <a:off x="4645152" y="5413248"/>
+            <a:ext cx="6949440" cy="603504"/>
+          </a:xfrm>
+          <a:prstGeom prst="rect">
+            <a:avLst/>
+          </a:prstGeom>
+          <a:solidFill>
+            <a:srgbClr val="FFF5C9"/>
+          </a:solidFill>
+          <a:ln>
+            <a:noFill/>
+          </a:ln>
+        </p:spPr>
+        <p:style>
+          <a:lnRef idx="1">
+            <a:schemeClr val="accent1"/>
+          </a:lnRef>
+          <a:fillRef idx="3">
+            <a:schemeClr val="accent1"/>
+          </a:fillRef>
+          <a:effectRef idx="2">
+            <a:schemeClr val="accent1"/>
+          </a:effectRef>
+          <a:fontRef idx="minor">
+            <a:schemeClr val="lt1"/>
+          </a:fontRef>
+        </p:style>
+        <p:txBody>
+          <a:bodyPr rtlCol="0" anchor="ctr"/>
+          <a:lstStyle/>
+          <a:p>
+            <a:pPr algn="ctr"/>
+          </a:p>
+        </p:txBody>
+      </p:sp>
+      <p:sp>
+        <p:nvSpPr>
+          <p:cNvPr id="31" name="TextBox 30"/>
+          <p:cNvSpPr txBox="1"/>
+          <p:nvPr/>
+        </p:nvSpPr>
+        <p:spPr>
+          <a:xfrm>
+            <a:off x="4809744" y="5559552"/>
+            <a:ext cx="6620255" cy="292608"/>
+          </a:xfrm>
+          <a:prstGeom prst="rect">
+            <a:avLst/>
+          </a:prstGeom>
+          <a:noFill/>
+        </p:spPr>
+        <p:txBody>
+          <a:bodyPr wrap="square" anchor="t" lIns="0" rIns="0" tIns="0" bIns="0">
+            <a:spAutoFit/>
+          </a:bodyPr>
+          <a:lstStyle/>
+          <a:p>
+            <a:pPr algn="l">
+              <a:lnSpc>
+                <a:spcPct val="100000"/>
+              </a:lnSpc>
+              <a:spcBef>
+                <a:spcPts val="0"/>
+              </a:spcBef>
+              <a:spcAft>
+                <a:spcPts val="0"/>
+              </a:spcAft>
+            </a:pPr>
+            <a:r>
+              <a:rPr sz="919" b="0">
+                <a:solidFill>
+                  <a:srgbClr val="6E687D"/>
+                </a:solidFill>
+                <a:latin typeface="Arial"/>
+              </a:rPr>
+              <a:t>Курсор и номер показывают единственное действие этого кадра.</a:t>
+            </a:r>
+          </a:p>
+        </p:txBody>
+      </p:sp>
+      <p:sp>
+        <p:nvSpPr>
+          <p:cNvPr id="32" name="Rectangle 31"/>
+          <p:cNvSpPr/>
+          <p:nvPr/>
+        </p:nvSpPr>
+        <p:spPr>
+          <a:xfrm>
+            <a:off x="438912" y="6537960"/>
+            <a:ext cx="11247120" cy="9144"/>
+          </a:xfrm>
+          <a:prstGeom prst="rect">
+            <a:avLst/>
+          </a:prstGeom>
+          <a:solidFill>
+            <a:srgbClr val="DED9E8"/>
+          </a:solidFill>
+          <a:ln>
+            <a:noFill/>
+          </a:ln>
+        </p:spPr>
+        <p:style>
+          <a:lnRef idx="1">
+            <a:schemeClr val="accent1"/>
+          </a:lnRef>
+          <a:fillRef idx="3">
+            <a:schemeClr val="accent1"/>
+          </a:fillRef>
+          <a:effectRef idx="2">
+            <a:schemeClr val="accent1"/>
+          </a:effectRef>
+          <a:fontRef idx="minor">
+            <a:schemeClr val="lt1"/>
+          </a:fontRef>
+        </p:style>
+        <p:txBody>
+          <a:bodyPr rtlCol="0" anchor="ctr"/>
+          <a:lstStyle/>
+          <a:p>
+            <a:pPr algn="ctr"/>
+          </a:p>
+        </p:txBody>
+      </p:sp>
+      <p:sp>
+        <p:nvSpPr>
+          <p:cNvPr id="33" name="TextBox 32"/>
+          <p:cNvSpPr txBox="1"/>
+          <p:nvPr/>
+        </p:nvSpPr>
+        <p:spPr>
+          <a:xfrm>
+            <a:off x="438912" y="6601968"/>
+            <a:ext cx="7315200" cy="182880"/>
+          </a:xfrm>
+          <a:prstGeom prst="rect">
+            <a:avLst/>
+          </a:prstGeom>
+          <a:noFill/>
+        </p:spPr>
+        <p:txBody>
+          <a:bodyPr wrap="square" anchor="t" lIns="0" rIns="0" tIns="0" bIns="0">
+            <a:spAutoFit/>
+          </a:bodyPr>
+          <a:lstStyle/>
+          <a:p>
+            <a:pPr algn="l">
+              <a:lnSpc>
+                <a:spcPct val="100000"/>
+              </a:lnSpc>
+              <a:spcBef>
+                <a:spcPts val="0"/>
+              </a:spcBef>
+              <a:spcAft>
+                <a:spcPts val="0"/>
+              </a:spcAft>
+            </a:pPr>
+            <a:r>
+              <a:rPr sz="900" b="0">
+                <a:solidFill>
+                  <a:srgbClr val="6E687D"/>
+                </a:solidFill>
+                <a:latin typeface="Arial"/>
+              </a:rPr>
+              <a:t>Роль: Ученик · Algo MAX</a:t>
             </a:r>
           </a:p>
         </p:txBody>
@@ -30397,8 +33711,8 @@
         </p:blipFill>
         <p:spPr>
           <a:xfrm>
-            <a:off x="1571034" y="2432303"/>
-            <a:ext cx="1740826" cy="3767327"/>
+            <a:off x="1741134" y="2432303"/>
+            <a:ext cx="1400627" cy="3767327"/>
           </a:xfrm>
           <a:prstGeom prst="rect">
             <a:avLst/>
@@ -31247,6 +34561,985 @@
                 <a:latin typeface="Arial"/>
               </a:rPr>
               <a:t>Роль: Ученик · Algo MAX</a:t>
+            </a:r>
+          </a:p>
+        </p:txBody>
+      </p:sp>
+    </p:spTree>
+  </p:cSld>
+  <p:clrMapOvr>
+    <a:masterClrMapping/>
+  </p:clrMapOvr>
+</p:sld>
+</file>
+
+<file path=ppt/slides/slide30.xml><?xml version="1.0" encoding="utf-8"?>
+<p:sld xmlns:a="http://schemas.openxmlformats.org/drawingml/2006/main" xmlns:p="http://schemas.openxmlformats.org/presentationml/2006/main" xmlns:r="http://schemas.openxmlformats.org/officeDocument/2006/relationships">
+  <p:cSld>
+    <p:bg>
+      <p:bgPr>
+        <a:solidFill>
+          <a:srgbClr val="FFFFFF"/>
+        </a:solidFill>
+        <a:effectLst/>
+      </p:bgPr>
+    </p:bg>
+    <p:spTree>
+      <p:nvGrpSpPr>
+        <p:cNvPr id="1" name=""/>
+        <p:cNvGrpSpPr/>
+        <p:nvPr/>
+      </p:nvGrpSpPr>
+      <p:grpSpPr/>
+      <p:sp>
+        <p:nvSpPr>
+          <p:cNvPr id="2" name="Rectangle 1"/>
+          <p:cNvSpPr/>
+          <p:nvPr/>
+        </p:nvSpPr>
+        <p:spPr>
+          <a:xfrm>
+            <a:off x="0" y="0"/>
+            <a:ext cx="4224528" cy="6858000"/>
+          </a:xfrm>
+          <a:prstGeom prst="rect">
+            <a:avLst/>
+          </a:prstGeom>
+          <a:solidFill>
+            <a:srgbClr val="3B1F68"/>
+          </a:solidFill>
+          <a:ln>
+            <a:noFill/>
+          </a:ln>
+        </p:spPr>
+        <p:style>
+          <a:lnRef idx="1">
+            <a:schemeClr val="accent1"/>
+          </a:lnRef>
+          <a:fillRef idx="3">
+            <a:schemeClr val="accent1"/>
+          </a:fillRef>
+          <a:effectRef idx="2">
+            <a:schemeClr val="accent1"/>
+          </a:effectRef>
+          <a:fontRef idx="minor">
+            <a:schemeClr val="lt1"/>
+          </a:fontRef>
+        </p:style>
+        <p:txBody>
+          <a:bodyPr rtlCol="0" anchor="ctr"/>
+          <a:lstStyle/>
+          <a:p>
+            <a:pPr algn="ctr"/>
+          </a:p>
+        </p:txBody>
+      </p:sp>
+      <p:sp>
+        <p:nvSpPr>
+          <p:cNvPr id="3" name="TextBox 2"/>
+          <p:cNvSpPr txBox="1"/>
+          <p:nvPr/>
+        </p:nvSpPr>
+        <p:spPr>
+          <a:xfrm>
+            <a:off x="566928" y="658368"/>
+            <a:ext cx="2194560" cy="310896"/>
+          </a:xfrm>
+          <a:prstGeom prst="rect">
+            <a:avLst/>
+          </a:prstGeom>
+          <a:noFill/>
+        </p:spPr>
+        <p:txBody>
+          <a:bodyPr wrap="square" anchor="t" lIns="0" rIns="0" tIns="0" bIns="0">
+            <a:spAutoFit/>
+          </a:bodyPr>
+          <a:lstStyle/>
+          <a:p>
+            <a:pPr algn="l">
+              <a:lnSpc>
+                <a:spcPct val="100000"/>
+              </a:lnSpc>
+              <a:spcBef>
+                <a:spcPts val="0"/>
+              </a:spcBef>
+              <a:spcAft>
+                <a:spcPts val="0"/>
+              </a:spcAft>
+            </a:pPr>
+            <a:r>
+              <a:rPr sz="1900" b="1">
+                <a:solidFill>
+                  <a:srgbClr val="FFFFFF"/>
+                </a:solidFill>
+                <a:latin typeface="Arial"/>
+              </a:rPr>
+              <a:t>ALGO MAX</a:t>
+            </a:r>
+          </a:p>
+        </p:txBody>
+      </p:sp>
+      <p:sp>
+        <p:nvSpPr>
+          <p:cNvPr id="4" name="TextBox 3"/>
+          <p:cNvSpPr txBox="1"/>
+          <p:nvPr/>
+        </p:nvSpPr>
+        <p:spPr>
+          <a:xfrm>
+            <a:off x="566928" y="1481328"/>
+            <a:ext cx="3401568" cy="1600200"/>
+          </a:xfrm>
+          <a:prstGeom prst="rect">
+            <a:avLst/>
+          </a:prstGeom>
+          <a:noFill/>
+        </p:spPr>
+        <p:txBody>
+          <a:bodyPr wrap="square" anchor="t" lIns="0" rIns="0" tIns="0" bIns="0">
+            <a:spAutoFit/>
+          </a:bodyPr>
+          <a:lstStyle/>
+          <a:p>
+            <a:pPr algn="l">
+              <a:lnSpc>
+                <a:spcPct val="100000"/>
+              </a:lnSpc>
+              <a:spcBef>
+                <a:spcPts val="0"/>
+              </a:spcBef>
+              <a:spcAft>
+                <a:spcPts val="0"/>
+              </a:spcAft>
+            </a:pPr>
+            <a:r>
+              <a:rPr sz="3000" b="1">
+                <a:solidFill>
+                  <a:srgbClr val="FFFFFF"/>
+                </a:solidFill>
+                <a:latin typeface="Arial"/>
+              </a:rPr>
+              <a:t>Роль</a:t>
+            </a:r>
+            <a:br/>
+            <a:r>
+              <a:rPr sz="3000" b="1">
+                <a:solidFill>
+                  <a:srgbClr val="FFFFFF"/>
+                </a:solidFill>
+                <a:latin typeface="Arial"/>
+              </a:rPr>
+              <a:t>«Ученик»</a:t>
+            </a:r>
+            <a:br/>
+            <a:r>
+              <a:rPr sz="3000" b="1">
+                <a:solidFill>
+                  <a:srgbClr val="FFFFFF"/>
+                </a:solidFill>
+                <a:latin typeface="Arial"/>
+              </a:rPr>
+              <a:t>готова к работе</a:t>
+            </a:r>
+          </a:p>
+        </p:txBody>
+      </p:sp>
+      <p:sp>
+        <p:nvSpPr>
+          <p:cNvPr id="5" name="TextBox 4"/>
+          <p:cNvSpPr txBox="1"/>
+          <p:nvPr/>
+        </p:nvSpPr>
+        <p:spPr>
+          <a:xfrm>
+            <a:off x="566928" y="5413248"/>
+            <a:ext cx="3072384" cy="502920"/>
+          </a:xfrm>
+          <a:prstGeom prst="rect">
+            <a:avLst/>
+          </a:prstGeom>
+          <a:noFill/>
+        </p:spPr>
+        <p:txBody>
+          <a:bodyPr wrap="square" anchor="t" lIns="0" rIns="0" tIns="0" bIns="0">
+            <a:spAutoFit/>
+          </a:bodyPr>
+          <a:lstStyle/>
+          <a:p>
+            <a:pPr algn="l">
+              <a:lnSpc>
+                <a:spcPct val="100000"/>
+              </a:lnSpc>
+              <a:spcBef>
+                <a:spcPts val="0"/>
+              </a:spcBef>
+              <a:spcAft>
+                <a:spcPts val="0"/>
+              </a:spcAft>
+            </a:pPr>
+            <a:r>
+              <a:rPr sz="1300" b="0">
+                <a:solidFill>
+                  <a:srgbClr val="D9C8F5"/>
+                </a:solidFill>
+                <a:latin typeface="Arial"/>
+              </a:rPr>
+              <a:t>Руководство по роли завершено</a:t>
+            </a:r>
+          </a:p>
+        </p:txBody>
+      </p:sp>
+      <p:sp>
+        <p:nvSpPr>
+          <p:cNvPr id="6" name="TextBox 5"/>
+          <p:cNvSpPr txBox="1"/>
+          <p:nvPr/>
+        </p:nvSpPr>
+        <p:spPr>
+          <a:xfrm>
+            <a:off x="4828032" y="987552"/>
+            <a:ext cx="6172200" cy="411480"/>
+          </a:xfrm>
+          <a:prstGeom prst="rect">
+            <a:avLst/>
+          </a:prstGeom>
+          <a:noFill/>
+        </p:spPr>
+        <p:txBody>
+          <a:bodyPr wrap="square" anchor="t" lIns="0" rIns="0" tIns="0" bIns="0">
+            <a:spAutoFit/>
+          </a:bodyPr>
+          <a:lstStyle/>
+          <a:p>
+            <a:pPr algn="l">
+              <a:lnSpc>
+                <a:spcPct val="100000"/>
+              </a:lnSpc>
+              <a:spcBef>
+                <a:spcPts val="0"/>
+              </a:spcBef>
+              <a:spcAft>
+                <a:spcPts val="0"/>
+              </a:spcAft>
+            </a:pPr>
+            <a:r>
+              <a:rPr sz="2300" b="1">
+                <a:solidFill>
+                  <a:srgbClr val="21172F"/>
+                </a:solidFill>
+                <a:latin typeface="Arial"/>
+              </a:rPr>
+              <a:t>Что проверить после просмотра</a:t>
+            </a:r>
+          </a:p>
+        </p:txBody>
+      </p:sp>
+      <p:sp>
+        <p:nvSpPr>
+          <p:cNvPr id="7" name="Rounded Rectangle 6"/>
+          <p:cNvSpPr/>
+          <p:nvPr/>
+        </p:nvSpPr>
+        <p:spPr>
+          <a:xfrm>
+            <a:off x="4846320" y="1719072"/>
+            <a:ext cx="365760" cy="365760"/>
+          </a:xfrm>
+          <a:prstGeom prst="roundRect">
+            <a:avLst/>
+          </a:prstGeom>
+          <a:solidFill>
+            <a:srgbClr val="FFD43B"/>
+          </a:solidFill>
+          <a:ln>
+            <a:noFill/>
+          </a:ln>
+        </p:spPr>
+        <p:style>
+          <a:lnRef idx="1">
+            <a:schemeClr val="accent1"/>
+          </a:lnRef>
+          <a:fillRef idx="3">
+            <a:schemeClr val="accent1"/>
+          </a:fillRef>
+          <a:effectRef idx="2">
+            <a:schemeClr val="accent1"/>
+          </a:effectRef>
+          <a:fontRef idx="minor">
+            <a:schemeClr val="lt1"/>
+          </a:fontRef>
+        </p:style>
+        <p:txBody>
+          <a:bodyPr rtlCol="0" anchor="ctr"/>
+          <a:lstStyle/>
+          <a:p>
+            <a:pPr algn="ctr"/>
+          </a:p>
+        </p:txBody>
+      </p:sp>
+      <p:sp>
+        <p:nvSpPr>
+          <p:cNvPr id="8" name="TextBox 7"/>
+          <p:cNvSpPr txBox="1"/>
+          <p:nvPr/>
+        </p:nvSpPr>
+        <p:spPr>
+          <a:xfrm>
+            <a:off x="4846320" y="1728216"/>
+            <a:ext cx="365760" cy="329184"/>
+          </a:xfrm>
+          <a:prstGeom prst="rect">
+            <a:avLst/>
+          </a:prstGeom>
+          <a:noFill/>
+        </p:spPr>
+        <p:txBody>
+          <a:bodyPr wrap="square" anchor="ctr" lIns="0" rIns="0" tIns="0" bIns="0">
+            <a:spAutoFit/>
+          </a:bodyPr>
+          <a:lstStyle/>
+          <a:p>
+            <a:pPr algn="ctr">
+              <a:lnSpc>
+                <a:spcPct val="100000"/>
+              </a:lnSpc>
+              <a:spcBef>
+                <a:spcPts val="0"/>
+              </a:spcBef>
+              <a:spcAft>
+                <a:spcPts val="0"/>
+              </a:spcAft>
+            </a:pPr>
+            <a:r>
+              <a:rPr sz="1500" b="1">
+                <a:solidFill>
+                  <a:srgbClr val="21172F"/>
+                </a:solidFill>
+                <a:latin typeface="Arial"/>
+              </a:rPr>
+              <a:t>1</a:t>
+            </a:r>
+          </a:p>
+        </p:txBody>
+      </p:sp>
+      <p:sp>
+        <p:nvSpPr>
+          <p:cNvPr id="9" name="TextBox 8"/>
+          <p:cNvSpPr txBox="1"/>
+          <p:nvPr/>
+        </p:nvSpPr>
+        <p:spPr>
+          <a:xfrm>
+            <a:off x="5349240" y="1700784"/>
+            <a:ext cx="5623560" cy="274320"/>
+          </a:xfrm>
+          <a:prstGeom prst="rect">
+            <a:avLst/>
+          </a:prstGeom>
+          <a:noFill/>
+        </p:spPr>
+        <p:txBody>
+          <a:bodyPr wrap="square" anchor="t" lIns="0" rIns="0" tIns="0" bIns="0">
+            <a:spAutoFit/>
+          </a:bodyPr>
+          <a:lstStyle/>
+          <a:p>
+            <a:pPr algn="l">
+              <a:lnSpc>
+                <a:spcPct val="100000"/>
+              </a:lnSpc>
+              <a:spcBef>
+                <a:spcPts val="0"/>
+              </a:spcBef>
+              <a:spcAft>
+                <a:spcPts val="0"/>
+              </a:spcAft>
+            </a:pPr>
+            <a:r>
+              <a:rPr sz="1600" b="1">
+                <a:solidFill>
+                  <a:srgbClr val="21172F"/>
+                </a:solidFill>
+                <a:latin typeface="Arial"/>
+              </a:rPr>
+              <a:t>Проверить баланс</a:t>
+            </a:r>
+          </a:p>
+        </p:txBody>
+      </p:sp>
+      <p:sp>
+        <p:nvSpPr>
+          <p:cNvPr id="10" name="TextBox 9"/>
+          <p:cNvSpPr txBox="1"/>
+          <p:nvPr/>
+        </p:nvSpPr>
+        <p:spPr>
+          <a:xfrm>
+            <a:off x="5349240" y="1993391"/>
+            <a:ext cx="5623560" cy="438912"/>
+          </a:xfrm>
+          <a:prstGeom prst="rect">
+            <a:avLst/>
+          </a:prstGeom>
+          <a:noFill/>
+        </p:spPr>
+        <p:txBody>
+          <a:bodyPr wrap="square" anchor="t" lIns="0" rIns="0" tIns="0" bIns="0">
+            <a:spAutoFit/>
+          </a:bodyPr>
+          <a:lstStyle/>
+          <a:p>
+            <a:pPr algn="l">
+              <a:lnSpc>
+                <a:spcPct val="100000"/>
+              </a:lnSpc>
+              <a:spcBef>
+                <a:spcPts val="0"/>
+              </a:spcBef>
+              <a:spcAft>
+                <a:spcPts val="0"/>
+              </a:spcAft>
+            </a:pPr>
+            <a:r>
+              <a:rPr sz="1250" b="0">
+                <a:solidFill>
+                  <a:srgbClr val="6E687D"/>
+                </a:solidFill>
+                <a:latin typeface="Arial"/>
+              </a:rPr>
+              <a:t>Обновите главную и сверьте доступные AC.</a:t>
+            </a:r>
+          </a:p>
+        </p:txBody>
+      </p:sp>
+      <p:sp>
+        <p:nvSpPr>
+          <p:cNvPr id="11" name="Rounded Rectangle 10"/>
+          <p:cNvSpPr/>
+          <p:nvPr/>
+        </p:nvSpPr>
+        <p:spPr>
+          <a:xfrm>
+            <a:off x="4846320" y="2743200"/>
+            <a:ext cx="365760" cy="365760"/>
+          </a:xfrm>
+          <a:prstGeom prst="roundRect">
+            <a:avLst/>
+          </a:prstGeom>
+          <a:solidFill>
+            <a:srgbClr val="FFD43B"/>
+          </a:solidFill>
+          <a:ln>
+            <a:noFill/>
+          </a:ln>
+        </p:spPr>
+        <p:style>
+          <a:lnRef idx="1">
+            <a:schemeClr val="accent1"/>
+          </a:lnRef>
+          <a:fillRef idx="3">
+            <a:schemeClr val="accent1"/>
+          </a:fillRef>
+          <a:effectRef idx="2">
+            <a:schemeClr val="accent1"/>
+          </a:effectRef>
+          <a:fontRef idx="minor">
+            <a:schemeClr val="lt1"/>
+          </a:fontRef>
+        </p:style>
+        <p:txBody>
+          <a:bodyPr rtlCol="0" anchor="ctr"/>
+          <a:lstStyle/>
+          <a:p>
+            <a:pPr algn="ctr"/>
+          </a:p>
+        </p:txBody>
+      </p:sp>
+      <p:sp>
+        <p:nvSpPr>
+          <p:cNvPr id="12" name="TextBox 11"/>
+          <p:cNvSpPr txBox="1"/>
+          <p:nvPr/>
+        </p:nvSpPr>
+        <p:spPr>
+          <a:xfrm>
+            <a:off x="4846320" y="2752344"/>
+            <a:ext cx="365760" cy="329184"/>
+          </a:xfrm>
+          <a:prstGeom prst="rect">
+            <a:avLst/>
+          </a:prstGeom>
+          <a:noFill/>
+        </p:spPr>
+        <p:txBody>
+          <a:bodyPr wrap="square" anchor="ctr" lIns="0" rIns="0" tIns="0" bIns="0">
+            <a:spAutoFit/>
+          </a:bodyPr>
+          <a:lstStyle/>
+          <a:p>
+            <a:pPr algn="ctr">
+              <a:lnSpc>
+                <a:spcPct val="100000"/>
+              </a:lnSpc>
+              <a:spcBef>
+                <a:spcPts val="0"/>
+              </a:spcBef>
+              <a:spcAft>
+                <a:spcPts val="0"/>
+              </a:spcAft>
+            </a:pPr>
+            <a:r>
+              <a:rPr sz="1500" b="1">
+                <a:solidFill>
+                  <a:srgbClr val="21172F"/>
+                </a:solidFill>
+                <a:latin typeface="Arial"/>
+              </a:rPr>
+              <a:t>2</a:t>
+            </a:r>
+          </a:p>
+        </p:txBody>
+      </p:sp>
+      <p:sp>
+        <p:nvSpPr>
+          <p:cNvPr id="13" name="TextBox 12"/>
+          <p:cNvSpPr txBox="1"/>
+          <p:nvPr/>
+        </p:nvSpPr>
+        <p:spPr>
+          <a:xfrm>
+            <a:off x="5349240" y="2724912"/>
+            <a:ext cx="5623560" cy="274320"/>
+          </a:xfrm>
+          <a:prstGeom prst="rect">
+            <a:avLst/>
+          </a:prstGeom>
+          <a:noFill/>
+        </p:spPr>
+        <p:txBody>
+          <a:bodyPr wrap="square" anchor="t" lIns="0" rIns="0" tIns="0" bIns="0">
+            <a:spAutoFit/>
+          </a:bodyPr>
+          <a:lstStyle/>
+          <a:p>
+            <a:pPr algn="l">
+              <a:lnSpc>
+                <a:spcPct val="100000"/>
+              </a:lnSpc>
+              <a:spcBef>
+                <a:spcPts val="0"/>
+              </a:spcBef>
+              <a:spcAft>
+                <a:spcPts val="0"/>
+              </a:spcAft>
+            </a:pPr>
+            <a:r>
+              <a:rPr sz="1600" b="1">
+                <a:solidFill>
+                  <a:srgbClr val="21172F"/>
+                </a:solidFill>
+                <a:latin typeface="Arial"/>
+              </a:rPr>
+              <a:t>Выбрать награду</a:t>
+            </a:r>
+          </a:p>
+        </p:txBody>
+      </p:sp>
+      <p:sp>
+        <p:nvSpPr>
+          <p:cNvPr id="14" name="TextBox 13"/>
+          <p:cNvSpPr txBox="1"/>
+          <p:nvPr/>
+        </p:nvSpPr>
+        <p:spPr>
+          <a:xfrm>
+            <a:off x="5349240" y="3017520"/>
+            <a:ext cx="5623560" cy="438912"/>
+          </a:xfrm>
+          <a:prstGeom prst="rect">
+            <a:avLst/>
+          </a:prstGeom>
+          <a:noFill/>
+        </p:spPr>
+        <p:txBody>
+          <a:bodyPr wrap="square" anchor="t" lIns="0" rIns="0" tIns="0" bIns="0">
+            <a:spAutoFit/>
+          </a:bodyPr>
+          <a:lstStyle/>
+          <a:p>
+            <a:pPr algn="l">
+              <a:lnSpc>
+                <a:spcPct val="100000"/>
+              </a:lnSpc>
+              <a:spcBef>
+                <a:spcPts val="0"/>
+              </a:spcBef>
+              <a:spcAft>
+                <a:spcPts val="0"/>
+              </a:spcAft>
+            </a:pPr>
+            <a:r>
+              <a:rPr sz="1250" b="0">
+                <a:solidFill>
+                  <a:srgbClr val="6E687D"/>
+                </a:solidFill>
+                <a:latin typeface="Arial"/>
+              </a:rPr>
+              <a:t>Откройте магазин и добавьте доступный товар.</a:t>
+            </a:r>
+          </a:p>
+        </p:txBody>
+      </p:sp>
+      <p:sp>
+        <p:nvSpPr>
+          <p:cNvPr id="15" name="Rounded Rectangle 14"/>
+          <p:cNvSpPr/>
+          <p:nvPr/>
+        </p:nvSpPr>
+        <p:spPr>
+          <a:xfrm>
+            <a:off x="4846320" y="3767328"/>
+            <a:ext cx="365760" cy="365760"/>
+          </a:xfrm>
+          <a:prstGeom prst="roundRect">
+            <a:avLst/>
+          </a:prstGeom>
+          <a:solidFill>
+            <a:srgbClr val="FFD43B"/>
+          </a:solidFill>
+          <a:ln>
+            <a:noFill/>
+          </a:ln>
+        </p:spPr>
+        <p:style>
+          <a:lnRef idx="1">
+            <a:schemeClr val="accent1"/>
+          </a:lnRef>
+          <a:fillRef idx="3">
+            <a:schemeClr val="accent1"/>
+          </a:fillRef>
+          <a:effectRef idx="2">
+            <a:schemeClr val="accent1"/>
+          </a:effectRef>
+          <a:fontRef idx="minor">
+            <a:schemeClr val="lt1"/>
+          </a:fontRef>
+        </p:style>
+        <p:txBody>
+          <a:bodyPr rtlCol="0" anchor="ctr"/>
+          <a:lstStyle/>
+          <a:p>
+            <a:pPr algn="ctr"/>
+          </a:p>
+        </p:txBody>
+      </p:sp>
+      <p:sp>
+        <p:nvSpPr>
+          <p:cNvPr id="16" name="TextBox 15"/>
+          <p:cNvSpPr txBox="1"/>
+          <p:nvPr/>
+        </p:nvSpPr>
+        <p:spPr>
+          <a:xfrm>
+            <a:off x="4846320" y="3776472"/>
+            <a:ext cx="365760" cy="329184"/>
+          </a:xfrm>
+          <a:prstGeom prst="rect">
+            <a:avLst/>
+          </a:prstGeom>
+          <a:noFill/>
+        </p:spPr>
+        <p:txBody>
+          <a:bodyPr wrap="square" anchor="ctr" lIns="0" rIns="0" tIns="0" bIns="0">
+            <a:spAutoFit/>
+          </a:bodyPr>
+          <a:lstStyle/>
+          <a:p>
+            <a:pPr algn="ctr">
+              <a:lnSpc>
+                <a:spcPct val="100000"/>
+              </a:lnSpc>
+              <a:spcBef>
+                <a:spcPts val="0"/>
+              </a:spcBef>
+              <a:spcAft>
+                <a:spcPts val="0"/>
+              </a:spcAft>
+            </a:pPr>
+            <a:r>
+              <a:rPr sz="1500" b="1">
+                <a:solidFill>
+                  <a:srgbClr val="21172F"/>
+                </a:solidFill>
+                <a:latin typeface="Arial"/>
+              </a:rPr>
+              <a:t>3</a:t>
+            </a:r>
+          </a:p>
+        </p:txBody>
+      </p:sp>
+      <p:sp>
+        <p:nvSpPr>
+          <p:cNvPr id="17" name="TextBox 16"/>
+          <p:cNvSpPr txBox="1"/>
+          <p:nvPr/>
+        </p:nvSpPr>
+        <p:spPr>
+          <a:xfrm>
+            <a:off x="5349240" y="3749040"/>
+            <a:ext cx="5623560" cy="274320"/>
+          </a:xfrm>
+          <a:prstGeom prst="rect">
+            <a:avLst/>
+          </a:prstGeom>
+          <a:noFill/>
+        </p:spPr>
+        <p:txBody>
+          <a:bodyPr wrap="square" anchor="t" lIns="0" rIns="0" tIns="0" bIns="0">
+            <a:spAutoFit/>
+          </a:bodyPr>
+          <a:lstStyle/>
+          <a:p>
+            <a:pPr algn="l">
+              <a:lnSpc>
+                <a:spcPct val="100000"/>
+              </a:lnSpc>
+              <a:spcBef>
+                <a:spcPts val="0"/>
+              </a:spcBef>
+              <a:spcAft>
+                <a:spcPts val="0"/>
+              </a:spcAft>
+            </a:pPr>
+            <a:r>
+              <a:rPr sz="1600" b="1">
+                <a:solidFill>
+                  <a:srgbClr val="21172F"/>
+                </a:solidFill>
+                <a:latin typeface="Arial"/>
+              </a:rPr>
+              <a:t>Найти заказ</a:t>
+            </a:r>
+          </a:p>
+        </p:txBody>
+      </p:sp>
+      <p:sp>
+        <p:nvSpPr>
+          <p:cNvPr id="18" name="TextBox 17"/>
+          <p:cNvSpPr txBox="1"/>
+          <p:nvPr/>
+        </p:nvSpPr>
+        <p:spPr>
+          <a:xfrm>
+            <a:off x="5349240" y="4041648"/>
+            <a:ext cx="5623560" cy="438912"/>
+          </a:xfrm>
+          <a:prstGeom prst="rect">
+            <a:avLst/>
+          </a:prstGeom>
+          <a:noFill/>
+        </p:spPr>
+        <p:txBody>
+          <a:bodyPr wrap="square" anchor="t" lIns="0" rIns="0" tIns="0" bIns="0">
+            <a:spAutoFit/>
+          </a:bodyPr>
+          <a:lstStyle/>
+          <a:p>
+            <a:pPr algn="l">
+              <a:lnSpc>
+                <a:spcPct val="100000"/>
+              </a:lnSpc>
+              <a:spcBef>
+                <a:spcPts val="0"/>
+              </a:spcBef>
+              <a:spcAft>
+                <a:spcPts val="0"/>
+              </a:spcAft>
+            </a:pPr>
+            <a:r>
+              <a:rPr sz="1250" b="0">
+                <a:solidFill>
+                  <a:srgbClr val="6E687D"/>
+                </a:solidFill>
+                <a:latin typeface="Arial"/>
+              </a:rPr>
+              <a:t>После покупки проверьте его состояние в заказах.</a:t>
+            </a:r>
+          </a:p>
+        </p:txBody>
+      </p:sp>
+      <p:sp>
+        <p:nvSpPr>
+          <p:cNvPr id="19" name="Rectangle 18"/>
+          <p:cNvSpPr/>
+          <p:nvPr/>
+        </p:nvSpPr>
+        <p:spPr>
+          <a:xfrm>
+            <a:off x="4828032" y="5230368"/>
+            <a:ext cx="6254496" cy="932688"/>
+          </a:xfrm>
+          <a:prstGeom prst="rect">
+            <a:avLst/>
+          </a:prstGeom>
+          <a:solidFill>
+            <a:srgbClr val="FFF5C9"/>
+          </a:solidFill>
+          <a:ln>
+            <a:noFill/>
+          </a:ln>
+        </p:spPr>
+        <p:style>
+          <a:lnRef idx="1">
+            <a:schemeClr val="accent1"/>
+          </a:lnRef>
+          <a:fillRef idx="3">
+            <a:schemeClr val="accent1"/>
+          </a:fillRef>
+          <a:effectRef idx="2">
+            <a:schemeClr val="accent1"/>
+          </a:effectRef>
+          <a:fontRef idx="minor">
+            <a:schemeClr val="lt1"/>
+          </a:fontRef>
+        </p:style>
+        <p:txBody>
+          <a:bodyPr rtlCol="0" anchor="ctr"/>
+          <a:lstStyle/>
+          <a:p>
+            <a:pPr algn="ctr"/>
+          </a:p>
+        </p:txBody>
+      </p:sp>
+      <p:sp>
+        <p:nvSpPr>
+          <p:cNvPr id="20" name="Rectangle 19"/>
+          <p:cNvSpPr/>
+          <p:nvPr/>
+        </p:nvSpPr>
+        <p:spPr>
+          <a:xfrm>
+            <a:off x="4828032" y="5230368"/>
+            <a:ext cx="54864" cy="932688"/>
+          </a:xfrm>
+          <a:prstGeom prst="rect">
+            <a:avLst/>
+          </a:prstGeom>
+          <a:solidFill>
+            <a:srgbClr val="FFD43B"/>
+          </a:solidFill>
+          <a:ln>
+            <a:noFill/>
+          </a:ln>
+        </p:spPr>
+        <p:style>
+          <a:lnRef idx="1">
+            <a:schemeClr val="accent1"/>
+          </a:lnRef>
+          <a:fillRef idx="3">
+            <a:schemeClr val="accent1"/>
+          </a:fillRef>
+          <a:effectRef idx="2">
+            <a:schemeClr val="accent1"/>
+          </a:effectRef>
+          <a:fontRef idx="minor">
+            <a:schemeClr val="lt1"/>
+          </a:fontRef>
+        </p:style>
+        <p:txBody>
+          <a:bodyPr rtlCol="0" anchor="ctr"/>
+          <a:lstStyle/>
+          <a:p>
+            <a:pPr algn="ctr"/>
+          </a:p>
+        </p:txBody>
+      </p:sp>
+      <p:sp>
+        <p:nvSpPr>
+          <p:cNvPr id="21" name="TextBox 20"/>
+          <p:cNvSpPr txBox="1"/>
+          <p:nvPr/>
+        </p:nvSpPr>
+        <p:spPr>
+          <a:xfrm>
+            <a:off x="5029200" y="5358383"/>
+            <a:ext cx="5925312" cy="237744"/>
+          </a:xfrm>
+          <a:prstGeom prst="rect">
+            <a:avLst/>
+          </a:prstGeom>
+          <a:noFill/>
+        </p:spPr>
+        <p:txBody>
+          <a:bodyPr wrap="square" anchor="t" lIns="0" rIns="0" tIns="0" bIns="0">
+            <a:spAutoFit/>
+          </a:bodyPr>
+          <a:lstStyle/>
+          <a:p>
+            <a:pPr algn="l">
+              <a:lnSpc>
+                <a:spcPct val="100000"/>
+              </a:lnSpc>
+              <a:spcBef>
+                <a:spcPts val="0"/>
+              </a:spcBef>
+              <a:spcAft>
+                <a:spcPts val="0"/>
+              </a:spcAft>
+            </a:pPr>
+            <a:r>
+              <a:rPr sz="1300" b="1">
+                <a:solidFill>
+                  <a:srgbClr val="21172F"/>
+                </a:solidFill>
+                <a:latin typeface="Arial"/>
+              </a:rPr>
+              <a:t>Следующий материал</a:t>
+            </a:r>
+          </a:p>
+        </p:txBody>
+      </p:sp>
+      <p:sp>
+        <p:nvSpPr>
+          <p:cNvPr id="22" name="TextBox 21"/>
+          <p:cNvSpPr txBox="1"/>
+          <p:nvPr/>
+        </p:nvSpPr>
+        <p:spPr>
+          <a:xfrm>
+            <a:off x="5029200" y="5650992"/>
+            <a:ext cx="5925312" cy="384048"/>
+          </a:xfrm>
+          <a:prstGeom prst="rect">
+            <a:avLst/>
+          </a:prstGeom>
+          <a:noFill/>
+        </p:spPr>
+        <p:txBody>
+          <a:bodyPr wrap="square" anchor="t" lIns="0" rIns="0" tIns="0" bIns="0">
+            <a:spAutoFit/>
+          </a:bodyPr>
+          <a:lstStyle/>
+          <a:p>
+            <a:pPr algn="l">
+              <a:lnSpc>
+                <a:spcPct val="100000"/>
+              </a:lnSpc>
+              <a:spcBef>
+                <a:spcPts val="0"/>
+              </a:spcBef>
+              <a:spcAft>
+                <a:spcPts val="0"/>
+              </a:spcAft>
+            </a:pPr>
+            <a:r>
+              <a:rPr sz="1150" b="0">
+                <a:solidFill>
+                  <a:srgbClr val="6E687D"/>
+                </a:solidFill>
+                <a:latin typeface="Arial"/>
+              </a:rPr>
+              <a:t>Для редких операций и спорных ситуаций используйте полное руководство по ролям.</a:t>
             </a:r>
           </a:p>
         </p:txBody>
@@ -31827,8 +36120,8 @@
         </p:blipFill>
         <p:spPr>
           <a:xfrm>
-            <a:off x="1571034" y="2432303"/>
-            <a:ext cx="1740826" cy="3767327"/>
+            <a:off x="1741134" y="2432303"/>
+            <a:ext cx="1400627" cy="3767327"/>
           </a:xfrm>
           <a:prstGeom prst="rect">
             <a:avLst/>
@@ -31843,7 +36136,7 @@
         </p:nvSpPr>
         <p:spPr>
           <a:xfrm>
-            <a:off x="2247664" y="5744992"/>
+            <a:off x="2240860" y="5744992"/>
             <a:ext cx="457200" cy="457200"/>
           </a:xfrm>
           <a:prstGeom prst="ellipse">
@@ -31886,7 +36179,7 @@
         </p:nvSpPr>
         <p:spPr>
           <a:xfrm>
-            <a:off x="2311672" y="5809000"/>
+            <a:off x="2304868" y="5809000"/>
             <a:ext cx="329184" cy="329184"/>
           </a:xfrm>
           <a:prstGeom prst="ellipse">
@@ -31938,7 +36231,7 @@
         </p:nvSpPr>
         <p:spPr>
           <a:xfrm rot="18900000">
-            <a:off x="2567704" y="6083320"/>
+            <a:off x="2560900" y="6083320"/>
             <a:ext cx="256032" cy="365760"/>
           </a:xfrm>
           <a:prstGeom prst="upArrow">
@@ -33257,8 +37550,8 @@
         </p:blipFill>
         <p:spPr>
           <a:xfrm>
-            <a:off x="1571034" y="2432303"/>
-            <a:ext cx="1740826" cy="3767327"/>
+            <a:off x="1981730" y="2432303"/>
+            <a:ext cx="919435" cy="3767327"/>
           </a:xfrm>
           <a:prstGeom prst="rect">
             <a:avLst/>
@@ -34687,8 +38980,8 @@
         </p:blipFill>
         <p:spPr>
           <a:xfrm>
-            <a:off x="1571034" y="2432303"/>
-            <a:ext cx="1740826" cy="3767327"/>
+            <a:off x="1981730" y="2432303"/>
+            <a:ext cx="919435" cy="3767327"/>
           </a:xfrm>
           <a:prstGeom prst="rect">
             <a:avLst/>
@@ -34703,7 +38996,7 @@
         </p:nvSpPr>
         <p:spPr>
           <a:xfrm>
-            <a:off x="2195439" y="3559942"/>
+            <a:off x="2203653" y="3559942"/>
             <a:ext cx="457200" cy="457200"/>
           </a:xfrm>
           <a:prstGeom prst="ellipse">
@@ -34746,7 +39039,7 @@
         </p:nvSpPr>
         <p:spPr>
           <a:xfrm>
-            <a:off x="2259447" y="3623950"/>
+            <a:off x="2267661" y="3623950"/>
             <a:ext cx="329184" cy="329184"/>
           </a:xfrm>
           <a:prstGeom prst="ellipse">
@@ -34798,7 +39091,7 @@
         </p:nvSpPr>
         <p:spPr>
           <a:xfrm rot="18900000">
-            <a:off x="2515479" y="3898270"/>
+            <a:off x="2523693" y="3898270"/>
             <a:ext cx="256032" cy="365760"/>
           </a:xfrm>
           <a:prstGeom prst="upArrow">
@@ -36117,8 +40410,8 @@
         </p:blipFill>
         <p:spPr>
           <a:xfrm>
-            <a:off x="1571034" y="2432303"/>
-            <a:ext cx="1740826" cy="3767327"/>
+            <a:off x="1981730" y="2432303"/>
+            <a:ext cx="919435" cy="3767327"/>
           </a:xfrm>
           <a:prstGeom prst="rect">
             <a:avLst/>
@@ -37215,7 +41508,7 @@
                 </a:solidFill>
                 <a:latin typeface="Arial"/>
               </a:rPr>
-              <a:t>Карточка товара</a:t>
+              <a:t>Выбор порядка товаров</a:t>
             </a:r>
           </a:p>
         </p:txBody>
@@ -37393,7 +41686,7 @@
                 </a:solidFill>
                 <a:latin typeface="Arial"/>
               </a:rPr>
-              <a:t>Магазин -&gt; Подробнее</a:t>
+              <a:t>Магазин -&gt; Сортировка</a:t>
             </a:r>
           </a:p>
         </p:txBody>
@@ -37406,8 +41699,8 @@
         </p:nvSpPr>
         <p:spPr>
           <a:xfrm>
-            <a:off x="530352" y="2066543"/>
-            <a:ext cx="3822191" cy="4206240"/>
+            <a:off x="438912" y="2066543"/>
+            <a:ext cx="8321040" cy="4206240"/>
           </a:xfrm>
           <a:prstGeom prst="rect">
             <a:avLst/>
@@ -37451,8 +41744,8 @@
         </p:nvSpPr>
         <p:spPr>
           <a:xfrm>
-            <a:off x="530352" y="2066543"/>
-            <a:ext cx="3822191" cy="292608"/>
+            <a:off x="438912" y="2066543"/>
+            <a:ext cx="8321040" cy="292608"/>
           </a:xfrm>
           <a:prstGeom prst="rect">
             <a:avLst/>
@@ -37494,8 +41787,8 @@
         </p:nvSpPr>
         <p:spPr>
           <a:xfrm>
-            <a:off x="658368" y="2121408"/>
-            <a:ext cx="3566159" cy="182880"/>
+            <a:off x="566928" y="2121408"/>
+            <a:ext cx="8065008" cy="182880"/>
           </a:xfrm>
           <a:prstGeom prst="rect">
             <a:avLst/>
@@ -37526,7 +41819,7 @@
                 </a:solidFill>
                 <a:latin typeface="Arial"/>
               </a:rPr>
-              <a:t>Экран на телефоне</a:t>
+              <a:t>Экран приложения</a:t>
             </a:r>
           </a:p>
         </p:txBody>
@@ -37547,8 +41840,8 @@
         </p:blipFill>
         <p:spPr>
           <a:xfrm>
-            <a:off x="1571034" y="2432303"/>
-            <a:ext cx="1740826" cy="3767327"/>
+            <a:off x="1585569" y="2432303"/>
+            <a:ext cx="6027724" cy="3767327"/>
           </a:xfrm>
           <a:prstGeom prst="rect">
             <a:avLst/>
@@ -37563,7 +41856,7 @@
         </p:nvSpPr>
         <p:spPr>
           <a:xfrm>
-            <a:off x="2212848" y="3258555"/>
+            <a:off x="5274990" y="3296229"/>
             <a:ext cx="457200" cy="457200"/>
           </a:xfrm>
           <a:prstGeom prst="ellipse">
@@ -37606,7 +41899,7 @@
         </p:nvSpPr>
         <p:spPr>
           <a:xfrm>
-            <a:off x="2276856" y="3322563"/>
+            <a:off x="5338998" y="3360237"/>
             <a:ext cx="329184" cy="329184"/>
           </a:xfrm>
           <a:prstGeom prst="ellipse">
@@ -37658,7 +41951,7 @@
         </p:nvSpPr>
         <p:spPr>
           <a:xfrm rot="18900000">
-            <a:off x="2532888" y="3596883"/>
+            <a:off x="5595030" y="3634557"/>
             <a:ext cx="256032" cy="365760"/>
           </a:xfrm>
           <a:prstGeom prst="upArrow">
@@ -37703,8 +41996,8 @@
         </p:nvSpPr>
         <p:spPr>
           <a:xfrm>
-            <a:off x="4645152" y="2066543"/>
-            <a:ext cx="6949440" cy="420624"/>
+            <a:off x="9015984" y="2066543"/>
+            <a:ext cx="2578608" cy="420624"/>
           </a:xfrm>
           <a:prstGeom prst="rect">
             <a:avLst/>
@@ -37746,8 +42039,8 @@
         </p:nvSpPr>
         <p:spPr>
           <a:xfrm>
-            <a:off x="4809744" y="2185416"/>
-            <a:ext cx="6620255" cy="164592"/>
+            <a:off x="9180576" y="2185416"/>
+            <a:ext cx="2249424" cy="164592"/>
           </a:xfrm>
           <a:prstGeom prst="rect">
             <a:avLst/>
@@ -37791,8 +42084,8 @@
         </p:nvSpPr>
         <p:spPr>
           <a:xfrm>
-            <a:off x="4645152" y="2596896"/>
-            <a:ext cx="6949440" cy="1499616"/>
+            <a:off x="9015984" y="2596896"/>
+            <a:ext cx="2578608" cy="1499616"/>
           </a:xfrm>
           <a:prstGeom prst="rect">
             <a:avLst/>
@@ -37836,7 +42129,7 @@
         </p:nvSpPr>
         <p:spPr>
           <a:xfrm>
-            <a:off x="4645152" y="2596896"/>
+            <a:off x="9015984" y="2596896"/>
             <a:ext cx="54864" cy="1499616"/>
           </a:xfrm>
           <a:prstGeom prst="rect">
@@ -37879,7 +42172,7 @@
         </p:nvSpPr>
         <p:spPr>
           <a:xfrm>
-            <a:off x="4809744" y="2734056"/>
+            <a:off x="9180576" y="2734056"/>
             <a:ext cx="310896" cy="310896"/>
           </a:xfrm>
           <a:prstGeom prst="roundRect">
@@ -37922,7 +42215,7 @@
         </p:nvSpPr>
         <p:spPr>
           <a:xfrm>
-            <a:off x="4809744" y="2743200"/>
+            <a:off x="9180576" y="2743200"/>
             <a:ext cx="310896" cy="256032"/>
           </a:xfrm>
           <a:prstGeom prst="rect">
@@ -37967,8 +42260,8 @@
         </p:nvSpPr>
         <p:spPr>
           <a:xfrm>
-            <a:off x="5230368" y="2688336"/>
-            <a:ext cx="6217920" cy="310896"/>
+            <a:off x="9601200" y="2688336"/>
+            <a:ext cx="1847087" cy="310896"/>
           </a:xfrm>
           <a:prstGeom prst="rect">
             <a:avLst/>
@@ -37999,7 +42292,7 @@
                 </a:solidFill>
                 <a:latin typeface="Arial"/>
               </a:rPr>
-              <a:t>Сверьте товар</a:t>
+              <a:t>Откройте меню</a:t>
             </a:r>
           </a:p>
         </p:txBody>
@@ -38012,8 +42305,8 @@
         </p:nvSpPr>
         <p:spPr>
           <a:xfrm>
-            <a:off x="5230368" y="3008376"/>
-            <a:ext cx="6217920" cy="1033271"/>
+            <a:off x="9601200" y="3008376"/>
+            <a:ext cx="1847087" cy="1033271"/>
           </a:xfrm>
           <a:prstGeom prst="rect">
             <a:avLst/>
@@ -38044,7 +42337,7 @@
                 </a:solidFill>
                 <a:latin typeface="Arial"/>
               </a:rPr>
-              <a:t>Проверьте название, описание, цену и тип выдачи.</a:t>
+              <a:t>Нажмите поле «Сортировка».</a:t>
             </a:r>
           </a:p>
         </p:txBody>
@@ -38057,8 +42350,8 @@
         </p:nvSpPr>
         <p:spPr>
           <a:xfrm>
-            <a:off x="4645152" y="4315968"/>
-            <a:ext cx="6949440" cy="877824"/>
+            <a:off x="9015984" y="4315968"/>
+            <a:ext cx="2578608" cy="877824"/>
           </a:xfrm>
           <a:prstGeom prst="rect">
             <a:avLst/>
@@ -38100,7 +42393,7 @@
         </p:nvSpPr>
         <p:spPr>
           <a:xfrm>
-            <a:off x="4645152" y="4315968"/>
+            <a:off x="9015984" y="4315968"/>
             <a:ext cx="54864" cy="877824"/>
           </a:xfrm>
           <a:prstGeom prst="rect">
@@ -38143,8 +42436,8 @@
         </p:nvSpPr>
         <p:spPr>
           <a:xfrm>
-            <a:off x="4846320" y="4425696"/>
-            <a:ext cx="6620255" cy="219456"/>
+            <a:off x="9217152" y="4425696"/>
+            <a:ext cx="2249424" cy="219456"/>
           </a:xfrm>
           <a:prstGeom prst="rect">
             <a:avLst/>
@@ -38188,8 +42481,8 @@
         </p:nvSpPr>
         <p:spPr>
           <a:xfrm>
-            <a:off x="4846320" y="4681728"/>
-            <a:ext cx="6620255" cy="402336"/>
+            <a:off x="9217152" y="4681728"/>
+            <a:ext cx="2249424" cy="402336"/>
           </a:xfrm>
           <a:prstGeom prst="rect">
             <a:avLst/>
@@ -38233,8 +42526,8 @@
         </p:nvSpPr>
         <p:spPr>
           <a:xfrm>
-            <a:off x="4645152" y="5413248"/>
-            <a:ext cx="6949440" cy="603504"/>
+            <a:off x="9015984" y="5413248"/>
+            <a:ext cx="2578608" cy="603504"/>
           </a:xfrm>
           <a:prstGeom prst="rect">
             <a:avLst/>
@@ -38276,8 +42569,8 @@
         </p:nvSpPr>
         <p:spPr>
           <a:xfrm>
-            <a:off x="4809744" y="5559552"/>
-            <a:ext cx="6620255" cy="292608"/>
+            <a:off x="9180576" y="5559552"/>
+            <a:ext cx="2249424" cy="292608"/>
           </a:xfrm>
           <a:prstGeom prst="rect">
             <a:avLst/>
@@ -38645,7 +42938,7 @@
                 </a:solidFill>
                 <a:latin typeface="Arial"/>
               </a:rPr>
-              <a:t>Карточка товара</a:t>
+              <a:t>Выбор порядка товаров</a:t>
             </a:r>
           </a:p>
         </p:txBody>
@@ -38823,7 +43116,7 @@
                 </a:solidFill>
                 <a:latin typeface="Arial"/>
               </a:rPr>
-              <a:t>Магазин -&gt; Подробнее</a:t>
+              <a:t>Магазин -&gt; Сортировка</a:t>
             </a:r>
           </a:p>
         </p:txBody>
@@ -38836,8 +43129,8 @@
         </p:nvSpPr>
         <p:spPr>
           <a:xfrm>
-            <a:off x="530352" y="2066543"/>
-            <a:ext cx="3822191" cy="4206240"/>
+            <a:off x="438912" y="2066543"/>
+            <a:ext cx="8321040" cy="4206240"/>
           </a:xfrm>
           <a:prstGeom prst="rect">
             <a:avLst/>
@@ -38881,8 +43174,8 @@
         </p:nvSpPr>
         <p:spPr>
           <a:xfrm>
-            <a:off x="530352" y="2066543"/>
-            <a:ext cx="3822191" cy="292608"/>
+            <a:off x="438912" y="2066543"/>
+            <a:ext cx="8321040" cy="292608"/>
           </a:xfrm>
           <a:prstGeom prst="rect">
             <a:avLst/>
@@ -38924,8 +43217,8 @@
         </p:nvSpPr>
         <p:spPr>
           <a:xfrm>
-            <a:off x="658368" y="2121408"/>
-            <a:ext cx="3566159" cy="182880"/>
+            <a:off x="566928" y="2121408"/>
+            <a:ext cx="8065008" cy="182880"/>
           </a:xfrm>
           <a:prstGeom prst="rect">
             <a:avLst/>
@@ -38956,7 +43249,7 @@
                 </a:solidFill>
                 <a:latin typeface="Arial"/>
               </a:rPr>
-              <a:t>Экран на телефоне</a:t>
+              <a:t>Экран приложения</a:t>
             </a:r>
           </a:p>
         </p:txBody>
@@ -38977,8 +43270,8 @@
         </p:blipFill>
         <p:spPr>
           <a:xfrm>
-            <a:off x="1571034" y="2432303"/>
-            <a:ext cx="1740826" cy="3767327"/>
+            <a:off x="1585569" y="2432303"/>
+            <a:ext cx="6027724" cy="3767327"/>
           </a:xfrm>
           <a:prstGeom prst="rect">
             <a:avLst/>
@@ -38993,7 +43286,7 @@
         </p:nvSpPr>
         <p:spPr>
           <a:xfrm>
-            <a:off x="2212848" y="4614793"/>
+            <a:off x="5274990" y="3635288"/>
             <a:ext cx="457200" cy="457200"/>
           </a:xfrm>
           <a:prstGeom prst="ellipse">
@@ -39036,7 +43329,7 @@
         </p:nvSpPr>
         <p:spPr>
           <a:xfrm>
-            <a:off x="2276856" y="4678801"/>
+            <a:off x="5338998" y="3699296"/>
             <a:ext cx="329184" cy="329184"/>
           </a:xfrm>
           <a:prstGeom prst="ellipse">
@@ -39088,7 +43381,7 @@
         </p:nvSpPr>
         <p:spPr>
           <a:xfrm rot="18900000">
-            <a:off x="2532888" y="4953121"/>
+            <a:off x="5595030" y="3973616"/>
             <a:ext cx="256032" cy="365760"/>
           </a:xfrm>
           <a:prstGeom prst="upArrow">
@@ -39133,8 +43426,8 @@
         </p:nvSpPr>
         <p:spPr>
           <a:xfrm>
-            <a:off x="4645152" y="2066543"/>
-            <a:ext cx="6949440" cy="420624"/>
+            <a:off x="9015984" y="2066543"/>
+            <a:ext cx="2578608" cy="420624"/>
           </a:xfrm>
           <a:prstGeom prst="rect">
             <a:avLst/>
@@ -39176,8 +43469,8 @@
         </p:nvSpPr>
         <p:spPr>
           <a:xfrm>
-            <a:off x="4809744" y="2185416"/>
-            <a:ext cx="6620255" cy="164592"/>
+            <a:off x="9180576" y="2185416"/>
+            <a:ext cx="2249424" cy="164592"/>
           </a:xfrm>
           <a:prstGeom prst="rect">
             <a:avLst/>
@@ -39221,8 +43514,8 @@
         </p:nvSpPr>
         <p:spPr>
           <a:xfrm>
-            <a:off x="4645152" y="2596896"/>
-            <a:ext cx="6949440" cy="1499616"/>
+            <a:off x="9015984" y="2596896"/>
+            <a:ext cx="2578608" cy="1499616"/>
           </a:xfrm>
           <a:prstGeom prst="rect">
             <a:avLst/>
@@ -39266,7 +43559,7 @@
         </p:nvSpPr>
         <p:spPr>
           <a:xfrm>
-            <a:off x="4645152" y="2596896"/>
+            <a:off x="9015984" y="2596896"/>
             <a:ext cx="54864" cy="1499616"/>
           </a:xfrm>
           <a:prstGeom prst="rect">
@@ -39309,7 +43602,7 @@
         </p:nvSpPr>
         <p:spPr>
           <a:xfrm>
-            <a:off x="4809744" y="2734056"/>
+            <a:off x="9180576" y="2734056"/>
             <a:ext cx="310896" cy="310896"/>
           </a:xfrm>
           <a:prstGeom prst="roundRect">
@@ -39352,7 +43645,7 @@
         </p:nvSpPr>
         <p:spPr>
           <a:xfrm>
-            <a:off x="4809744" y="2743200"/>
+            <a:off x="9180576" y="2743200"/>
             <a:ext cx="310896" cy="256032"/>
           </a:xfrm>
           <a:prstGeom prst="rect">
@@ -39397,8 +43690,8 @@
         </p:nvSpPr>
         <p:spPr>
           <a:xfrm>
-            <a:off x="5230368" y="2688336"/>
-            <a:ext cx="6217920" cy="310896"/>
+            <a:off x="9601200" y="2688336"/>
+            <a:ext cx="1847087" cy="310896"/>
           </a:xfrm>
           <a:prstGeom prst="rect">
             <a:avLst/>
@@ -39429,7 +43722,7 @@
                 </a:solidFill>
                 <a:latin typeface="Arial"/>
               </a:rPr>
-              <a:t>Выберите количество</a:t>
+              <a:t>Выберите порядок</a:t>
             </a:r>
           </a:p>
         </p:txBody>
@@ -39442,8 +43735,8 @@
         </p:nvSpPr>
         <p:spPr>
           <a:xfrm>
-            <a:off x="5230368" y="3008376"/>
-            <a:ext cx="6217920" cy="1033271"/>
+            <a:off x="9601200" y="3008376"/>
+            <a:ext cx="1847087" cy="1033271"/>
           </a:xfrm>
           <a:prstGeom prst="rect">
             <a:avLst/>
@@ -39474,7 +43767,7 @@
                 </a:solidFill>
                 <a:latin typeface="Arial"/>
               </a:rPr>
-              <a:t>Не превышайте доступный остаток.</a:t>
+              <a:t>Доступны популярность, цена и новизна.</a:t>
             </a:r>
           </a:p>
         </p:txBody>
@@ -39487,8 +43780,8 @@
         </p:nvSpPr>
         <p:spPr>
           <a:xfrm>
-            <a:off x="4645152" y="4315968"/>
-            <a:ext cx="6949440" cy="877824"/>
+            <a:off x="9015984" y="4315968"/>
+            <a:ext cx="2578608" cy="877824"/>
           </a:xfrm>
           <a:prstGeom prst="rect">
             <a:avLst/>
@@ -39530,7 +43823,7 @@
         </p:nvSpPr>
         <p:spPr>
           <a:xfrm>
-            <a:off x="4645152" y="4315968"/>
+            <a:off x="9015984" y="4315968"/>
             <a:ext cx="54864" cy="877824"/>
           </a:xfrm>
           <a:prstGeom prst="rect">
@@ -39573,8 +43866,8 @@
         </p:nvSpPr>
         <p:spPr>
           <a:xfrm>
-            <a:off x="4846320" y="4425696"/>
-            <a:ext cx="6620255" cy="219456"/>
+            <a:off x="9217152" y="4425696"/>
+            <a:ext cx="2249424" cy="219456"/>
           </a:xfrm>
           <a:prstGeom prst="rect">
             <a:avLst/>
@@ -39618,8 +43911,8 @@
         </p:nvSpPr>
         <p:spPr>
           <a:xfrm>
-            <a:off x="4846320" y="4681728"/>
-            <a:ext cx="6620255" cy="402336"/>
+            <a:off x="9217152" y="4681728"/>
+            <a:ext cx="2249424" cy="402336"/>
           </a:xfrm>
           <a:prstGeom prst="rect">
             <a:avLst/>
@@ -39663,8 +43956,8 @@
         </p:nvSpPr>
         <p:spPr>
           <a:xfrm>
-            <a:off x="4645152" y="5413248"/>
-            <a:ext cx="6949440" cy="603504"/>
+            <a:off x="9015984" y="5413248"/>
+            <a:ext cx="2578608" cy="603504"/>
           </a:xfrm>
           <a:prstGeom prst="rect">
             <a:avLst/>
@@ -39706,8 +43999,8 @@
         </p:nvSpPr>
         <p:spPr>
           <a:xfrm>
-            <a:off x="4809744" y="5559552"/>
-            <a:ext cx="6620255" cy="292608"/>
+            <a:off x="9180576" y="5559552"/>
+            <a:ext cx="2249424" cy="292608"/>
           </a:xfrm>
           <a:prstGeom prst="rect">
             <a:avLst/>
